--- a/bank-account-guide.pptx
+++ b/bank-account-guide.pptx
@@ -1391,7 +1391,7 @@
     <p:bg>
       <p:bgPr>
         <a:solidFill>
-          <a:srgbClr val="F5F0E6"/>
+          <a:srgbClr val="1E3A5F"/>
         </a:solidFill>
       </p:bgPr>
     </p:bg>
@@ -1411,14 +1411,34 @@
       </p:grpSpPr>
       <p:sp>
         <p:nvSpPr>
-          <p:cNvPr id="2" name="Text 0"/>
-          <p:cNvSpPr/>
-          <p:nvPr/>
-        </p:nvSpPr>
-        <p:spPr>
-          <a:xfrm>
-            <a:off x="457200" y="2286000"/>
-            <a:ext cx="8686800" cy="914400"/>
+          <p:cNvPr id="2" name="Shape 0"/>
+          <p:cNvSpPr/>
+          <p:nvPr/>
+        </p:nvSpPr>
+        <p:spPr>
+          <a:xfrm>
+            <a:off x="0" y="0"/>
+            <a:ext cx="9144000" cy="137160"/>
+          </a:xfrm>
+          <a:prstGeom prst="rect">
+            <a:avLst/>
+          </a:prstGeom>
+          <a:solidFill>
+            <a:srgbClr val="FF6F00"/>
+          </a:solidFill>
+          <a:ln/>
+        </p:spPr>
+      </p:sp>
+      <p:sp>
+        <p:nvSpPr>
+          <p:cNvPr id="3" name="Text 1"/>
+          <p:cNvSpPr/>
+          <p:nvPr/>
+        </p:nvSpPr>
+        <p:spPr>
+          <a:xfrm>
+            <a:off x="457200" y="1645920"/>
+            <a:ext cx="8229600" cy="1828800"/>
           </a:xfrm>
           <a:prstGeom prst="rect">
             <a:avLst/>
@@ -1431,79 +1451,122 @@
           <a:lstStyle/>
           <a:p>
             <a:pPr algn="ctr" indent="0" marL="0">
-              <a:buNone/>
-            </a:pPr>
-            <a:r>
-              <a:rPr lang="en-US" sz="4400" b="1" dirty="0">
-                <a:solidFill>
-                  <a:srgbClr val="8B4513"/>
-                </a:solidFill>
-              </a:rPr>
-              <a:t>到大陸開銀行卡實用指南</a:t>
-            </a:r>
-            <a:endParaRPr lang="en-US" sz="4400" dirty="0"/>
-          </a:p>
-        </p:txBody>
-      </p:sp>
-      <p:sp>
-        <p:nvSpPr>
-          <p:cNvPr id="3" name="Text 1"/>
-          <p:cNvSpPr/>
-          <p:nvPr/>
-        </p:nvSpPr>
-        <p:spPr>
-          <a:xfrm>
-            <a:off x="457200" y="3474720"/>
-            <a:ext cx="8686800" cy="548640"/>
-          </a:xfrm>
-          <a:prstGeom prst="rect">
-            <a:avLst/>
-          </a:prstGeom>
-          <a:noFill/>
-          <a:ln/>
-        </p:spPr>
-        <p:txBody>
-          <a:bodyPr wrap="square" rtlCol="0" anchor="ctr"/>
-          <a:lstStyle/>
+              <a:lnSpc>
+                <a:spcPts val="5600"/>
+              </a:lnSpc>
+              <a:buNone/>
+            </a:pPr>
+            <a:r>
+              <a:rPr lang="en-US" sz="5200" b="1" dirty="0">
+                <a:solidFill>
+                  <a:srgbClr val="FFFFFF"/>
+                </a:solidFill>
+              </a:rPr>
+              <a:t>到大陸開銀行卡</a:t>
+            </a:r>
+            <a:endParaRPr lang="en-US" sz="5200" dirty="0"/>
+          </a:p>
           <a:p>
             <a:pPr algn="ctr" indent="0" marL="0">
-              <a:buNone/>
-            </a:pPr>
-            <a:r>
-              <a:rPr lang="en-US" sz="2400" dirty="0">
-                <a:solidFill>
-                  <a:srgbClr val="654321"/>
+              <a:lnSpc>
+                <a:spcPts val="5600"/>
+              </a:lnSpc>
+              <a:buNone/>
+            </a:pPr>
+            <a:r>
+              <a:rPr lang="en-US" sz="5200" b="1" dirty="0">
+                <a:solidFill>
+                  <a:srgbClr val="FFFFFF"/>
+                </a:solidFill>
+              </a:rPr>
+              <a:t>實用指南</a:t>
+            </a:r>
+            <a:endParaRPr lang="en-US" sz="5200" dirty="0"/>
+          </a:p>
+        </p:txBody>
+      </p:sp>
+      <p:sp>
+        <p:nvSpPr>
+          <p:cNvPr id="4" name="Text 2"/>
+          <p:cNvSpPr/>
+          <p:nvPr/>
+        </p:nvSpPr>
+        <p:spPr>
+          <a:xfrm>
+            <a:off x="457200" y="3657600"/>
+            <a:ext cx="8229600" cy="548640"/>
+          </a:xfrm>
+          <a:prstGeom prst="rect">
+            <a:avLst/>
+          </a:prstGeom>
+          <a:noFill/>
+          <a:ln/>
+        </p:spPr>
+        <p:txBody>
+          <a:bodyPr wrap="square" rtlCol="0" anchor="ctr"/>
+          <a:lstStyle/>
+          <a:p>
+            <a:pPr algn="ctr" indent="0" marL="0">
+              <a:buNone/>
+            </a:pPr>
+            <a:r>
+              <a:rPr lang="en-US" sz="2200" dirty="0">
+                <a:solidFill>
+                  <a:srgbClr val="E3F2FD"/>
                 </a:solidFill>
               </a:rPr>
               <a:t>台灣居民赴中國大陸開戶完整攻略</a:t>
             </a:r>
-            <a:endParaRPr lang="en-US" sz="2400" dirty="0"/>
-          </a:p>
-        </p:txBody>
-      </p:sp>
-      <p:sp>
-        <p:nvSpPr>
-          <p:cNvPr id="4" name="Shape 2"/>
+            <a:endParaRPr lang="en-US" sz="2200" dirty="0"/>
+          </a:p>
+        </p:txBody>
+      </p:sp>
+      <p:sp>
+        <p:nvSpPr>
+          <p:cNvPr id="5" name="Shape 3"/>
+          <p:cNvSpPr/>
+          <p:nvPr/>
+        </p:nvSpPr>
+        <p:spPr>
+          <a:xfrm>
+            <a:off x="2743200" y="4389120"/>
+            <a:ext cx="6400800" cy="0"/>
+          </a:xfrm>
+          <a:prstGeom prst="line">
+            <a:avLst/>
+          </a:prstGeom>
+          <a:noFill/>
+          <a:ln w="38100">
+            <a:solidFill>
+              <a:srgbClr val="FF6F00"/>
+            </a:solidFill>
+            <a:prstDash val="solid"/>
+          </a:ln>
+        </p:spPr>
+      </p:sp>
+      <p:sp>
+        <p:nvSpPr>
+          <p:cNvPr id="6" name="Shape 4"/>
           <p:cNvSpPr/>
           <p:nvPr/>
         </p:nvSpPr>
         <p:spPr>
           <a:xfrm>
             <a:off x="0" y="5303520"/>
-            <a:ext cx="9144000" cy="1554480"/>
-          </a:xfrm>
-          <a:prstGeom prst="rect">
-            <a:avLst/>
-          </a:prstGeom>
-          <a:solidFill>
-            <a:srgbClr val="8B4513"/>
-          </a:solidFill>
-          <a:ln/>
-        </p:spPr>
-      </p:sp>
-      <p:sp>
-        <p:nvSpPr>
-          <p:cNvPr id="5" name="Text 3"/>
+            <a:ext cx="9144000" cy="1097280"/>
+          </a:xfrm>
+          <a:prstGeom prst="rect">
+            <a:avLst/>
+          </a:prstGeom>
+          <a:solidFill>
+            <a:srgbClr val="0D2847"/>
+          </a:solidFill>
+          <a:ln/>
+        </p:spPr>
+      </p:sp>
+      <p:sp>
+        <p:nvSpPr>
+          <p:cNvPr id="7" name="Text 5"/>
           <p:cNvSpPr/>
           <p:nvPr/>
         </p:nvSpPr>
@@ -1531,7 +1594,7 @@
                   <a:srgbClr val="FFFFFF"/>
                 </a:solidFill>
               </a:rPr>
-              <a:t>📍 建議收藏 以備不時之需</a:t>
+              <a:t>📋 建議收藏 以備不時之需</a:t>
             </a:r>
             <a:endParaRPr lang="en-US" sz="2000" dirty="0"/>
           </a:p>
@@ -1551,7 +1614,7 @@
     <p:bg>
       <p:bgPr>
         <a:solidFill>
-          <a:srgbClr val="F5F0E6"/>
+          <a:srgbClr val="F5F5F5"/>
         </a:solidFill>
       </p:bgPr>
     </p:bg>
@@ -1571,50 +1634,70 @@
       </p:grpSpPr>
       <p:sp>
         <p:nvSpPr>
-          <p:cNvPr id="2" name="Text 0"/>
-          <p:cNvSpPr/>
-          <p:nvPr/>
-        </p:nvSpPr>
-        <p:spPr>
-          <a:xfrm>
-            <a:off x="457200" y="274320"/>
-            <a:ext cx="8686800" cy="731520"/>
-          </a:xfrm>
-          <a:prstGeom prst="rect">
-            <a:avLst/>
-          </a:prstGeom>
-          <a:noFill/>
-          <a:ln/>
-        </p:spPr>
-        <p:txBody>
-          <a:bodyPr wrap="square" rtlCol="0" anchor="ctr"/>
-          <a:lstStyle/>
-          <a:p>
-            <a:pPr indent="0" marL="0">
-              <a:buNone/>
-            </a:pPr>
-            <a:r>
-              <a:rPr lang="en-US" sz="3600" b="1" dirty="0">
-                <a:solidFill>
-                  <a:srgbClr val="8B4513"/>
+          <p:cNvPr id="2" name="Shape 0"/>
+          <p:cNvSpPr/>
+          <p:nvPr/>
+        </p:nvSpPr>
+        <p:spPr>
+          <a:xfrm>
+            <a:off x="0" y="0"/>
+            <a:ext cx="9144000" cy="914400"/>
+          </a:xfrm>
+          <a:prstGeom prst="rect">
+            <a:avLst/>
+          </a:prstGeom>
+          <a:solidFill>
+            <a:srgbClr val="1E3A5F"/>
+          </a:solidFill>
+          <a:ln/>
+        </p:spPr>
+      </p:sp>
+      <p:sp>
+        <p:nvSpPr>
+          <p:cNvPr id="3" name="Text 1"/>
+          <p:cNvSpPr/>
+          <p:nvPr/>
+        </p:nvSpPr>
+        <p:spPr>
+          <a:xfrm>
+            <a:off x="457200" y="182880"/>
+            <a:ext cx="8686800" cy="548640"/>
+          </a:xfrm>
+          <a:prstGeom prst="rect">
+            <a:avLst/>
+          </a:prstGeom>
+          <a:noFill/>
+          <a:ln/>
+        </p:spPr>
+        <p:txBody>
+          <a:bodyPr wrap="square" rtlCol="0" anchor="ctr"/>
+          <a:lstStyle/>
+          <a:p>
+            <a:pPr indent="0" marL="0">
+              <a:buNone/>
+            </a:pPr>
+            <a:r>
+              <a:rPr lang="en-US" sz="3200" b="1" dirty="0">
+                <a:solidFill>
+                  <a:srgbClr val="FFFFFF"/>
                 </a:solidFill>
               </a:rPr>
               <a:t>📋 前提準備</a:t>
             </a:r>
-            <a:endParaRPr lang="en-US" sz="3600" dirty="0"/>
-          </a:p>
-        </p:txBody>
-      </p:sp>
-      <p:sp>
-        <p:nvSpPr>
-          <p:cNvPr id="3" name="Shape 1"/>
+            <a:endParaRPr lang="en-US" sz="3200" dirty="0"/>
+          </a:p>
+        </p:txBody>
+      </p:sp>
+      <p:sp>
+        <p:nvSpPr>
+          <p:cNvPr id="4" name="Shape 2"/>
           <p:cNvSpPr/>
           <p:nvPr/>
         </p:nvSpPr>
         <p:spPr>
           <a:xfrm>
             <a:off x="457200" y="1188720"/>
-            <a:ext cx="8686800" cy="640080"/>
+            <a:ext cx="3657600" cy="1645920"/>
           </a:xfrm>
           <a:prstGeom prst="roundRect">
             <a:avLst/>
@@ -1624,7 +1707,7 @@
           </a:solidFill>
           <a:ln w="12700">
             <a:solidFill>
-              <a:srgbClr val="8B4513"/>
+              <a:srgbClr val="1E3A5F"/>
             </a:solidFill>
             <a:prstDash val="solid"/>
           </a:ln>
@@ -1632,50 +1715,100 @@
       </p:sp>
       <p:sp>
         <p:nvSpPr>
-          <p:cNvPr id="4" name="Text 2"/>
-          <p:cNvSpPr/>
-          <p:nvPr/>
-        </p:nvSpPr>
-        <p:spPr>
-          <a:xfrm>
-            <a:off x="731520" y="1325880"/>
-            <a:ext cx="8229600" cy="457200"/>
-          </a:xfrm>
-          <a:prstGeom prst="rect">
-            <a:avLst/>
-          </a:prstGeom>
-          <a:noFill/>
-          <a:ln/>
-        </p:spPr>
-        <p:txBody>
-          <a:bodyPr wrap="square" rtlCol="0" anchor="ctr"/>
-          <a:lstStyle/>
-          <a:p>
-            <a:pPr indent="0" marL="0">
-              <a:buNone/>
-            </a:pPr>
-            <a:r>
-              <a:rPr lang="en-US" sz="1800" dirty="0">
-                <a:solidFill>
-                  <a:srgbClr val="333333"/>
-                </a:solidFill>
-              </a:rPr>
-              <a:t>📕 大陸通行證（回鄉證）- 有效期內</a:t>
-            </a:r>
-            <a:endParaRPr lang="en-US" sz="1800" dirty="0"/>
-          </a:p>
-        </p:txBody>
-      </p:sp>
-      <p:sp>
-        <p:nvSpPr>
-          <p:cNvPr id="5" name="Shape 3"/>
-          <p:cNvSpPr/>
-          <p:nvPr/>
-        </p:nvSpPr>
-        <p:spPr>
-          <a:xfrm>
-            <a:off x="457200" y="1965960"/>
-            <a:ext cx="8686800" cy="640080"/>
+          <p:cNvPr id="5" name="Text 3"/>
+          <p:cNvSpPr/>
+          <p:nvPr/>
+        </p:nvSpPr>
+        <p:spPr>
+          <a:xfrm>
+            <a:off x="731520" y="1463040"/>
+            <a:ext cx="731520" cy="731520"/>
+          </a:xfrm>
+          <a:prstGeom prst="rect">
+            <a:avLst/>
+          </a:prstGeom>
+          <a:noFill/>
+          <a:ln/>
+        </p:spPr>
+        <p:txBody>
+          <a:bodyPr wrap="square" rtlCol="0" anchor="ctr"/>
+          <a:lstStyle/>
+          <a:p>
+            <a:pPr indent="0" marL="0">
+              <a:buNone/>
+            </a:pPr>
+            <a:r>
+              <a:rPr lang="en-US" sz="3200" dirty="0">
+                <a:solidFill>
+                  <a:srgbClr val="000000"/>
+                </a:solidFill>
+              </a:rPr>
+              <a:t>📕</a:t>
+            </a:r>
+            <a:endParaRPr lang="en-US" sz="3200" dirty="0"/>
+          </a:p>
+        </p:txBody>
+      </p:sp>
+      <p:sp>
+        <p:nvSpPr>
+          <p:cNvPr id="6" name="Text 4"/>
+          <p:cNvSpPr/>
+          <p:nvPr/>
+        </p:nvSpPr>
+        <p:spPr>
+          <a:xfrm>
+            <a:off x="1554480" y="1554480"/>
+            <a:ext cx="2286000" cy="1097280"/>
+          </a:xfrm>
+          <a:prstGeom prst="rect">
+            <a:avLst/>
+          </a:prstGeom>
+          <a:noFill/>
+          <a:ln/>
+        </p:spPr>
+        <p:txBody>
+          <a:bodyPr wrap="square" rtlCol="0" anchor="ctr"/>
+          <a:lstStyle/>
+          <a:p>
+            <a:pPr indent="0" marL="0">
+              <a:buNone/>
+            </a:pPr>
+            <a:r>
+              <a:rPr lang="en-US" sz="1400" dirty="0">
+                <a:solidFill>
+                  <a:srgbClr val="1A1A1A"/>
+                </a:solidFill>
+              </a:rPr>
+              <a:t>大陸通行證（回鄉證）</a:t>
+            </a:r>
+            <a:endParaRPr lang="en-US" sz="1400" dirty="0"/>
+          </a:p>
+          <a:p>
+            <a:pPr indent="0" marL="0">
+              <a:buNone/>
+            </a:pPr>
+            <a:r>
+              <a:rPr lang="en-US" sz="1400" dirty="0">
+                <a:solidFill>
+                  <a:srgbClr val="1A1A1A"/>
+                </a:solidFill>
+              </a:rPr>
+              <a:t>有效期內</a:t>
+            </a:r>
+            <a:endParaRPr lang="en-US" sz="1400" dirty="0"/>
+          </a:p>
+        </p:txBody>
+      </p:sp>
+      <p:sp>
+        <p:nvSpPr>
+          <p:cNvPr id="7" name="Shape 5"/>
+          <p:cNvSpPr/>
+          <p:nvPr/>
+        </p:nvSpPr>
+        <p:spPr>
+          <a:xfrm>
+            <a:off x="4389120" y="1188720"/>
+            <a:ext cx="3657600" cy="1645920"/>
           </a:xfrm>
           <a:prstGeom prst="roundRect">
             <a:avLst/>
@@ -1685,7 +1818,7 @@
           </a:solidFill>
           <a:ln w="12700">
             <a:solidFill>
-              <a:srgbClr val="8B4513"/>
+              <a:srgbClr val="1E3A5F"/>
             </a:solidFill>
             <a:prstDash val="solid"/>
           </a:ln>
@@ -1693,50 +1826,100 @@
       </p:sp>
       <p:sp>
         <p:nvSpPr>
-          <p:cNvPr id="6" name="Text 4"/>
-          <p:cNvSpPr/>
-          <p:nvPr/>
-        </p:nvSpPr>
-        <p:spPr>
-          <a:xfrm>
-            <a:off x="731520" y="2103120"/>
-            <a:ext cx="8229600" cy="457200"/>
-          </a:xfrm>
-          <a:prstGeom prst="rect">
-            <a:avLst/>
-          </a:prstGeom>
-          <a:noFill/>
-          <a:ln/>
-        </p:spPr>
-        <p:txBody>
-          <a:bodyPr wrap="square" rtlCol="0" anchor="ctr"/>
-          <a:lstStyle/>
-          <a:p>
-            <a:pPr indent="0" marL="0">
-              <a:buNone/>
-            </a:pPr>
-            <a:r>
-              <a:rPr lang="en-US" sz="1800" dirty="0">
-                <a:solidFill>
-                  <a:srgbClr val="333333"/>
-                </a:solidFill>
-              </a:rPr>
-              <a:t>📗 台胞證 - 台灣居民來往大陸通行證</a:t>
-            </a:r>
-            <a:endParaRPr lang="en-US" sz="1800" dirty="0"/>
-          </a:p>
-        </p:txBody>
-      </p:sp>
-      <p:sp>
-        <p:nvSpPr>
-          <p:cNvPr id="7" name="Shape 5"/>
-          <p:cNvSpPr/>
-          <p:nvPr/>
-        </p:nvSpPr>
-        <p:spPr>
-          <a:xfrm>
-            <a:off x="457200" y="2743200"/>
-            <a:ext cx="8686800" cy="640080"/>
+          <p:cNvPr id="8" name="Text 6"/>
+          <p:cNvSpPr/>
+          <p:nvPr/>
+        </p:nvSpPr>
+        <p:spPr>
+          <a:xfrm>
+            <a:off x="4663440" y="1463040"/>
+            <a:ext cx="731520" cy="731520"/>
+          </a:xfrm>
+          <a:prstGeom prst="rect">
+            <a:avLst/>
+          </a:prstGeom>
+          <a:noFill/>
+          <a:ln/>
+        </p:spPr>
+        <p:txBody>
+          <a:bodyPr wrap="square" rtlCol="0" anchor="ctr"/>
+          <a:lstStyle/>
+          <a:p>
+            <a:pPr indent="0" marL="0">
+              <a:buNone/>
+            </a:pPr>
+            <a:r>
+              <a:rPr lang="en-US" sz="3200" dirty="0">
+                <a:solidFill>
+                  <a:srgbClr val="000000"/>
+                </a:solidFill>
+              </a:rPr>
+              <a:t>📗</a:t>
+            </a:r>
+            <a:endParaRPr lang="en-US" sz="3200" dirty="0"/>
+          </a:p>
+        </p:txBody>
+      </p:sp>
+      <p:sp>
+        <p:nvSpPr>
+          <p:cNvPr id="9" name="Text 7"/>
+          <p:cNvSpPr/>
+          <p:nvPr/>
+        </p:nvSpPr>
+        <p:spPr>
+          <a:xfrm>
+            <a:off x="5486400" y="1554480"/>
+            <a:ext cx="2286000" cy="1097280"/>
+          </a:xfrm>
+          <a:prstGeom prst="rect">
+            <a:avLst/>
+          </a:prstGeom>
+          <a:noFill/>
+          <a:ln/>
+        </p:spPr>
+        <p:txBody>
+          <a:bodyPr wrap="square" rtlCol="0" anchor="ctr"/>
+          <a:lstStyle/>
+          <a:p>
+            <a:pPr indent="0" marL="0">
+              <a:buNone/>
+            </a:pPr>
+            <a:r>
+              <a:rPr lang="en-US" sz="1400" dirty="0">
+                <a:solidFill>
+                  <a:srgbClr val="1A1A1A"/>
+                </a:solidFill>
+              </a:rPr>
+              <a:t>台胞證</a:t>
+            </a:r>
+            <a:endParaRPr lang="en-US" sz="1400" dirty="0"/>
+          </a:p>
+          <a:p>
+            <a:pPr indent="0" marL="0">
+              <a:buNone/>
+            </a:pPr>
+            <a:r>
+              <a:rPr lang="en-US" sz="1400" dirty="0">
+                <a:solidFill>
+                  <a:srgbClr val="1A1A1A"/>
+                </a:solidFill>
+              </a:rPr>
+              <a:t>台灣居民來往大陸通行證</a:t>
+            </a:r>
+            <a:endParaRPr lang="en-US" sz="1400" dirty="0"/>
+          </a:p>
+        </p:txBody>
+      </p:sp>
+      <p:sp>
+        <p:nvSpPr>
+          <p:cNvPr id="10" name="Shape 8"/>
+          <p:cNvSpPr/>
+          <p:nvPr/>
+        </p:nvSpPr>
+        <p:spPr>
+          <a:xfrm>
+            <a:off x="457200" y="3108960"/>
+            <a:ext cx="3657600" cy="1645920"/>
           </a:xfrm>
           <a:prstGeom prst="roundRect">
             <a:avLst/>
@@ -1746,7 +1929,7 @@
           </a:solidFill>
           <a:ln w="12700">
             <a:solidFill>
-              <a:srgbClr val="8B4513"/>
+              <a:srgbClr val="1E3A5F"/>
             </a:solidFill>
             <a:prstDash val="solid"/>
           </a:ln>
@@ -1754,50 +1937,100 @@
       </p:sp>
       <p:sp>
         <p:nvSpPr>
-          <p:cNvPr id="8" name="Text 6"/>
-          <p:cNvSpPr/>
-          <p:nvPr/>
-        </p:nvSpPr>
-        <p:spPr>
-          <a:xfrm>
-            <a:off x="731520" y="2880360"/>
-            <a:ext cx="8229600" cy="457200"/>
-          </a:xfrm>
-          <a:prstGeom prst="rect">
-            <a:avLst/>
-          </a:prstGeom>
-          <a:noFill/>
-          <a:ln/>
-        </p:spPr>
-        <p:txBody>
-          <a:bodyPr wrap="square" rtlCol="0" anchor="ctr"/>
-          <a:lstStyle/>
-          <a:p>
-            <a:pPr indent="0" marL="0">
-              <a:buNone/>
-            </a:pPr>
-            <a:r>
-              <a:rPr lang="en-US" sz="1800" dirty="0">
-                <a:solidFill>
-                  <a:srgbClr val="333333"/>
-                </a:solidFill>
-              </a:rPr>
-              <a:t>🏠 居住證明（酒店預訂/租房合約/工作證明）</a:t>
-            </a:r>
-            <a:endParaRPr lang="en-US" sz="1800" dirty="0"/>
-          </a:p>
-        </p:txBody>
-      </p:sp>
-      <p:sp>
-        <p:nvSpPr>
-          <p:cNvPr id="9" name="Shape 7"/>
-          <p:cNvSpPr/>
-          <p:nvPr/>
-        </p:nvSpPr>
-        <p:spPr>
-          <a:xfrm>
-            <a:off x="457200" y="3520440"/>
-            <a:ext cx="8686800" cy="640080"/>
+          <p:cNvPr id="11" name="Text 9"/>
+          <p:cNvSpPr/>
+          <p:nvPr/>
+        </p:nvSpPr>
+        <p:spPr>
+          <a:xfrm>
+            <a:off x="731520" y="3383280"/>
+            <a:ext cx="731520" cy="731520"/>
+          </a:xfrm>
+          <a:prstGeom prst="rect">
+            <a:avLst/>
+          </a:prstGeom>
+          <a:noFill/>
+          <a:ln/>
+        </p:spPr>
+        <p:txBody>
+          <a:bodyPr wrap="square" rtlCol="0" anchor="ctr"/>
+          <a:lstStyle/>
+          <a:p>
+            <a:pPr indent="0" marL="0">
+              <a:buNone/>
+            </a:pPr>
+            <a:r>
+              <a:rPr lang="en-US" sz="3200" dirty="0">
+                <a:solidFill>
+                  <a:srgbClr val="000000"/>
+                </a:solidFill>
+              </a:rPr>
+              <a:t>🏠</a:t>
+            </a:r>
+            <a:endParaRPr lang="en-US" sz="3200" dirty="0"/>
+          </a:p>
+        </p:txBody>
+      </p:sp>
+      <p:sp>
+        <p:nvSpPr>
+          <p:cNvPr id="12" name="Text 10"/>
+          <p:cNvSpPr/>
+          <p:nvPr/>
+        </p:nvSpPr>
+        <p:spPr>
+          <a:xfrm>
+            <a:off x="1554480" y="3474720"/>
+            <a:ext cx="2286000" cy="1097280"/>
+          </a:xfrm>
+          <a:prstGeom prst="rect">
+            <a:avLst/>
+          </a:prstGeom>
+          <a:noFill/>
+          <a:ln/>
+        </p:spPr>
+        <p:txBody>
+          <a:bodyPr wrap="square" rtlCol="0" anchor="ctr"/>
+          <a:lstStyle/>
+          <a:p>
+            <a:pPr indent="0" marL="0">
+              <a:buNone/>
+            </a:pPr>
+            <a:r>
+              <a:rPr lang="en-US" sz="1400" dirty="0">
+                <a:solidFill>
+                  <a:srgbClr val="1A1A1A"/>
+                </a:solidFill>
+              </a:rPr>
+              <a:t>居住證明</a:t>
+            </a:r>
+            <a:endParaRPr lang="en-US" sz="1400" dirty="0"/>
+          </a:p>
+          <a:p>
+            <a:pPr indent="0" marL="0">
+              <a:buNone/>
+            </a:pPr>
+            <a:r>
+              <a:rPr lang="en-US" sz="1400" dirty="0">
+                <a:solidFill>
+                  <a:srgbClr val="1A1A1A"/>
+                </a:solidFill>
+              </a:rPr>
+              <a:t>酒店預訂/租房合約/工作證明</a:t>
+            </a:r>
+            <a:endParaRPr lang="en-US" sz="1400" dirty="0"/>
+          </a:p>
+        </p:txBody>
+      </p:sp>
+      <p:sp>
+        <p:nvSpPr>
+          <p:cNvPr id="13" name="Shape 11"/>
+          <p:cNvSpPr/>
+          <p:nvPr/>
+        </p:nvSpPr>
+        <p:spPr>
+          <a:xfrm>
+            <a:off x="4389120" y="3108960"/>
+            <a:ext cx="3657600" cy="1645920"/>
           </a:xfrm>
           <a:prstGeom prst="roundRect">
             <a:avLst/>
@@ -1807,7 +2040,7 @@
           </a:solidFill>
           <a:ln w="12700">
             <a:solidFill>
-              <a:srgbClr val="8B4513"/>
+              <a:srgbClr val="1E3A5F"/>
             </a:solidFill>
             <a:prstDash val="solid"/>
           </a:ln>
@@ -1815,50 +2048,100 @@
       </p:sp>
       <p:sp>
         <p:nvSpPr>
-          <p:cNvPr id="10" name="Text 8"/>
-          <p:cNvSpPr/>
-          <p:nvPr/>
-        </p:nvSpPr>
-        <p:spPr>
-          <a:xfrm>
-            <a:off x="731520" y="3657600"/>
-            <a:ext cx="8229600" cy="457200"/>
-          </a:xfrm>
-          <a:prstGeom prst="rect">
-            <a:avLst/>
-          </a:prstGeom>
-          <a:noFill/>
-          <a:ln/>
-        </p:spPr>
-        <p:txBody>
-          <a:bodyPr wrap="square" rtlCol="0" anchor="ctr"/>
-          <a:lstStyle/>
-          <a:p>
-            <a:pPr indent="0" marL="0">
-              <a:buNone/>
-            </a:pPr>
-            <a:r>
-              <a:rPr lang="en-US" sz="1800" dirty="0">
-                <a:solidFill>
-                  <a:srgbClr val="333333"/>
-                </a:solidFill>
-              </a:rPr>
-              <a:t>📱 大陸手機號碼（必須，接收驗證碼）</a:t>
-            </a:r>
-            <a:endParaRPr lang="en-US" sz="1800" dirty="0"/>
-          </a:p>
-        </p:txBody>
-      </p:sp>
-      <p:sp>
-        <p:nvSpPr>
-          <p:cNvPr id="11" name="Shape 9"/>
-          <p:cNvSpPr/>
-          <p:nvPr/>
-        </p:nvSpPr>
-        <p:spPr>
-          <a:xfrm>
-            <a:off x="457200" y="4297680"/>
-            <a:ext cx="8686800" cy="640080"/>
+          <p:cNvPr id="14" name="Text 12"/>
+          <p:cNvSpPr/>
+          <p:nvPr/>
+        </p:nvSpPr>
+        <p:spPr>
+          <a:xfrm>
+            <a:off x="4663440" y="3383280"/>
+            <a:ext cx="731520" cy="731520"/>
+          </a:xfrm>
+          <a:prstGeom prst="rect">
+            <a:avLst/>
+          </a:prstGeom>
+          <a:noFill/>
+          <a:ln/>
+        </p:spPr>
+        <p:txBody>
+          <a:bodyPr wrap="square" rtlCol="0" anchor="ctr"/>
+          <a:lstStyle/>
+          <a:p>
+            <a:pPr indent="0" marL="0">
+              <a:buNone/>
+            </a:pPr>
+            <a:r>
+              <a:rPr lang="en-US" sz="3200" dirty="0">
+                <a:solidFill>
+                  <a:srgbClr val="000000"/>
+                </a:solidFill>
+              </a:rPr>
+              <a:t>📱</a:t>
+            </a:r>
+            <a:endParaRPr lang="en-US" sz="3200" dirty="0"/>
+          </a:p>
+        </p:txBody>
+      </p:sp>
+      <p:sp>
+        <p:nvSpPr>
+          <p:cNvPr id="15" name="Text 13"/>
+          <p:cNvSpPr/>
+          <p:nvPr/>
+        </p:nvSpPr>
+        <p:spPr>
+          <a:xfrm>
+            <a:off x="5486400" y="3474720"/>
+            <a:ext cx="2286000" cy="1097280"/>
+          </a:xfrm>
+          <a:prstGeom prst="rect">
+            <a:avLst/>
+          </a:prstGeom>
+          <a:noFill/>
+          <a:ln/>
+        </p:spPr>
+        <p:txBody>
+          <a:bodyPr wrap="square" rtlCol="0" anchor="ctr"/>
+          <a:lstStyle/>
+          <a:p>
+            <a:pPr indent="0" marL="0">
+              <a:buNone/>
+            </a:pPr>
+            <a:r>
+              <a:rPr lang="en-US" sz="1400" dirty="0">
+                <a:solidFill>
+                  <a:srgbClr val="1A1A1A"/>
+                </a:solidFill>
+              </a:rPr>
+              <a:t>大陸手機號碼</a:t>
+            </a:r>
+            <a:endParaRPr lang="en-US" sz="1400" dirty="0"/>
+          </a:p>
+          <a:p>
+            <a:pPr indent="0" marL="0">
+              <a:buNone/>
+            </a:pPr>
+            <a:r>
+              <a:rPr lang="en-US" sz="1400" dirty="0">
+                <a:solidFill>
+                  <a:srgbClr val="1A1A1A"/>
+                </a:solidFill>
+              </a:rPr>
+              <a:t>必須，接收驗證碼</a:t>
+            </a:r>
+            <a:endParaRPr lang="en-US" sz="1400" dirty="0"/>
+          </a:p>
+        </p:txBody>
+      </p:sp>
+      <p:sp>
+        <p:nvSpPr>
+          <p:cNvPr id="16" name="Shape 14"/>
+          <p:cNvSpPr/>
+          <p:nvPr/>
+        </p:nvSpPr>
+        <p:spPr>
+          <a:xfrm>
+            <a:off x="457200" y="5029200"/>
+            <a:ext cx="3657600" cy="1645920"/>
           </a:xfrm>
           <a:prstGeom prst="roundRect">
             <a:avLst/>
@@ -1868,7 +2151,7 @@
           </a:solidFill>
           <a:ln w="12700">
             <a:solidFill>
-              <a:srgbClr val="8B4513"/>
+              <a:srgbClr val="1E3A5F"/>
             </a:solidFill>
             <a:prstDash val="solid"/>
           </a:ln>
@@ -1876,50 +2159,100 @@
       </p:sp>
       <p:sp>
         <p:nvSpPr>
-          <p:cNvPr id="12" name="Text 10"/>
-          <p:cNvSpPr/>
-          <p:nvPr/>
-        </p:nvSpPr>
-        <p:spPr>
-          <a:xfrm>
-            <a:off x="731520" y="4434840"/>
-            <a:ext cx="8229600" cy="457200"/>
-          </a:xfrm>
-          <a:prstGeom prst="rect">
-            <a:avLst/>
-          </a:prstGeom>
-          <a:noFill/>
-          <a:ln/>
-        </p:spPr>
-        <p:txBody>
-          <a:bodyPr wrap="square" rtlCol="0" anchor="ctr"/>
-          <a:lstStyle/>
-          <a:p>
-            <a:pPr indent="0" marL="0">
-              <a:buNone/>
-            </a:pPr>
-            <a:r>
-              <a:rPr lang="en-US" sz="1800" dirty="0">
-                <a:solidFill>
-                  <a:srgbClr val="333333"/>
-                </a:solidFill>
-              </a:rPr>
-              <a:t>👤 基本聯繫方式（地址、緊急聯繫人）</a:t>
-            </a:r>
-            <a:endParaRPr lang="en-US" sz="1800" dirty="0"/>
-          </a:p>
-        </p:txBody>
-      </p:sp>
-      <p:sp>
-        <p:nvSpPr>
-          <p:cNvPr id="13" name="Shape 11"/>
-          <p:cNvSpPr/>
-          <p:nvPr/>
-        </p:nvSpPr>
-        <p:spPr>
-          <a:xfrm>
-            <a:off x="457200" y="5074920"/>
-            <a:ext cx="8686800" cy="640080"/>
+          <p:cNvPr id="17" name="Text 15"/>
+          <p:cNvSpPr/>
+          <p:nvPr/>
+        </p:nvSpPr>
+        <p:spPr>
+          <a:xfrm>
+            <a:off x="731520" y="5303520"/>
+            <a:ext cx="731520" cy="731520"/>
+          </a:xfrm>
+          <a:prstGeom prst="rect">
+            <a:avLst/>
+          </a:prstGeom>
+          <a:noFill/>
+          <a:ln/>
+        </p:spPr>
+        <p:txBody>
+          <a:bodyPr wrap="square" rtlCol="0" anchor="ctr"/>
+          <a:lstStyle/>
+          <a:p>
+            <a:pPr indent="0" marL="0">
+              <a:buNone/>
+            </a:pPr>
+            <a:r>
+              <a:rPr lang="en-US" sz="3200" dirty="0">
+                <a:solidFill>
+                  <a:srgbClr val="000000"/>
+                </a:solidFill>
+              </a:rPr>
+              <a:t>👤</a:t>
+            </a:r>
+            <a:endParaRPr lang="en-US" sz="3200" dirty="0"/>
+          </a:p>
+        </p:txBody>
+      </p:sp>
+      <p:sp>
+        <p:nvSpPr>
+          <p:cNvPr id="18" name="Text 16"/>
+          <p:cNvSpPr/>
+          <p:nvPr/>
+        </p:nvSpPr>
+        <p:spPr>
+          <a:xfrm>
+            <a:off x="1554480" y="5394960"/>
+            <a:ext cx="2286000" cy="1097280"/>
+          </a:xfrm>
+          <a:prstGeom prst="rect">
+            <a:avLst/>
+          </a:prstGeom>
+          <a:noFill/>
+          <a:ln/>
+        </p:spPr>
+        <p:txBody>
+          <a:bodyPr wrap="square" rtlCol="0" anchor="ctr"/>
+          <a:lstStyle/>
+          <a:p>
+            <a:pPr indent="0" marL="0">
+              <a:buNone/>
+            </a:pPr>
+            <a:r>
+              <a:rPr lang="en-US" sz="1400" dirty="0">
+                <a:solidFill>
+                  <a:srgbClr val="1A1A1A"/>
+                </a:solidFill>
+              </a:rPr>
+              <a:t>基本聯繫方式</a:t>
+            </a:r>
+            <a:endParaRPr lang="en-US" sz="1400" dirty="0"/>
+          </a:p>
+          <a:p>
+            <a:pPr indent="0" marL="0">
+              <a:buNone/>
+            </a:pPr>
+            <a:r>
+              <a:rPr lang="en-US" sz="1400" dirty="0">
+                <a:solidFill>
+                  <a:srgbClr val="1A1A1A"/>
+                </a:solidFill>
+              </a:rPr>
+              <a:t>地址、緊急聯繫人</a:t>
+            </a:r>
+            <a:endParaRPr lang="en-US" sz="1400" dirty="0"/>
+          </a:p>
+        </p:txBody>
+      </p:sp>
+      <p:sp>
+        <p:nvSpPr>
+          <p:cNvPr id="19" name="Shape 17"/>
+          <p:cNvSpPr/>
+          <p:nvPr/>
+        </p:nvSpPr>
+        <p:spPr>
+          <a:xfrm>
+            <a:off x="4389120" y="5029200"/>
+            <a:ext cx="3657600" cy="1645920"/>
           </a:xfrm>
           <a:prstGeom prst="roundRect">
             <a:avLst/>
@@ -1929,7 +2262,7 @@
           </a:solidFill>
           <a:ln w="12700">
             <a:solidFill>
-              <a:srgbClr val="8B4513"/>
+              <a:srgbClr val="1E3A5F"/>
             </a:solidFill>
             <a:prstDash val="solid"/>
           </a:ln>
@@ -1937,37 +2270,87 @@
       </p:sp>
       <p:sp>
         <p:nvSpPr>
-          <p:cNvPr id="14" name="Text 12"/>
-          <p:cNvSpPr/>
-          <p:nvPr/>
-        </p:nvSpPr>
-        <p:spPr>
-          <a:xfrm>
-            <a:off x="731520" y="5212080"/>
-            <a:ext cx="8229600" cy="457200"/>
-          </a:xfrm>
-          <a:prstGeom prst="rect">
-            <a:avLst/>
-          </a:prstGeom>
-          <a:noFill/>
-          <a:ln/>
-        </p:spPr>
-        <p:txBody>
-          <a:bodyPr wrap="square" rtlCol="0" anchor="ctr"/>
-          <a:lstStyle/>
-          <a:p>
-            <a:pPr indent="0" marL="0">
-              <a:buNone/>
-            </a:pPr>
-            <a:r>
-              <a:rPr lang="en-US" sz="1800" dirty="0">
-                <a:solidFill>
-                  <a:srgbClr val="333333"/>
-                </a:solidFill>
-              </a:rPr>
-              <a:t>💰 攜帶 2000-5000 人民幣現金作為初始存款</a:t>
-            </a:r>
-            <a:endParaRPr lang="en-US" sz="1800" dirty="0"/>
+          <p:cNvPr id="20" name="Text 18"/>
+          <p:cNvSpPr/>
+          <p:nvPr/>
+        </p:nvSpPr>
+        <p:spPr>
+          <a:xfrm>
+            <a:off x="4663440" y="5303520"/>
+            <a:ext cx="731520" cy="731520"/>
+          </a:xfrm>
+          <a:prstGeom prst="rect">
+            <a:avLst/>
+          </a:prstGeom>
+          <a:noFill/>
+          <a:ln/>
+        </p:spPr>
+        <p:txBody>
+          <a:bodyPr wrap="square" rtlCol="0" anchor="ctr"/>
+          <a:lstStyle/>
+          <a:p>
+            <a:pPr indent="0" marL="0">
+              <a:buNone/>
+            </a:pPr>
+            <a:r>
+              <a:rPr lang="en-US" sz="3200" dirty="0">
+                <a:solidFill>
+                  <a:srgbClr val="000000"/>
+                </a:solidFill>
+              </a:rPr>
+              <a:t>💰</a:t>
+            </a:r>
+            <a:endParaRPr lang="en-US" sz="3200" dirty="0"/>
+          </a:p>
+        </p:txBody>
+      </p:sp>
+      <p:sp>
+        <p:nvSpPr>
+          <p:cNvPr id="21" name="Text 19"/>
+          <p:cNvSpPr/>
+          <p:nvPr/>
+        </p:nvSpPr>
+        <p:spPr>
+          <a:xfrm>
+            <a:off x="5486400" y="5394960"/>
+            <a:ext cx="2286000" cy="1097280"/>
+          </a:xfrm>
+          <a:prstGeom prst="rect">
+            <a:avLst/>
+          </a:prstGeom>
+          <a:noFill/>
+          <a:ln/>
+        </p:spPr>
+        <p:txBody>
+          <a:bodyPr wrap="square" rtlCol="0" anchor="ctr"/>
+          <a:lstStyle/>
+          <a:p>
+            <a:pPr indent="0" marL="0">
+              <a:buNone/>
+            </a:pPr>
+            <a:r>
+              <a:rPr lang="en-US" sz="1400" dirty="0">
+                <a:solidFill>
+                  <a:srgbClr val="1A1A1A"/>
+                </a:solidFill>
+              </a:rPr>
+              <a:t>攜帶現金</a:t>
+            </a:r>
+            <a:endParaRPr lang="en-US" sz="1400" dirty="0"/>
+          </a:p>
+          <a:p>
+            <a:pPr indent="0" marL="0">
+              <a:buNone/>
+            </a:pPr>
+            <a:r>
+              <a:rPr lang="en-US" sz="1400" dirty="0">
+                <a:solidFill>
+                  <a:srgbClr val="1A1A1A"/>
+                </a:solidFill>
+              </a:rPr>
+              <a:t>2000-5000 人民幣作為初始存款</a:t>
+            </a:r>
+            <a:endParaRPr lang="en-US" sz="1400" dirty="0"/>
           </a:p>
         </p:txBody>
       </p:sp>
@@ -1985,7 +2368,7 @@
     <p:bg>
       <p:bgPr>
         <a:solidFill>
-          <a:srgbClr val="F5F0E6"/>
+          <a:srgbClr val="F5F5F5"/>
         </a:solidFill>
       </p:bgPr>
     </p:bg>
@@ -2005,50 +2388,90 @@
       </p:grpSpPr>
       <p:sp>
         <p:nvSpPr>
-          <p:cNvPr id="2" name="Text 0"/>
-          <p:cNvSpPr/>
-          <p:nvPr/>
-        </p:nvSpPr>
-        <p:spPr>
-          <a:xfrm>
-            <a:off x="457200" y="274320"/>
-            <a:ext cx="8686800" cy="731520"/>
-          </a:xfrm>
-          <a:prstGeom prst="rect">
-            <a:avLst/>
-          </a:prstGeom>
-          <a:noFill/>
-          <a:ln/>
-        </p:spPr>
-        <p:txBody>
-          <a:bodyPr wrap="square" rtlCol="0" anchor="ctr"/>
-          <a:lstStyle/>
-          <a:p>
-            <a:pPr indent="0" marL="0">
-              <a:buNone/>
-            </a:pPr>
-            <a:r>
-              <a:rPr lang="en-US" sz="3600" b="1" dirty="0">
-                <a:solidFill>
-                  <a:srgbClr val="8B4513"/>
+          <p:cNvPr id="2" name="Shape 0"/>
+          <p:cNvSpPr/>
+          <p:nvPr/>
+        </p:nvSpPr>
+        <p:spPr>
+          <a:xfrm>
+            <a:off x="0" y="0"/>
+            <a:ext cx="9144000" cy="914400"/>
+          </a:xfrm>
+          <a:prstGeom prst="rect">
+            <a:avLst/>
+          </a:prstGeom>
+          <a:solidFill>
+            <a:srgbClr val="1E3A5F"/>
+          </a:solidFill>
+          <a:ln/>
+        </p:spPr>
+      </p:sp>
+      <p:sp>
+        <p:nvSpPr>
+          <p:cNvPr id="3" name="Text 1"/>
+          <p:cNvSpPr/>
+          <p:nvPr/>
+        </p:nvSpPr>
+        <p:spPr>
+          <a:xfrm>
+            <a:off x="457200" y="182880"/>
+            <a:ext cx="8686800" cy="548640"/>
+          </a:xfrm>
+          <a:prstGeom prst="rect">
+            <a:avLst/>
+          </a:prstGeom>
+          <a:noFill/>
+          <a:ln/>
+        </p:spPr>
+        <p:txBody>
+          <a:bodyPr wrap="square" rtlCol="0" anchor="ctr"/>
+          <a:lstStyle/>
+          <a:p>
+            <a:pPr indent="0" marL="0">
+              <a:buNone/>
+            </a:pPr>
+            <a:r>
+              <a:rPr lang="en-US" sz="3200" b="1" dirty="0">
+                <a:solidFill>
+                  <a:srgbClr val="FFFFFF"/>
                 </a:solidFill>
               </a:rPr>
               <a:t>🏦 推薦銀行</a:t>
             </a:r>
-            <a:endParaRPr lang="en-US" sz="3600" dirty="0"/>
-          </a:p>
-        </p:txBody>
-      </p:sp>
-      <p:sp>
-        <p:nvSpPr>
-          <p:cNvPr id="3" name="Shape 1"/>
+            <a:endParaRPr lang="en-US" sz="3200" dirty="0"/>
+          </a:p>
+        </p:txBody>
+      </p:sp>
+      <p:sp>
+        <p:nvSpPr>
+          <p:cNvPr id="4" name="Shape 2"/>
           <p:cNvSpPr/>
           <p:nvPr/>
         </p:nvSpPr>
         <p:spPr>
           <a:xfrm>
             <a:off x="457200" y="1188720"/>
-            <a:ext cx="8686800" cy="1097280"/>
+            <a:ext cx="137160" cy="1280160"/>
+          </a:xfrm>
+          <a:prstGeom prst="rect">
+            <a:avLst/>
+          </a:prstGeom>
+          <a:solidFill>
+            <a:srgbClr val="E53935"/>
+          </a:solidFill>
+          <a:ln/>
+        </p:spPr>
+      </p:sp>
+      <p:sp>
+        <p:nvSpPr>
+          <p:cNvPr id="5" name="Shape 3"/>
+          <p:cNvSpPr/>
+          <p:nvPr/>
+        </p:nvSpPr>
+        <p:spPr>
+          <a:xfrm>
+            <a:off x="594360" y="1188720"/>
+            <a:ext cx="11430000" cy="1280160"/>
           </a:xfrm>
           <a:prstGeom prst="roundRect">
             <a:avLst/>
@@ -2056,23 +2479,18 @@
           <a:solidFill>
             <a:srgbClr val="FFFFFF"/>
           </a:solidFill>
-          <a:ln w="12700">
-            <a:solidFill>
-              <a:srgbClr val="8B4513"/>
-            </a:solidFill>
-            <a:prstDash val="solid"/>
-          </a:ln>
-        </p:spPr>
-      </p:sp>
-      <p:sp>
-        <p:nvSpPr>
-          <p:cNvPr id="4" name="Text 2"/>
-          <p:cNvSpPr/>
-          <p:nvPr/>
-        </p:nvSpPr>
-        <p:spPr>
-          <a:xfrm>
-            <a:off x="731520" y="1325880"/>
+          <a:ln/>
+        </p:spPr>
+      </p:sp>
+      <p:sp>
+        <p:nvSpPr>
+          <p:cNvPr id="6" name="Text 4"/>
+          <p:cNvSpPr/>
+          <p:nvPr/>
+        </p:nvSpPr>
+        <p:spPr>
+          <a:xfrm>
+            <a:off x="914400" y="1371600"/>
             <a:ext cx="8229600" cy="457200"/>
           </a:xfrm>
           <a:prstGeom prst="rect">
@@ -2091,7 +2509,7 @@
             <a:r>
               <a:rPr lang="en-US" sz="2000" b="1" dirty="0">
                 <a:solidFill>
-                  <a:srgbClr val="8B4513"/>
+                  <a:srgbClr val="1A1A1A"/>
                 </a:solidFill>
               </a:rPr>
               <a:t>中國工商銀行 (ICBC)</a:t>
@@ -2102,50 +2520,70 @@
       </p:sp>
       <p:sp>
         <p:nvSpPr>
-          <p:cNvPr id="5" name="Text 3"/>
-          <p:cNvSpPr/>
-          <p:nvPr/>
-        </p:nvSpPr>
-        <p:spPr>
-          <a:xfrm>
-            <a:off x="731520" y="1783080"/>
-            <a:ext cx="8229600" cy="365760"/>
-          </a:xfrm>
-          <a:prstGeom prst="rect">
-            <a:avLst/>
-          </a:prstGeom>
-          <a:noFill/>
-          <a:ln/>
-        </p:spPr>
-        <p:txBody>
-          <a:bodyPr wrap="square" rtlCol="0" anchor="ctr"/>
-          <a:lstStyle/>
-          <a:p>
-            <a:pPr indent="0" marL="0">
-              <a:buNone/>
-            </a:pPr>
-            <a:r>
-              <a:rPr lang="en-US" sz="1600" dirty="0">
-                <a:solidFill>
-                  <a:srgbClr val="654321"/>
-                </a:solidFill>
-              </a:rPr>
-              <a:t>網點多，服務完善</a:t>
-            </a:r>
-            <a:endParaRPr lang="en-US" sz="1600" dirty="0"/>
-          </a:p>
-        </p:txBody>
-      </p:sp>
-      <p:sp>
-        <p:nvSpPr>
-          <p:cNvPr id="6" name="Shape 4"/>
-          <p:cNvSpPr/>
-          <p:nvPr/>
-        </p:nvSpPr>
-        <p:spPr>
-          <a:xfrm>
-            <a:off x="457200" y="2468880"/>
-            <a:ext cx="8686800" cy="1097280"/>
+          <p:cNvPr id="7" name="Text 5"/>
+          <p:cNvSpPr/>
+          <p:nvPr/>
+        </p:nvSpPr>
+        <p:spPr>
+          <a:xfrm>
+            <a:off x="914400" y="1828800"/>
+            <a:ext cx="8229600" cy="457200"/>
+          </a:xfrm>
+          <a:prstGeom prst="rect">
+            <a:avLst/>
+          </a:prstGeom>
+          <a:noFill/>
+          <a:ln/>
+        </p:spPr>
+        <p:txBody>
+          <a:bodyPr wrap="square" rtlCol="0" anchor="ctr"/>
+          <a:lstStyle/>
+          <a:p>
+            <a:pPr indent="0" marL="0">
+              <a:buNone/>
+            </a:pPr>
+            <a:r>
+              <a:rPr lang="en-US" sz="1400" dirty="0">
+                <a:solidFill>
+                  <a:srgbClr val="2E7D32"/>
+                </a:solidFill>
+              </a:rPr>
+              <a:t>網點最多，服務最完善</a:t>
+            </a:r>
+            <a:endParaRPr lang="en-US" sz="1400" dirty="0"/>
+          </a:p>
+        </p:txBody>
+      </p:sp>
+      <p:sp>
+        <p:nvSpPr>
+          <p:cNvPr id="8" name="Shape 6"/>
+          <p:cNvSpPr/>
+          <p:nvPr/>
+        </p:nvSpPr>
+        <p:spPr>
+          <a:xfrm>
+            <a:off x="457200" y="2560320"/>
+            <a:ext cx="137160" cy="1280160"/>
+          </a:xfrm>
+          <a:prstGeom prst="rect">
+            <a:avLst/>
+          </a:prstGeom>
+          <a:solidFill>
+            <a:srgbClr val="1E88E5"/>
+          </a:solidFill>
+          <a:ln/>
+        </p:spPr>
+      </p:sp>
+      <p:sp>
+        <p:nvSpPr>
+          <p:cNvPr id="9" name="Shape 7"/>
+          <p:cNvSpPr/>
+          <p:nvPr/>
+        </p:nvSpPr>
+        <p:spPr>
+          <a:xfrm>
+            <a:off x="594360" y="2560320"/>
+            <a:ext cx="11430000" cy="1280160"/>
           </a:xfrm>
           <a:prstGeom prst="roundRect">
             <a:avLst/>
@@ -2153,23 +2591,18 @@
           <a:solidFill>
             <a:srgbClr val="FFFFFF"/>
           </a:solidFill>
-          <a:ln w="12700">
-            <a:solidFill>
-              <a:srgbClr val="8B4513"/>
-            </a:solidFill>
-            <a:prstDash val="solid"/>
-          </a:ln>
-        </p:spPr>
-      </p:sp>
-      <p:sp>
-        <p:nvSpPr>
-          <p:cNvPr id="7" name="Text 5"/>
-          <p:cNvSpPr/>
-          <p:nvPr/>
-        </p:nvSpPr>
-        <p:spPr>
-          <a:xfrm>
-            <a:off x="731520" y="2606040"/>
+          <a:ln/>
+        </p:spPr>
+      </p:sp>
+      <p:sp>
+        <p:nvSpPr>
+          <p:cNvPr id="10" name="Text 8"/>
+          <p:cNvSpPr/>
+          <p:nvPr/>
+        </p:nvSpPr>
+        <p:spPr>
+          <a:xfrm>
+            <a:off x="914400" y="2743200"/>
             <a:ext cx="8229600" cy="457200"/>
           </a:xfrm>
           <a:prstGeom prst="rect">
@@ -2188,7 +2621,7 @@
             <a:r>
               <a:rPr lang="en-US" sz="2000" b="1" dirty="0">
                 <a:solidFill>
-                  <a:srgbClr val="8B4513"/>
+                  <a:srgbClr val="1A1A1A"/>
                 </a:solidFill>
               </a:rPr>
               <a:t>中國建設銀行 (CCB)</a:t>
@@ -2199,50 +2632,70 @@
       </p:sp>
       <p:sp>
         <p:nvSpPr>
-          <p:cNvPr id="8" name="Text 6"/>
-          <p:cNvSpPr/>
-          <p:nvPr/>
-        </p:nvSpPr>
-        <p:spPr>
-          <a:xfrm>
-            <a:off x="731520" y="3063240"/>
-            <a:ext cx="8229600" cy="365760"/>
-          </a:xfrm>
-          <a:prstGeom prst="rect">
-            <a:avLst/>
-          </a:prstGeom>
-          <a:noFill/>
-          <a:ln/>
-        </p:spPr>
-        <p:txBody>
-          <a:bodyPr wrap="square" rtlCol="0" anchor="ctr"/>
-          <a:lstStyle/>
-          <a:p>
-            <a:pPr indent="0" marL="0">
-              <a:buNone/>
-            </a:pPr>
-            <a:r>
-              <a:rPr lang="en-US" sz="1600" dirty="0">
-                <a:solidFill>
-                  <a:srgbClr val="654321"/>
-                </a:solidFill>
-              </a:rPr>
-              <a:t>開戶較快</a:t>
-            </a:r>
-            <a:endParaRPr lang="en-US" sz="1600" dirty="0"/>
-          </a:p>
-        </p:txBody>
-      </p:sp>
-      <p:sp>
-        <p:nvSpPr>
-          <p:cNvPr id="9" name="Shape 7"/>
-          <p:cNvSpPr/>
-          <p:nvPr/>
-        </p:nvSpPr>
-        <p:spPr>
-          <a:xfrm>
-            <a:off x="457200" y="3749040"/>
-            <a:ext cx="8686800" cy="1097280"/>
+          <p:cNvPr id="11" name="Text 9"/>
+          <p:cNvSpPr/>
+          <p:nvPr/>
+        </p:nvSpPr>
+        <p:spPr>
+          <a:xfrm>
+            <a:off x="914400" y="3200400"/>
+            <a:ext cx="8229600" cy="457200"/>
+          </a:xfrm>
+          <a:prstGeom prst="rect">
+            <a:avLst/>
+          </a:prstGeom>
+          <a:noFill/>
+          <a:ln/>
+        </p:spPr>
+        <p:txBody>
+          <a:bodyPr wrap="square" rtlCol="0" anchor="ctr"/>
+          <a:lstStyle/>
+          <a:p>
+            <a:pPr indent="0" marL="0">
+              <a:buNone/>
+            </a:pPr>
+            <a:r>
+              <a:rPr lang="en-US" sz="1400" dirty="0">
+                <a:solidFill>
+                  <a:srgbClr val="2E7D32"/>
+                </a:solidFill>
+              </a:rPr>
+              <a:t>開戶速度較快</a:t>
+            </a:r>
+            <a:endParaRPr lang="en-US" sz="1400" dirty="0"/>
+          </a:p>
+        </p:txBody>
+      </p:sp>
+      <p:sp>
+        <p:nvSpPr>
+          <p:cNvPr id="12" name="Shape 10"/>
+          <p:cNvSpPr/>
+          <p:nvPr/>
+        </p:nvSpPr>
+        <p:spPr>
+          <a:xfrm>
+            <a:off x="457200" y="3931920"/>
+            <a:ext cx="137160" cy="1280160"/>
+          </a:xfrm>
+          <a:prstGeom prst="rect">
+            <a:avLst/>
+          </a:prstGeom>
+          <a:solidFill>
+            <a:srgbClr val="FF9800"/>
+          </a:solidFill>
+          <a:ln/>
+        </p:spPr>
+      </p:sp>
+      <p:sp>
+        <p:nvSpPr>
+          <p:cNvPr id="13" name="Shape 11"/>
+          <p:cNvSpPr/>
+          <p:nvPr/>
+        </p:nvSpPr>
+        <p:spPr>
+          <a:xfrm>
+            <a:off x="594360" y="3931920"/>
+            <a:ext cx="11430000" cy="1280160"/>
           </a:xfrm>
           <a:prstGeom prst="roundRect">
             <a:avLst/>
@@ -2250,23 +2703,18 @@
           <a:solidFill>
             <a:srgbClr val="FFFFFF"/>
           </a:solidFill>
-          <a:ln w="12700">
-            <a:solidFill>
-              <a:srgbClr val="8B4513"/>
-            </a:solidFill>
-            <a:prstDash val="solid"/>
-          </a:ln>
-        </p:spPr>
-      </p:sp>
-      <p:sp>
-        <p:nvSpPr>
-          <p:cNvPr id="10" name="Text 8"/>
-          <p:cNvSpPr/>
-          <p:nvPr/>
-        </p:nvSpPr>
-        <p:spPr>
-          <a:xfrm>
-            <a:off x="731520" y="3886200"/>
+          <a:ln/>
+        </p:spPr>
+      </p:sp>
+      <p:sp>
+        <p:nvSpPr>
+          <p:cNvPr id="14" name="Text 12"/>
+          <p:cNvSpPr/>
+          <p:nvPr/>
+        </p:nvSpPr>
+        <p:spPr>
+          <a:xfrm>
+            <a:off x="914400" y="4114800"/>
             <a:ext cx="8229600" cy="457200"/>
           </a:xfrm>
           <a:prstGeom prst="rect">
@@ -2285,7 +2733,7 @@
             <a:r>
               <a:rPr lang="en-US" sz="2000" b="1" dirty="0">
                 <a:solidFill>
-                  <a:srgbClr val="8B4513"/>
+                  <a:srgbClr val="1A1A1A"/>
                 </a:solidFill>
               </a:rPr>
               <a:t>招商銀行</a:t>
@@ -2296,50 +2744,70 @@
       </p:sp>
       <p:sp>
         <p:nvSpPr>
-          <p:cNvPr id="11" name="Text 9"/>
-          <p:cNvSpPr/>
-          <p:nvPr/>
-        </p:nvSpPr>
-        <p:spPr>
-          <a:xfrm>
-            <a:off x="731520" y="4343400"/>
-            <a:ext cx="8229600" cy="365760"/>
-          </a:xfrm>
-          <a:prstGeom prst="rect">
-            <a:avLst/>
-          </a:prstGeom>
-          <a:noFill/>
-          <a:ln/>
-        </p:spPr>
-        <p:txBody>
-          <a:bodyPr wrap="square" rtlCol="0" anchor="ctr"/>
-          <a:lstStyle/>
-          <a:p>
-            <a:pPr indent="0" marL="0">
-              <a:buNone/>
-            </a:pPr>
-            <a:r>
-              <a:rPr lang="en-US" sz="1600" dirty="0">
-                <a:solidFill>
-                  <a:srgbClr val="654321"/>
-                </a:solidFill>
-              </a:rPr>
-              <a:t>服務好，有英文介面</a:t>
-            </a:r>
-            <a:endParaRPr lang="en-US" sz="1600" dirty="0"/>
-          </a:p>
-        </p:txBody>
-      </p:sp>
-      <p:sp>
-        <p:nvSpPr>
-          <p:cNvPr id="12" name="Shape 10"/>
-          <p:cNvSpPr/>
-          <p:nvPr/>
-        </p:nvSpPr>
-        <p:spPr>
-          <a:xfrm>
-            <a:off x="457200" y="5029200"/>
-            <a:ext cx="8686800" cy="1097280"/>
+          <p:cNvPr id="15" name="Text 13"/>
+          <p:cNvSpPr/>
+          <p:nvPr/>
+        </p:nvSpPr>
+        <p:spPr>
+          <a:xfrm>
+            <a:off x="914400" y="4572000"/>
+            <a:ext cx="8229600" cy="457200"/>
+          </a:xfrm>
+          <a:prstGeom prst="rect">
+            <a:avLst/>
+          </a:prstGeom>
+          <a:noFill/>
+          <a:ln/>
+        </p:spPr>
+        <p:txBody>
+          <a:bodyPr wrap="square" rtlCol="0" anchor="ctr"/>
+          <a:lstStyle/>
+          <a:p>
+            <a:pPr indent="0" marL="0">
+              <a:buNone/>
+            </a:pPr>
+            <a:r>
+              <a:rPr lang="en-US" sz="1400" dirty="0">
+                <a:solidFill>
+                  <a:srgbClr val="2E7D32"/>
+                </a:solidFill>
+              </a:rPr>
+              <a:t>服務品質好，有英文介面</a:t>
+            </a:r>
+            <a:endParaRPr lang="en-US" sz="1400" dirty="0"/>
+          </a:p>
+        </p:txBody>
+      </p:sp>
+      <p:sp>
+        <p:nvSpPr>
+          <p:cNvPr id="16" name="Shape 14"/>
+          <p:cNvSpPr/>
+          <p:nvPr/>
+        </p:nvSpPr>
+        <p:spPr>
+          <a:xfrm>
+            <a:off x="457200" y="5303520"/>
+            <a:ext cx="137160" cy="1280160"/>
+          </a:xfrm>
+          <a:prstGeom prst="rect">
+            <a:avLst/>
+          </a:prstGeom>
+          <a:solidFill>
+            <a:srgbClr val="4CAF50"/>
+          </a:solidFill>
+          <a:ln/>
+        </p:spPr>
+      </p:sp>
+      <p:sp>
+        <p:nvSpPr>
+          <p:cNvPr id="17" name="Shape 15"/>
+          <p:cNvSpPr/>
+          <p:nvPr/>
+        </p:nvSpPr>
+        <p:spPr>
+          <a:xfrm>
+            <a:off x="594360" y="5303520"/>
+            <a:ext cx="11430000" cy="1280160"/>
           </a:xfrm>
           <a:prstGeom prst="roundRect">
             <a:avLst/>
@@ -2347,23 +2815,18 @@
           <a:solidFill>
             <a:srgbClr val="FFFFFF"/>
           </a:solidFill>
-          <a:ln w="12700">
-            <a:solidFill>
-              <a:srgbClr val="8B4513"/>
-            </a:solidFill>
-            <a:prstDash val="solid"/>
-          </a:ln>
-        </p:spPr>
-      </p:sp>
-      <p:sp>
-        <p:nvSpPr>
-          <p:cNvPr id="13" name="Text 11"/>
-          <p:cNvSpPr/>
-          <p:nvPr/>
-        </p:nvSpPr>
-        <p:spPr>
-          <a:xfrm>
-            <a:off x="731520" y="5166360"/>
+          <a:ln/>
+        </p:spPr>
+      </p:sp>
+      <p:sp>
+        <p:nvSpPr>
+          <p:cNvPr id="18" name="Text 16"/>
+          <p:cNvSpPr/>
+          <p:nvPr/>
+        </p:nvSpPr>
+        <p:spPr>
+          <a:xfrm>
+            <a:off x="914400" y="5486400"/>
             <a:ext cx="8229600" cy="457200"/>
           </a:xfrm>
           <a:prstGeom prst="rect">
@@ -2382,7 +2845,7 @@
             <a:r>
               <a:rPr lang="en-US" sz="2000" b="1" dirty="0">
                 <a:solidFill>
-                  <a:srgbClr val="8B4513"/>
+                  <a:srgbClr val="1A1A1A"/>
                 </a:solidFill>
               </a:rPr>
               <a:t>支付寶/微信支付</a:t>
@@ -2393,37 +2856,37 @@
       </p:sp>
       <p:sp>
         <p:nvSpPr>
-          <p:cNvPr id="14" name="Text 12"/>
-          <p:cNvSpPr/>
-          <p:nvPr/>
-        </p:nvSpPr>
-        <p:spPr>
-          <a:xfrm>
-            <a:off x="731520" y="5623560"/>
-            <a:ext cx="8229600" cy="365760"/>
-          </a:xfrm>
-          <a:prstGeom prst="rect">
-            <a:avLst/>
-          </a:prstGeom>
-          <a:noFill/>
-          <a:ln/>
-        </p:spPr>
-        <p:txBody>
-          <a:bodyPr wrap="square" rtlCol="0" anchor="ctr"/>
-          <a:lstStyle/>
-          <a:p>
-            <a:pPr indent="0" marL="0">
-              <a:buNone/>
-            </a:pPr>
-            <a:r>
-              <a:rPr lang="en-US" sz="1600" dirty="0">
-                <a:solidFill>
-                  <a:srgbClr val="654321"/>
-                </a:solidFill>
-              </a:rPr>
-              <a:t>需先綁定銀行卡</a:t>
-            </a:r>
-            <a:endParaRPr lang="en-US" sz="1600" dirty="0"/>
+          <p:cNvPr id="19" name="Text 17"/>
+          <p:cNvSpPr/>
+          <p:nvPr/>
+        </p:nvSpPr>
+        <p:spPr>
+          <a:xfrm>
+            <a:off x="914400" y="5943600"/>
+            <a:ext cx="8229600" cy="457200"/>
+          </a:xfrm>
+          <a:prstGeom prst="rect">
+            <a:avLst/>
+          </a:prstGeom>
+          <a:noFill/>
+          <a:ln/>
+        </p:spPr>
+        <p:txBody>
+          <a:bodyPr wrap="square" rtlCol="0" anchor="ctr"/>
+          <a:lstStyle/>
+          <a:p>
+            <a:pPr indent="0" marL="0">
+              <a:buNone/>
+            </a:pPr>
+            <a:r>
+              <a:rPr lang="en-US" sz="1400" dirty="0">
+                <a:solidFill>
+                  <a:srgbClr val="2E7D32"/>
+                </a:solidFill>
+              </a:rPr>
+              <a:t>行動支付必備，需先綁定銀行卡</a:t>
+            </a:r>
+            <a:endParaRPr lang="en-US" sz="1400" dirty="0"/>
           </a:p>
         </p:txBody>
       </p:sp>
@@ -2441,7 +2904,7 @@
     <p:bg>
       <p:bgPr>
         <a:solidFill>
-          <a:srgbClr val="F5F0E6"/>
+          <a:srgbClr val="1E3A5F"/>
         </a:solidFill>
       </p:bgPr>
     </p:bg>
@@ -2484,14 +2947,14 @@
               <a:buNone/>
             </a:pPr>
             <a:r>
-              <a:rPr lang="en-US" sz="3600" b="1" dirty="0">
-                <a:solidFill>
-                  <a:srgbClr val="8B4513"/>
+              <a:rPr lang="en-US" sz="3200" b="1" dirty="0">
+                <a:solidFill>
+                  <a:srgbClr val="FFFFFF"/>
                 </a:solidFill>
               </a:rPr>
               <a:t>📝 開戶流程</a:t>
             </a:r>
-            <a:endParaRPr lang="en-US" sz="3600" dirty="0"/>
+            <a:endParaRPr lang="en-US" sz="3200" dirty="0"/>
           </a:p>
         </p:txBody>
       </p:sp>
@@ -2503,14 +2966,14 @@
         </p:nvSpPr>
         <p:spPr>
           <a:xfrm>
-            <a:off x="640080" y="1280160"/>
-            <a:ext cx="457200" cy="457200"/>
+            <a:off x="548640" y="1097280"/>
+            <a:ext cx="502920" cy="502920"/>
           </a:xfrm>
           <a:prstGeom prst="ellipse">
             <a:avLst/>
           </a:prstGeom>
           <a:solidFill>
-            <a:srgbClr val="8B4513"/>
+            <a:srgbClr val="FF6F00"/>
           </a:solidFill>
           <a:ln/>
         </p:spPr>
@@ -2523,8 +2986,8 @@
         </p:nvSpPr>
         <p:spPr>
           <a:xfrm>
-            <a:off x="640080" y="1325880"/>
-            <a:ext cx="457200" cy="457200"/>
+            <a:off x="548640" y="1188720"/>
+            <a:ext cx="502920" cy="365760"/>
           </a:xfrm>
           <a:prstGeom prst="rect">
             <a:avLst/>
@@ -2540,27 +3003,142 @@
               <a:buNone/>
             </a:pPr>
             <a:r>
-              <a:rPr lang="en-US" sz="1800" b="1" dirty="0">
+              <a:rPr lang="en-US" sz="1600" b="1" dirty="0">
                 <a:solidFill>
                   <a:srgbClr val="FFFFFF"/>
                 </a:solidFill>
               </a:rPr>
               <a:t>1</a:t>
             </a:r>
+            <a:endParaRPr lang="en-US" sz="1600" dirty="0"/>
+          </a:p>
+        </p:txBody>
+      </p:sp>
+      <p:sp>
+        <p:nvSpPr>
+          <p:cNvPr id="5" name="Text 3"/>
+          <p:cNvSpPr/>
+          <p:nvPr/>
+        </p:nvSpPr>
+        <p:spPr>
+          <a:xfrm>
+            <a:off x="1280160" y="1188720"/>
+            <a:ext cx="7772400" cy="457200"/>
+          </a:xfrm>
+          <a:prstGeom prst="rect">
+            <a:avLst/>
+          </a:prstGeom>
+          <a:noFill/>
+          <a:ln/>
+        </p:spPr>
+        <p:txBody>
+          <a:bodyPr wrap="square" rtlCol="0" anchor="ctr"/>
+          <a:lstStyle/>
+          <a:p>
+            <a:pPr indent="0" marL="0">
+              <a:buNone/>
+            </a:pPr>
+            <a:r>
+              <a:rPr lang="en-US" sz="1800" dirty="0">
+                <a:solidFill>
+                  <a:srgbClr val="FFFFFF"/>
+                </a:solidFill>
+              </a:rPr>
+              <a:t>抵達銀行大廳，取號排隊</a:t>
+            </a:r>
             <a:endParaRPr lang="en-US" sz="1800" dirty="0"/>
           </a:p>
         </p:txBody>
       </p:sp>
       <p:sp>
         <p:nvSpPr>
-          <p:cNvPr id="5" name="Text 3"/>
-          <p:cNvSpPr/>
-          <p:nvPr/>
-        </p:nvSpPr>
-        <p:spPr>
-          <a:xfrm>
-            <a:off x="1280160" y="1280160"/>
-            <a:ext cx="7315200" cy="457200"/>
+          <p:cNvPr id="6" name="Shape 4"/>
+          <p:cNvSpPr/>
+          <p:nvPr/>
+        </p:nvSpPr>
+        <p:spPr>
+          <a:xfrm>
+            <a:off x="800100" y="1600200"/>
+            <a:ext cx="0" cy="274320"/>
+          </a:xfrm>
+          <a:prstGeom prst="line">
+            <a:avLst/>
+          </a:prstGeom>
+          <a:noFill/>
+          <a:ln w="25400">
+            <a:solidFill>
+              <a:srgbClr val="FF6F00"/>
+            </a:solidFill>
+            <a:prstDash val="solid"/>
+          </a:ln>
+        </p:spPr>
+      </p:sp>
+      <p:sp>
+        <p:nvSpPr>
+          <p:cNvPr id="7" name="Shape 5"/>
+          <p:cNvSpPr/>
+          <p:nvPr/>
+        </p:nvSpPr>
+        <p:spPr>
+          <a:xfrm>
+            <a:off x="548640" y="1874520"/>
+            <a:ext cx="502920" cy="502920"/>
+          </a:xfrm>
+          <a:prstGeom prst="ellipse">
+            <a:avLst/>
+          </a:prstGeom>
+          <a:solidFill>
+            <a:srgbClr val="FF6F00"/>
+          </a:solidFill>
+          <a:ln/>
+        </p:spPr>
+      </p:sp>
+      <p:sp>
+        <p:nvSpPr>
+          <p:cNvPr id="8" name="Text 6"/>
+          <p:cNvSpPr/>
+          <p:nvPr/>
+        </p:nvSpPr>
+        <p:spPr>
+          <a:xfrm>
+            <a:off x="548640" y="1965960"/>
+            <a:ext cx="502920" cy="365760"/>
+          </a:xfrm>
+          <a:prstGeom prst="rect">
+            <a:avLst/>
+          </a:prstGeom>
+          <a:noFill/>
+          <a:ln/>
+        </p:spPr>
+        <p:txBody>
+          <a:bodyPr wrap="square" rtlCol="0" anchor="ctr"/>
+          <a:lstStyle/>
+          <a:p>
+            <a:pPr algn="ctr" indent="0" marL="0">
+              <a:buNone/>
+            </a:pPr>
+            <a:r>
+              <a:rPr lang="en-US" sz="1600" b="1" dirty="0">
+                <a:solidFill>
+                  <a:srgbClr val="FFFFFF"/>
+                </a:solidFill>
+              </a:rPr>
+              <a:t>2</a:t>
+            </a:r>
+            <a:endParaRPr lang="en-US" sz="1600" dirty="0"/>
+          </a:p>
+        </p:txBody>
+      </p:sp>
+      <p:sp>
+        <p:nvSpPr>
+          <p:cNvPr id="9" name="Text 7"/>
+          <p:cNvSpPr/>
+          <p:nvPr/>
+        </p:nvSpPr>
+        <p:spPr>
+          <a:xfrm>
+            <a:off x="1280160" y="1965960"/>
+            <a:ext cx="7772400" cy="457200"/>
           </a:xfrm>
           <a:prstGeom prst="rect">
             <a:avLst/>
@@ -2578,10 +3156,10 @@
             <a:r>
               <a:rPr lang="en-US" sz="1800" dirty="0">
                 <a:solidFill>
-                  <a:srgbClr val="333333"/>
-                </a:solidFill>
-              </a:rPr>
-              <a:t>1️⃣ 抵達銀行大廳，取號排隊</a:t>
+                  <a:srgbClr val="FFFFFF"/>
+                </a:solidFill>
+              </a:rPr>
+              <a:t>填寫「個人帳戶開戶申請表」</a:t>
             </a:r>
             <a:endParaRPr lang="en-US" sz="1800" dirty="0"/>
           </a:p>
@@ -2589,34 +3167,57 @@
       </p:sp>
       <p:sp>
         <p:nvSpPr>
-          <p:cNvPr id="6" name="Shape 4"/>
-          <p:cNvSpPr/>
-          <p:nvPr/>
-        </p:nvSpPr>
-        <p:spPr>
-          <a:xfrm>
-            <a:off x="640080" y="1920240"/>
-            <a:ext cx="457200" cy="457200"/>
+          <p:cNvPr id="10" name="Shape 8"/>
+          <p:cNvSpPr/>
+          <p:nvPr/>
+        </p:nvSpPr>
+        <p:spPr>
+          <a:xfrm>
+            <a:off x="800100" y="2377440"/>
+            <a:ext cx="0" cy="274320"/>
+          </a:xfrm>
+          <a:prstGeom prst="line">
+            <a:avLst/>
+          </a:prstGeom>
+          <a:noFill/>
+          <a:ln w="25400">
+            <a:solidFill>
+              <a:srgbClr val="FF6F00"/>
+            </a:solidFill>
+            <a:prstDash val="solid"/>
+          </a:ln>
+        </p:spPr>
+      </p:sp>
+      <p:sp>
+        <p:nvSpPr>
+          <p:cNvPr id="11" name="Shape 9"/>
+          <p:cNvSpPr/>
+          <p:nvPr/>
+        </p:nvSpPr>
+        <p:spPr>
+          <a:xfrm>
+            <a:off x="548640" y="2651760"/>
+            <a:ext cx="502920" cy="502920"/>
           </a:xfrm>
           <a:prstGeom prst="ellipse">
             <a:avLst/>
           </a:prstGeom>
           <a:solidFill>
-            <a:srgbClr val="8B4513"/>
-          </a:solidFill>
-          <a:ln/>
-        </p:spPr>
-      </p:sp>
-      <p:sp>
-        <p:nvSpPr>
-          <p:cNvPr id="7" name="Text 5"/>
-          <p:cNvSpPr/>
-          <p:nvPr/>
-        </p:nvSpPr>
-        <p:spPr>
-          <a:xfrm>
-            <a:off x="640080" y="1965960"/>
-            <a:ext cx="457200" cy="457200"/>
+            <a:srgbClr val="FF6F00"/>
+          </a:solidFill>
+          <a:ln/>
+        </p:spPr>
+      </p:sp>
+      <p:sp>
+        <p:nvSpPr>
+          <p:cNvPr id="12" name="Text 10"/>
+          <p:cNvSpPr/>
+          <p:nvPr/>
+        </p:nvSpPr>
+        <p:spPr>
+          <a:xfrm>
+            <a:off x="548640" y="2743200"/>
+            <a:ext cx="502920" cy="365760"/>
           </a:xfrm>
           <a:prstGeom prst="rect">
             <a:avLst/>
@@ -2632,12 +3233,48 @@
               <a:buNone/>
             </a:pPr>
             <a:r>
-              <a:rPr lang="en-US" sz="1800" b="1" dirty="0">
+              <a:rPr lang="en-US" sz="1600" b="1" dirty="0">
                 <a:solidFill>
                   <a:srgbClr val="FFFFFF"/>
                 </a:solidFill>
               </a:rPr>
-              <a:t>2</a:t>
+              <a:t>3</a:t>
+            </a:r>
+            <a:endParaRPr lang="en-US" sz="1600" dirty="0"/>
+          </a:p>
+        </p:txBody>
+      </p:sp>
+      <p:sp>
+        <p:nvSpPr>
+          <p:cNvPr id="13" name="Text 11"/>
+          <p:cNvSpPr/>
+          <p:nvPr/>
+        </p:nvSpPr>
+        <p:spPr>
+          <a:xfrm>
+            <a:off x="1280160" y="2743200"/>
+            <a:ext cx="7772400" cy="457200"/>
+          </a:xfrm>
+          <a:prstGeom prst="rect">
+            <a:avLst/>
+          </a:prstGeom>
+          <a:noFill/>
+          <a:ln/>
+        </p:spPr>
+        <p:txBody>
+          <a:bodyPr wrap="square" rtlCol="0" anchor="ctr"/>
+          <a:lstStyle/>
+          <a:p>
+            <a:pPr indent="0" marL="0">
+              <a:buNone/>
+            </a:pPr>
+            <a:r>
+              <a:rPr lang="en-US" sz="1800" dirty="0">
+                <a:solidFill>
+                  <a:srgbClr val="FFFFFF"/>
+                </a:solidFill>
+              </a:rPr>
+              <a:t>提交證件（回鄉證+台胞證+居住證明）</a:t>
             </a:r>
             <a:endParaRPr lang="en-US" sz="1800" dirty="0"/>
           </a:p>
@@ -2645,14 +3282,93 @@
       </p:sp>
       <p:sp>
         <p:nvSpPr>
-          <p:cNvPr id="8" name="Text 6"/>
-          <p:cNvSpPr/>
-          <p:nvPr/>
-        </p:nvSpPr>
-        <p:spPr>
-          <a:xfrm>
-            <a:off x="1280160" y="1920240"/>
-            <a:ext cx="7315200" cy="457200"/>
+          <p:cNvPr id="14" name="Shape 12"/>
+          <p:cNvSpPr/>
+          <p:nvPr/>
+        </p:nvSpPr>
+        <p:spPr>
+          <a:xfrm>
+            <a:off x="800100" y="3154680"/>
+            <a:ext cx="0" cy="274320"/>
+          </a:xfrm>
+          <a:prstGeom prst="line">
+            <a:avLst/>
+          </a:prstGeom>
+          <a:noFill/>
+          <a:ln w="25400">
+            <a:solidFill>
+              <a:srgbClr val="FF6F00"/>
+            </a:solidFill>
+            <a:prstDash val="solid"/>
+          </a:ln>
+        </p:spPr>
+      </p:sp>
+      <p:sp>
+        <p:nvSpPr>
+          <p:cNvPr id="15" name="Shape 13"/>
+          <p:cNvSpPr/>
+          <p:nvPr/>
+        </p:nvSpPr>
+        <p:spPr>
+          <a:xfrm>
+            <a:off x="548640" y="3429000"/>
+            <a:ext cx="502920" cy="502920"/>
+          </a:xfrm>
+          <a:prstGeom prst="ellipse">
+            <a:avLst/>
+          </a:prstGeom>
+          <a:solidFill>
+            <a:srgbClr val="FF6F00"/>
+          </a:solidFill>
+          <a:ln/>
+        </p:spPr>
+      </p:sp>
+      <p:sp>
+        <p:nvSpPr>
+          <p:cNvPr id="16" name="Text 14"/>
+          <p:cNvSpPr/>
+          <p:nvPr/>
+        </p:nvSpPr>
+        <p:spPr>
+          <a:xfrm>
+            <a:off x="548640" y="3520440"/>
+            <a:ext cx="502920" cy="365760"/>
+          </a:xfrm>
+          <a:prstGeom prst="rect">
+            <a:avLst/>
+          </a:prstGeom>
+          <a:noFill/>
+          <a:ln/>
+        </p:spPr>
+        <p:txBody>
+          <a:bodyPr wrap="square" rtlCol="0" anchor="ctr"/>
+          <a:lstStyle/>
+          <a:p>
+            <a:pPr algn="ctr" indent="0" marL="0">
+              <a:buNone/>
+            </a:pPr>
+            <a:r>
+              <a:rPr lang="en-US" sz="1600" b="1" dirty="0">
+                <a:solidFill>
+                  <a:srgbClr val="FFFFFF"/>
+                </a:solidFill>
+              </a:rPr>
+              <a:t>4</a:t>
+            </a:r>
+            <a:endParaRPr lang="en-US" sz="1600" dirty="0"/>
+          </a:p>
+        </p:txBody>
+      </p:sp>
+      <p:sp>
+        <p:nvSpPr>
+          <p:cNvPr id="17" name="Text 15"/>
+          <p:cNvSpPr/>
+          <p:nvPr/>
+        </p:nvSpPr>
+        <p:spPr>
+          <a:xfrm>
+            <a:off x="1280160" y="3520440"/>
+            <a:ext cx="7772400" cy="457200"/>
           </a:xfrm>
           <a:prstGeom prst="rect">
             <a:avLst/>
@@ -2670,10 +3386,10 @@
             <a:r>
               <a:rPr lang="en-US" sz="1800" dirty="0">
                 <a:solidFill>
-                  <a:srgbClr val="333333"/>
-                </a:solidFill>
-              </a:rPr>
-              <a:t>2️⃣ 填寫「個人帳戶開戶申請表」</a:t>
+                  <a:srgbClr val="FFFFFF"/>
+                </a:solidFill>
+              </a:rPr>
+              <a:t>填寫「稅收居民身份聲明」表格</a:t>
             </a:r>
             <a:endParaRPr lang="en-US" sz="1800" dirty="0"/>
           </a:p>
@@ -2681,34 +3397,57 @@
       </p:sp>
       <p:sp>
         <p:nvSpPr>
-          <p:cNvPr id="9" name="Shape 7"/>
-          <p:cNvSpPr/>
-          <p:nvPr/>
-        </p:nvSpPr>
-        <p:spPr>
-          <a:xfrm>
-            <a:off x="640080" y="2560320"/>
-            <a:ext cx="457200" cy="457200"/>
+          <p:cNvPr id="18" name="Shape 16"/>
+          <p:cNvSpPr/>
+          <p:nvPr/>
+        </p:nvSpPr>
+        <p:spPr>
+          <a:xfrm>
+            <a:off x="800100" y="3931920"/>
+            <a:ext cx="0" cy="274320"/>
+          </a:xfrm>
+          <a:prstGeom prst="line">
+            <a:avLst/>
+          </a:prstGeom>
+          <a:noFill/>
+          <a:ln w="25400">
+            <a:solidFill>
+              <a:srgbClr val="FF6F00"/>
+            </a:solidFill>
+            <a:prstDash val="solid"/>
+          </a:ln>
+        </p:spPr>
+      </p:sp>
+      <p:sp>
+        <p:nvSpPr>
+          <p:cNvPr id="19" name="Shape 17"/>
+          <p:cNvSpPr/>
+          <p:nvPr/>
+        </p:nvSpPr>
+        <p:spPr>
+          <a:xfrm>
+            <a:off x="548640" y="4206240"/>
+            <a:ext cx="502920" cy="502920"/>
           </a:xfrm>
           <a:prstGeom prst="ellipse">
             <a:avLst/>
           </a:prstGeom>
           <a:solidFill>
-            <a:srgbClr val="8B4513"/>
-          </a:solidFill>
-          <a:ln/>
-        </p:spPr>
-      </p:sp>
-      <p:sp>
-        <p:nvSpPr>
-          <p:cNvPr id="10" name="Text 8"/>
-          <p:cNvSpPr/>
-          <p:nvPr/>
-        </p:nvSpPr>
-        <p:spPr>
-          <a:xfrm>
-            <a:off x="640080" y="2606040"/>
-            <a:ext cx="457200" cy="457200"/>
+            <a:srgbClr val="FF6F00"/>
+          </a:solidFill>
+          <a:ln/>
+        </p:spPr>
+      </p:sp>
+      <p:sp>
+        <p:nvSpPr>
+          <p:cNvPr id="20" name="Text 18"/>
+          <p:cNvSpPr/>
+          <p:nvPr/>
+        </p:nvSpPr>
+        <p:spPr>
+          <a:xfrm>
+            <a:off x="548640" y="4297680"/>
+            <a:ext cx="502920" cy="365760"/>
           </a:xfrm>
           <a:prstGeom prst="rect">
             <a:avLst/>
@@ -2724,12 +3463,48 @@
               <a:buNone/>
             </a:pPr>
             <a:r>
-              <a:rPr lang="en-US" sz="1800" b="1" dirty="0">
+              <a:rPr lang="en-US" sz="1600" b="1" dirty="0">
                 <a:solidFill>
                   <a:srgbClr val="FFFFFF"/>
                 </a:solidFill>
               </a:rPr>
-              <a:t>3</a:t>
+              <a:t>5</a:t>
+            </a:r>
+            <a:endParaRPr lang="en-US" sz="1600" dirty="0"/>
+          </a:p>
+        </p:txBody>
+      </p:sp>
+      <p:sp>
+        <p:nvSpPr>
+          <p:cNvPr id="21" name="Text 19"/>
+          <p:cNvSpPr/>
+          <p:nvPr/>
+        </p:nvSpPr>
+        <p:spPr>
+          <a:xfrm>
+            <a:off x="1280160" y="4297680"/>
+            <a:ext cx="7772400" cy="457200"/>
+          </a:xfrm>
+          <a:prstGeom prst="rect">
+            <a:avLst/>
+          </a:prstGeom>
+          <a:noFill/>
+          <a:ln/>
+        </p:spPr>
+        <p:txBody>
+          <a:bodyPr wrap="square" rtlCol="0" anchor="ctr"/>
+          <a:lstStyle/>
+          <a:p>
+            <a:pPr indent="0" marL="0">
+              <a:buNone/>
+            </a:pPr>
+            <a:r>
+              <a:rPr lang="en-US" sz="1800" dirty="0">
+                <a:solidFill>
+                  <a:srgbClr val="FFFFFF"/>
+                </a:solidFill>
+              </a:rPr>
+              <a:t>設定銀行卡密碼+預留手機號</a:t>
             </a:r>
             <a:endParaRPr lang="en-US" sz="1800" dirty="0"/>
           </a:p>
@@ -2737,14 +3512,93 @@
       </p:sp>
       <p:sp>
         <p:nvSpPr>
-          <p:cNvPr id="11" name="Text 9"/>
-          <p:cNvSpPr/>
-          <p:nvPr/>
-        </p:nvSpPr>
-        <p:spPr>
-          <a:xfrm>
-            <a:off x="1280160" y="2560320"/>
-            <a:ext cx="7315200" cy="457200"/>
+          <p:cNvPr id="22" name="Shape 20"/>
+          <p:cNvSpPr/>
+          <p:nvPr/>
+        </p:nvSpPr>
+        <p:spPr>
+          <a:xfrm>
+            <a:off x="800100" y="4709160"/>
+            <a:ext cx="0" cy="274320"/>
+          </a:xfrm>
+          <a:prstGeom prst="line">
+            <a:avLst/>
+          </a:prstGeom>
+          <a:noFill/>
+          <a:ln w="25400">
+            <a:solidFill>
+              <a:srgbClr val="FF6F00"/>
+            </a:solidFill>
+            <a:prstDash val="solid"/>
+          </a:ln>
+        </p:spPr>
+      </p:sp>
+      <p:sp>
+        <p:nvSpPr>
+          <p:cNvPr id="23" name="Shape 21"/>
+          <p:cNvSpPr/>
+          <p:nvPr/>
+        </p:nvSpPr>
+        <p:spPr>
+          <a:xfrm>
+            <a:off x="548640" y="4983480"/>
+            <a:ext cx="502920" cy="502920"/>
+          </a:xfrm>
+          <a:prstGeom prst="ellipse">
+            <a:avLst/>
+          </a:prstGeom>
+          <a:solidFill>
+            <a:srgbClr val="FF6F00"/>
+          </a:solidFill>
+          <a:ln/>
+        </p:spPr>
+      </p:sp>
+      <p:sp>
+        <p:nvSpPr>
+          <p:cNvPr id="24" name="Text 22"/>
+          <p:cNvSpPr/>
+          <p:nvPr/>
+        </p:nvSpPr>
+        <p:spPr>
+          <a:xfrm>
+            <a:off x="548640" y="5074920"/>
+            <a:ext cx="502920" cy="365760"/>
+          </a:xfrm>
+          <a:prstGeom prst="rect">
+            <a:avLst/>
+          </a:prstGeom>
+          <a:noFill/>
+          <a:ln/>
+        </p:spPr>
+        <p:txBody>
+          <a:bodyPr wrap="square" rtlCol="0" anchor="ctr"/>
+          <a:lstStyle/>
+          <a:p>
+            <a:pPr algn="ctr" indent="0" marL="0">
+              <a:buNone/>
+            </a:pPr>
+            <a:r>
+              <a:rPr lang="en-US" sz="1600" b="1" dirty="0">
+                <a:solidFill>
+                  <a:srgbClr val="FFFFFF"/>
+                </a:solidFill>
+              </a:rPr>
+              <a:t>6</a:t>
+            </a:r>
+            <a:endParaRPr lang="en-US" sz="1600" dirty="0"/>
+          </a:p>
+        </p:txBody>
+      </p:sp>
+      <p:sp>
+        <p:nvSpPr>
+          <p:cNvPr id="25" name="Text 23"/>
+          <p:cNvSpPr/>
+          <p:nvPr/>
+        </p:nvSpPr>
+        <p:spPr>
+          <a:xfrm>
+            <a:off x="1280160" y="5074920"/>
+            <a:ext cx="7772400" cy="457200"/>
           </a:xfrm>
           <a:prstGeom prst="rect">
             <a:avLst/>
@@ -2762,10 +3616,10 @@
             <a:r>
               <a:rPr lang="en-US" sz="1800" dirty="0">
                 <a:solidFill>
-                  <a:srgbClr val="333333"/>
-                </a:solidFill>
-              </a:rPr>
-              <a:t>3️⃣ 提交證件（回鄉證+台胞證+居住證明）</a:t>
+                  <a:srgbClr val="FFFFFF"/>
+                </a:solidFill>
+              </a:rPr>
+              <a:t>存入初始存款（建議1000元起）</a:t>
             </a:r>
             <a:endParaRPr lang="en-US" sz="1800" dirty="0"/>
           </a:p>
@@ -2773,34 +3627,57 @@
       </p:sp>
       <p:sp>
         <p:nvSpPr>
-          <p:cNvPr id="12" name="Shape 10"/>
-          <p:cNvSpPr/>
-          <p:nvPr/>
-        </p:nvSpPr>
-        <p:spPr>
-          <a:xfrm>
-            <a:off x="640080" y="3200400"/>
-            <a:ext cx="457200" cy="457200"/>
+          <p:cNvPr id="26" name="Shape 24"/>
+          <p:cNvSpPr/>
+          <p:nvPr/>
+        </p:nvSpPr>
+        <p:spPr>
+          <a:xfrm>
+            <a:off x="800100" y="5486400"/>
+            <a:ext cx="0" cy="274320"/>
+          </a:xfrm>
+          <a:prstGeom prst="line">
+            <a:avLst/>
+          </a:prstGeom>
+          <a:noFill/>
+          <a:ln w="25400">
+            <a:solidFill>
+              <a:srgbClr val="FF6F00"/>
+            </a:solidFill>
+            <a:prstDash val="solid"/>
+          </a:ln>
+        </p:spPr>
+      </p:sp>
+      <p:sp>
+        <p:nvSpPr>
+          <p:cNvPr id="27" name="Shape 25"/>
+          <p:cNvSpPr/>
+          <p:nvPr/>
+        </p:nvSpPr>
+        <p:spPr>
+          <a:xfrm>
+            <a:off x="548640" y="5760720"/>
+            <a:ext cx="502920" cy="502920"/>
           </a:xfrm>
           <a:prstGeom prst="ellipse">
             <a:avLst/>
           </a:prstGeom>
           <a:solidFill>
-            <a:srgbClr val="8B4513"/>
-          </a:solidFill>
-          <a:ln/>
-        </p:spPr>
-      </p:sp>
-      <p:sp>
-        <p:nvSpPr>
-          <p:cNvPr id="13" name="Text 11"/>
-          <p:cNvSpPr/>
-          <p:nvPr/>
-        </p:nvSpPr>
-        <p:spPr>
-          <a:xfrm>
-            <a:off x="640080" y="3246120"/>
-            <a:ext cx="457200" cy="457200"/>
+            <a:srgbClr val="FF6F00"/>
+          </a:solidFill>
+          <a:ln/>
+        </p:spPr>
+      </p:sp>
+      <p:sp>
+        <p:nvSpPr>
+          <p:cNvPr id="28" name="Text 26"/>
+          <p:cNvSpPr/>
+          <p:nvPr/>
+        </p:nvSpPr>
+        <p:spPr>
+          <a:xfrm>
+            <a:off x="548640" y="5852160"/>
+            <a:ext cx="502920" cy="365760"/>
           </a:xfrm>
           <a:prstGeom prst="rect">
             <a:avLst/>
@@ -2816,27 +3693,27 @@
               <a:buNone/>
             </a:pPr>
             <a:r>
-              <a:rPr lang="en-US" sz="1800" b="1" dirty="0">
+              <a:rPr lang="en-US" sz="1600" b="1" dirty="0">
                 <a:solidFill>
                   <a:srgbClr val="FFFFFF"/>
                 </a:solidFill>
               </a:rPr>
-              <a:t>4</a:t>
-            </a:r>
-            <a:endParaRPr lang="en-US" sz="1800" dirty="0"/>
-          </a:p>
-        </p:txBody>
-      </p:sp>
-      <p:sp>
-        <p:nvSpPr>
-          <p:cNvPr id="14" name="Text 12"/>
-          <p:cNvSpPr/>
-          <p:nvPr/>
-        </p:nvSpPr>
-        <p:spPr>
-          <a:xfrm>
-            <a:off x="1280160" y="3200400"/>
-            <a:ext cx="7315200" cy="457200"/>
+              <a:t>7</a:t>
+            </a:r>
+            <a:endParaRPr lang="en-US" sz="1600" dirty="0"/>
+          </a:p>
+        </p:txBody>
+      </p:sp>
+      <p:sp>
+        <p:nvSpPr>
+          <p:cNvPr id="29" name="Text 27"/>
+          <p:cNvSpPr/>
+          <p:nvPr/>
+        </p:nvSpPr>
+        <p:spPr>
+          <a:xfrm>
+            <a:off x="1280160" y="5852160"/>
+            <a:ext cx="7772400" cy="457200"/>
           </a:xfrm>
           <a:prstGeom prst="rect">
             <a:avLst/>
@@ -2854,286 +3731,10 @@
             <a:r>
               <a:rPr lang="en-US" sz="1800" dirty="0">
                 <a:solidFill>
-                  <a:srgbClr val="333333"/>
-                </a:solidFill>
-              </a:rPr>
-              <a:t>4️⃣ 填寫「稅收居民身份聲明」表格</a:t>
-            </a:r>
-            <a:endParaRPr lang="en-US" sz="1800" dirty="0"/>
-          </a:p>
-        </p:txBody>
-      </p:sp>
-      <p:sp>
-        <p:nvSpPr>
-          <p:cNvPr id="15" name="Shape 13"/>
-          <p:cNvSpPr/>
-          <p:nvPr/>
-        </p:nvSpPr>
-        <p:spPr>
-          <a:xfrm>
-            <a:off x="640080" y="3840480"/>
-            <a:ext cx="457200" cy="457200"/>
-          </a:xfrm>
-          <a:prstGeom prst="ellipse">
-            <a:avLst/>
-          </a:prstGeom>
-          <a:solidFill>
-            <a:srgbClr val="8B4513"/>
-          </a:solidFill>
-          <a:ln/>
-        </p:spPr>
-      </p:sp>
-      <p:sp>
-        <p:nvSpPr>
-          <p:cNvPr id="16" name="Text 14"/>
-          <p:cNvSpPr/>
-          <p:nvPr/>
-        </p:nvSpPr>
-        <p:spPr>
-          <a:xfrm>
-            <a:off x="640080" y="3886200"/>
-            <a:ext cx="457200" cy="457200"/>
-          </a:xfrm>
-          <a:prstGeom prst="rect">
-            <a:avLst/>
-          </a:prstGeom>
-          <a:noFill/>
-          <a:ln/>
-        </p:spPr>
-        <p:txBody>
-          <a:bodyPr wrap="square" rtlCol="0" anchor="ctr"/>
-          <a:lstStyle/>
-          <a:p>
-            <a:pPr algn="ctr" indent="0" marL="0">
-              <a:buNone/>
-            </a:pPr>
-            <a:r>
-              <a:rPr lang="en-US" sz="1800" b="1" dirty="0">
-                <a:solidFill>
                   <a:srgbClr val="FFFFFF"/>
                 </a:solidFill>
               </a:rPr>
-              <a:t>5</a:t>
-            </a:r>
-            <a:endParaRPr lang="en-US" sz="1800" dirty="0"/>
-          </a:p>
-        </p:txBody>
-      </p:sp>
-      <p:sp>
-        <p:nvSpPr>
-          <p:cNvPr id="17" name="Text 15"/>
-          <p:cNvSpPr/>
-          <p:nvPr/>
-        </p:nvSpPr>
-        <p:spPr>
-          <a:xfrm>
-            <a:off x="1280160" y="3840480"/>
-            <a:ext cx="7315200" cy="457200"/>
-          </a:xfrm>
-          <a:prstGeom prst="rect">
-            <a:avLst/>
-          </a:prstGeom>
-          <a:noFill/>
-          <a:ln/>
-        </p:spPr>
-        <p:txBody>
-          <a:bodyPr wrap="square" rtlCol="0" anchor="ctr"/>
-          <a:lstStyle/>
-          <a:p>
-            <a:pPr indent="0" marL="0">
-              <a:buNone/>
-            </a:pPr>
-            <a:r>
-              <a:rPr lang="en-US" sz="1800" dirty="0">
-                <a:solidFill>
-                  <a:srgbClr val="333333"/>
-                </a:solidFill>
-              </a:rPr>
-              <a:t>5️⃣ 設定銀行卡密碼+預留手機號</a:t>
-            </a:r>
-            <a:endParaRPr lang="en-US" sz="1800" dirty="0"/>
-          </a:p>
-        </p:txBody>
-      </p:sp>
-      <p:sp>
-        <p:nvSpPr>
-          <p:cNvPr id="18" name="Shape 16"/>
-          <p:cNvSpPr/>
-          <p:nvPr/>
-        </p:nvSpPr>
-        <p:spPr>
-          <a:xfrm>
-            <a:off x="640080" y="4480560"/>
-            <a:ext cx="457200" cy="457200"/>
-          </a:xfrm>
-          <a:prstGeom prst="ellipse">
-            <a:avLst/>
-          </a:prstGeom>
-          <a:solidFill>
-            <a:srgbClr val="8B4513"/>
-          </a:solidFill>
-          <a:ln/>
-        </p:spPr>
-      </p:sp>
-      <p:sp>
-        <p:nvSpPr>
-          <p:cNvPr id="19" name="Text 17"/>
-          <p:cNvSpPr/>
-          <p:nvPr/>
-        </p:nvSpPr>
-        <p:spPr>
-          <a:xfrm>
-            <a:off x="640080" y="4526280"/>
-            <a:ext cx="457200" cy="457200"/>
-          </a:xfrm>
-          <a:prstGeom prst="rect">
-            <a:avLst/>
-          </a:prstGeom>
-          <a:noFill/>
-          <a:ln/>
-        </p:spPr>
-        <p:txBody>
-          <a:bodyPr wrap="square" rtlCol="0" anchor="ctr"/>
-          <a:lstStyle/>
-          <a:p>
-            <a:pPr algn="ctr" indent="0" marL="0">
-              <a:buNone/>
-            </a:pPr>
-            <a:r>
-              <a:rPr lang="en-US" sz="1800" b="1" dirty="0">
-                <a:solidFill>
-                  <a:srgbClr val="FFFFFF"/>
-                </a:solidFill>
-              </a:rPr>
-              <a:t>6</a:t>
-            </a:r>
-            <a:endParaRPr lang="en-US" sz="1800" dirty="0"/>
-          </a:p>
-        </p:txBody>
-      </p:sp>
-      <p:sp>
-        <p:nvSpPr>
-          <p:cNvPr id="20" name="Text 18"/>
-          <p:cNvSpPr/>
-          <p:nvPr/>
-        </p:nvSpPr>
-        <p:spPr>
-          <a:xfrm>
-            <a:off x="1280160" y="4480560"/>
-            <a:ext cx="7315200" cy="457200"/>
-          </a:xfrm>
-          <a:prstGeom prst="rect">
-            <a:avLst/>
-          </a:prstGeom>
-          <a:noFill/>
-          <a:ln/>
-        </p:spPr>
-        <p:txBody>
-          <a:bodyPr wrap="square" rtlCol="0" anchor="ctr"/>
-          <a:lstStyle/>
-          <a:p>
-            <a:pPr indent="0" marL="0">
-              <a:buNone/>
-            </a:pPr>
-            <a:r>
-              <a:rPr lang="en-US" sz="1800" dirty="0">
-                <a:solidFill>
-                  <a:srgbClr val="333333"/>
-                </a:solidFill>
-              </a:rPr>
-              <a:t>6️⃣ 存入初始存款（建議1000元起）</a:t>
-            </a:r>
-            <a:endParaRPr lang="en-US" sz="1800" dirty="0"/>
-          </a:p>
-        </p:txBody>
-      </p:sp>
-      <p:sp>
-        <p:nvSpPr>
-          <p:cNvPr id="21" name="Shape 19"/>
-          <p:cNvSpPr/>
-          <p:nvPr/>
-        </p:nvSpPr>
-        <p:spPr>
-          <a:xfrm>
-            <a:off x="640080" y="5120640"/>
-            <a:ext cx="457200" cy="457200"/>
-          </a:xfrm>
-          <a:prstGeom prst="ellipse">
-            <a:avLst/>
-          </a:prstGeom>
-          <a:solidFill>
-            <a:srgbClr val="8B4513"/>
-          </a:solidFill>
-          <a:ln/>
-        </p:spPr>
-      </p:sp>
-      <p:sp>
-        <p:nvSpPr>
-          <p:cNvPr id="22" name="Text 20"/>
-          <p:cNvSpPr/>
-          <p:nvPr/>
-        </p:nvSpPr>
-        <p:spPr>
-          <a:xfrm>
-            <a:off x="640080" y="5166360"/>
-            <a:ext cx="457200" cy="457200"/>
-          </a:xfrm>
-          <a:prstGeom prst="rect">
-            <a:avLst/>
-          </a:prstGeom>
-          <a:noFill/>
-          <a:ln/>
-        </p:spPr>
-        <p:txBody>
-          <a:bodyPr wrap="square" rtlCol="0" anchor="ctr"/>
-          <a:lstStyle/>
-          <a:p>
-            <a:pPr algn="ctr" indent="0" marL="0">
-              <a:buNone/>
-            </a:pPr>
-            <a:r>
-              <a:rPr lang="en-US" sz="1800" b="1" dirty="0">
-                <a:solidFill>
-                  <a:srgbClr val="FFFFFF"/>
-                </a:solidFill>
-              </a:rPr>
-              <a:t>7</a:t>
-            </a:r>
-            <a:endParaRPr lang="en-US" sz="1800" dirty="0"/>
-          </a:p>
-        </p:txBody>
-      </p:sp>
-      <p:sp>
-        <p:nvSpPr>
-          <p:cNvPr id="23" name="Text 21"/>
-          <p:cNvSpPr/>
-          <p:nvPr/>
-        </p:nvSpPr>
-        <p:spPr>
-          <a:xfrm>
-            <a:off x="1280160" y="5120640"/>
-            <a:ext cx="7315200" cy="457200"/>
-          </a:xfrm>
-          <a:prstGeom prst="rect">
-            <a:avLst/>
-          </a:prstGeom>
-          <a:noFill/>
-          <a:ln/>
-        </p:spPr>
-        <p:txBody>
-          <a:bodyPr wrap="square" rtlCol="0" anchor="ctr"/>
-          <a:lstStyle/>
-          <a:p>
-            <a:pPr indent="0" marL="0">
-              <a:buNone/>
-            </a:pPr>
-            <a:r>
-              <a:rPr lang="en-US" sz="1800" dirty="0">
-                <a:solidFill>
-                  <a:srgbClr val="333333"/>
-                </a:solidFill>
-              </a:rPr>
-              <a:t>7️⃣ 領取銀行卡+開通網銀/手機銀行</a:t>
+              <a:t>領取銀行卡+開通網銀/手機銀行</a:t>
             </a:r>
             <a:endParaRPr lang="en-US" sz="1800" dirty="0"/>
           </a:p>
@@ -3153,7 +3754,7 @@
     <p:bg>
       <p:bgPr>
         <a:solidFill>
-          <a:srgbClr val="F5F0E6"/>
+          <a:srgbClr val="F5F5F5"/>
         </a:solidFill>
       </p:bgPr>
     </p:bg>
@@ -3173,50 +3774,90 @@
       </p:grpSpPr>
       <p:sp>
         <p:nvSpPr>
-          <p:cNvPr id="2" name="Text 0"/>
-          <p:cNvSpPr/>
-          <p:nvPr/>
-        </p:nvSpPr>
-        <p:spPr>
-          <a:xfrm>
-            <a:off x="457200" y="274320"/>
-            <a:ext cx="8686800" cy="731520"/>
-          </a:xfrm>
-          <a:prstGeom prst="rect">
-            <a:avLst/>
-          </a:prstGeom>
-          <a:noFill/>
-          <a:ln/>
-        </p:spPr>
-        <p:txBody>
-          <a:bodyPr wrap="square" rtlCol="0" anchor="ctr"/>
-          <a:lstStyle/>
-          <a:p>
-            <a:pPr indent="0" marL="0">
-              <a:buNone/>
-            </a:pPr>
-            <a:r>
-              <a:rPr lang="en-US" sz="3600" b="1" dirty="0">
-                <a:solidFill>
-                  <a:srgbClr val="8B4513"/>
+          <p:cNvPr id="2" name="Shape 0"/>
+          <p:cNvSpPr/>
+          <p:nvPr/>
+        </p:nvSpPr>
+        <p:spPr>
+          <a:xfrm>
+            <a:off x="0" y="0"/>
+            <a:ext cx="9144000" cy="914400"/>
+          </a:xfrm>
+          <a:prstGeom prst="rect">
+            <a:avLst/>
+          </a:prstGeom>
+          <a:solidFill>
+            <a:srgbClr val="FF6F00"/>
+          </a:solidFill>
+          <a:ln/>
+        </p:spPr>
+      </p:sp>
+      <p:sp>
+        <p:nvSpPr>
+          <p:cNvPr id="3" name="Text 1"/>
+          <p:cNvSpPr/>
+          <p:nvPr/>
+        </p:nvSpPr>
+        <p:spPr>
+          <a:xfrm>
+            <a:off x="457200" y="182880"/>
+            <a:ext cx="8686800" cy="548640"/>
+          </a:xfrm>
+          <a:prstGeom prst="rect">
+            <a:avLst/>
+          </a:prstGeom>
+          <a:noFill/>
+          <a:ln/>
+        </p:spPr>
+        <p:txBody>
+          <a:bodyPr wrap="square" rtlCol="0" anchor="ctr"/>
+          <a:lstStyle/>
+          <a:p>
+            <a:pPr indent="0" marL="0">
+              <a:buNone/>
+            </a:pPr>
+            <a:r>
+              <a:rPr lang="en-US" sz="3200" b="1" dirty="0">
+                <a:solidFill>
+                  <a:srgbClr val="FFFFFF"/>
                 </a:solidFill>
               </a:rPr>
               <a:t>⚠️ 重要注意事項</a:t>
             </a:r>
-            <a:endParaRPr lang="en-US" sz="3600" dirty="0"/>
-          </a:p>
-        </p:txBody>
-      </p:sp>
-      <p:sp>
-        <p:nvSpPr>
-          <p:cNvPr id="3" name="Text 1"/>
-          <p:cNvSpPr/>
-          <p:nvPr/>
-        </p:nvSpPr>
-        <p:spPr>
-          <a:xfrm>
-            <a:off x="731520" y="1188720"/>
-            <a:ext cx="8229600" cy="640080"/>
+            <a:endParaRPr lang="en-US" sz="3200" dirty="0"/>
+          </a:p>
+        </p:txBody>
+      </p:sp>
+      <p:sp>
+        <p:nvSpPr>
+          <p:cNvPr id="4" name="Shape 2"/>
+          <p:cNvSpPr/>
+          <p:nvPr/>
+        </p:nvSpPr>
+        <p:spPr>
+          <a:xfrm>
+            <a:off x="457200" y="1097280"/>
+            <a:ext cx="11430000" cy="731520"/>
+          </a:xfrm>
+          <a:prstGeom prst="roundRect">
+            <a:avLst/>
+          </a:prstGeom>
+          <a:solidFill>
+            <a:srgbClr val="FFFFFF"/>
+          </a:solidFill>
+          <a:ln/>
+        </p:spPr>
+      </p:sp>
+      <p:sp>
+        <p:nvSpPr>
+          <p:cNvPr id="5" name="Text 3"/>
+          <p:cNvSpPr/>
+          <p:nvPr/>
+        </p:nvSpPr>
+        <p:spPr>
+          <a:xfrm>
+            <a:off x="731520" y="1280160"/>
+            <a:ext cx="8229600" cy="457200"/>
           </a:xfrm>
           <a:prstGeom prst="rect">
             <a:avLst/>
@@ -3234,10 +3875,10 @@
             <a:r>
               <a:rPr lang="en-US" sz="1600" dirty="0">
                 <a:solidFill>
-                  <a:srgbClr val="333333"/>
-                </a:solidFill>
-              </a:rPr>
-              <a:t>▪ 每家銀行要求可能不同，建議先電話確認</a:t>
+                  <a:srgbClr val="1A1A1A"/>
+                </a:solidFill>
+              </a:rPr>
+              <a:t>✓ 每家銀行要求可能不同，建議先電話確認</a:t>
             </a:r>
             <a:endParaRPr lang="en-US" sz="1600" dirty="0"/>
           </a:p>
@@ -3245,14 +3886,34 @@
       </p:sp>
       <p:sp>
         <p:nvSpPr>
-          <p:cNvPr id="4" name="Text 2"/>
-          <p:cNvSpPr/>
-          <p:nvPr/>
-        </p:nvSpPr>
-        <p:spPr>
-          <a:xfrm>
-            <a:off x="731520" y="1874520"/>
-            <a:ext cx="8229600" cy="640080"/>
+          <p:cNvPr id="6" name="Shape 4"/>
+          <p:cNvSpPr/>
+          <p:nvPr/>
+        </p:nvSpPr>
+        <p:spPr>
+          <a:xfrm>
+            <a:off x="457200" y="1920240"/>
+            <a:ext cx="11430000" cy="731520"/>
+          </a:xfrm>
+          <a:prstGeom prst="roundRect">
+            <a:avLst/>
+          </a:prstGeom>
+          <a:solidFill>
+            <a:srgbClr val="FFFFFF"/>
+          </a:solidFill>
+          <a:ln/>
+        </p:spPr>
+      </p:sp>
+      <p:sp>
+        <p:nvSpPr>
+          <p:cNvPr id="7" name="Text 5"/>
+          <p:cNvSpPr/>
+          <p:nvPr/>
+        </p:nvSpPr>
+        <p:spPr>
+          <a:xfrm>
+            <a:off x="731520" y="2103120"/>
+            <a:ext cx="8229600" cy="457200"/>
           </a:xfrm>
           <a:prstGeom prst="rect">
             <a:avLst/>
@@ -3270,10 +3931,10 @@
             <a:r>
               <a:rPr lang="en-US" sz="1600" dirty="0">
                 <a:solidFill>
-                  <a:srgbClr val="333333"/>
-                </a:solidFill>
-              </a:rPr>
-              <a:t>▪ 部分銀行需要「工作證明」或「納稅證明」</a:t>
+                  <a:srgbClr val="1A1A1A"/>
+                </a:solidFill>
+              </a:rPr>
+              <a:t>✓ 部分銀行需要「工作證明」或「納稅證明」</a:t>
             </a:r>
             <a:endParaRPr lang="en-US" sz="1600" dirty="0"/>
           </a:p>
@@ -3281,14 +3942,34 @@
       </p:sp>
       <p:sp>
         <p:nvSpPr>
-          <p:cNvPr id="5" name="Text 3"/>
-          <p:cNvSpPr/>
-          <p:nvPr/>
-        </p:nvSpPr>
-        <p:spPr>
-          <a:xfrm>
-            <a:off x="731520" y="2560320"/>
-            <a:ext cx="8229600" cy="640080"/>
+          <p:cNvPr id="8" name="Shape 6"/>
+          <p:cNvSpPr/>
+          <p:nvPr/>
+        </p:nvSpPr>
+        <p:spPr>
+          <a:xfrm>
+            <a:off x="457200" y="2743200"/>
+            <a:ext cx="11430000" cy="731520"/>
+          </a:xfrm>
+          <a:prstGeom prst="roundRect">
+            <a:avLst/>
+          </a:prstGeom>
+          <a:solidFill>
+            <a:srgbClr val="FFFFFF"/>
+          </a:solidFill>
+          <a:ln/>
+        </p:spPr>
+      </p:sp>
+      <p:sp>
+        <p:nvSpPr>
+          <p:cNvPr id="9" name="Text 7"/>
+          <p:cNvSpPr/>
+          <p:nvPr/>
+        </p:nvSpPr>
+        <p:spPr>
+          <a:xfrm>
+            <a:off x="731520" y="2926080"/>
+            <a:ext cx="8229600" cy="457200"/>
           </a:xfrm>
           <a:prstGeom prst="rect">
             <a:avLst/>
@@ -3306,10 +3987,10 @@
             <a:r>
               <a:rPr lang="en-US" sz="1600" dirty="0">
                 <a:solidFill>
-                  <a:srgbClr val="333333"/>
-                </a:solidFill>
-              </a:rPr>
-              <a:t>▪ 建議開戶時同時申請「網銀」和「手機銀行」</a:t>
+                  <a:srgbClr val="1A1A1A"/>
+                </a:solidFill>
+              </a:rPr>
+              <a:t>✓ 建議開戶時同時申請「網銀」和「手機銀行」</a:t>
             </a:r>
             <a:endParaRPr lang="en-US" sz="1600" dirty="0"/>
           </a:p>
@@ -3317,14 +3998,34 @@
       </p:sp>
       <p:sp>
         <p:nvSpPr>
-          <p:cNvPr id="6" name="Text 4"/>
-          <p:cNvSpPr/>
-          <p:nvPr/>
-        </p:nvSpPr>
-        <p:spPr>
-          <a:xfrm>
-            <a:off x="731520" y="3246120"/>
-            <a:ext cx="8229600" cy="640080"/>
+          <p:cNvPr id="10" name="Shape 8"/>
+          <p:cNvSpPr/>
+          <p:nvPr/>
+        </p:nvSpPr>
+        <p:spPr>
+          <a:xfrm>
+            <a:off x="457200" y="3566160"/>
+            <a:ext cx="11430000" cy="731520"/>
+          </a:xfrm>
+          <a:prstGeom prst="roundRect">
+            <a:avLst/>
+          </a:prstGeom>
+          <a:solidFill>
+            <a:srgbClr val="FFFFFF"/>
+          </a:solidFill>
+          <a:ln/>
+        </p:spPr>
+      </p:sp>
+      <p:sp>
+        <p:nvSpPr>
+          <p:cNvPr id="11" name="Text 9"/>
+          <p:cNvSpPr/>
+          <p:nvPr/>
+        </p:nvSpPr>
+        <p:spPr>
+          <a:xfrm>
+            <a:off x="731520" y="3749040"/>
+            <a:ext cx="8229600" cy="457200"/>
           </a:xfrm>
           <a:prstGeom prst="rect">
             <a:avLst/>
@@ -3342,10 +4043,10 @@
             <a:r>
               <a:rPr lang="en-US" sz="1600" dirty="0">
                 <a:solidFill>
-                  <a:srgbClr val="333333"/>
-                </a:solidFill>
-              </a:rPr>
-              <a:t>▪ 牢記 6 位數純數字「查詢密碼」和「交易密碼」</a:t>
+                  <a:srgbClr val="1A1A1A"/>
+                </a:solidFill>
+              </a:rPr>
+              <a:t>✓ 牢記 6 位數純數字「查詢密碼」和「交易密碼」</a:t>
             </a:r>
             <a:endParaRPr lang="en-US" sz="1600" dirty="0"/>
           </a:p>
@@ -3353,14 +4054,34 @@
       </p:sp>
       <p:sp>
         <p:nvSpPr>
-          <p:cNvPr id="7" name="Text 5"/>
-          <p:cNvSpPr/>
-          <p:nvPr/>
-        </p:nvSpPr>
-        <p:spPr>
-          <a:xfrm>
-            <a:off x="731520" y="3931920"/>
-            <a:ext cx="8229600" cy="640080"/>
+          <p:cNvPr id="12" name="Shape 10"/>
+          <p:cNvSpPr/>
+          <p:nvPr/>
+        </p:nvSpPr>
+        <p:spPr>
+          <a:xfrm>
+            <a:off x="457200" y="4389120"/>
+            <a:ext cx="11430000" cy="731520"/>
+          </a:xfrm>
+          <a:prstGeom prst="roundRect">
+            <a:avLst/>
+          </a:prstGeom>
+          <a:solidFill>
+            <a:srgbClr val="FFFFFF"/>
+          </a:solidFill>
+          <a:ln/>
+        </p:spPr>
+      </p:sp>
+      <p:sp>
+        <p:nvSpPr>
+          <p:cNvPr id="13" name="Text 11"/>
+          <p:cNvSpPr/>
+          <p:nvPr/>
+        </p:nvSpPr>
+        <p:spPr>
+          <a:xfrm>
+            <a:off x="731520" y="4572000"/>
+            <a:ext cx="8229600" cy="457200"/>
           </a:xfrm>
           <a:prstGeom prst="rect">
             <a:avLst/>
@@ -3378,10 +4099,10 @@
             <a:r>
               <a:rPr lang="en-US" sz="1600" dirty="0">
                 <a:solidFill>
-                  <a:srgbClr val="333333"/>
-                </a:solidFill>
-              </a:rPr>
-              <a:t>▪ 大陸銀行卡在台灣 ATM 也能提款（手續費約 1%）</a:t>
+                  <a:srgbClr val="1A1A1A"/>
+                </a:solidFill>
+              </a:rPr>
+              <a:t>✓ 大陸銀行卡在台灣 ATM 也能提款（手續費約 1%）</a:t>
             </a:r>
             <a:endParaRPr lang="en-US" sz="1600" dirty="0"/>
           </a:p>
@@ -3389,14 +4110,34 @@
       </p:sp>
       <p:sp>
         <p:nvSpPr>
-          <p:cNvPr id="8" name="Text 6"/>
-          <p:cNvSpPr/>
-          <p:nvPr/>
-        </p:nvSpPr>
-        <p:spPr>
-          <a:xfrm>
-            <a:off x="731520" y="4617720"/>
-            <a:ext cx="8229600" cy="640080"/>
+          <p:cNvPr id="14" name="Shape 12"/>
+          <p:cNvSpPr/>
+          <p:nvPr/>
+        </p:nvSpPr>
+        <p:spPr>
+          <a:xfrm>
+            <a:off x="457200" y="5212080"/>
+            <a:ext cx="11430000" cy="731520"/>
+          </a:xfrm>
+          <a:prstGeom prst="roundRect">
+            <a:avLst/>
+          </a:prstGeom>
+          <a:solidFill>
+            <a:srgbClr val="FFFFFF"/>
+          </a:solidFill>
+          <a:ln/>
+        </p:spPr>
+      </p:sp>
+      <p:sp>
+        <p:nvSpPr>
+          <p:cNvPr id="15" name="Text 13"/>
+          <p:cNvSpPr/>
+          <p:nvPr/>
+        </p:nvSpPr>
+        <p:spPr>
+          <a:xfrm>
+            <a:off x="731520" y="5394960"/>
+            <a:ext cx="8229600" cy="457200"/>
           </a:xfrm>
           <a:prstGeom prst="rect">
             <a:avLst/>
@@ -3414,10 +4155,10 @@
             <a:r>
               <a:rPr lang="en-US" sz="1600" dirty="0">
                 <a:solidFill>
-                  <a:srgbClr val="333333"/>
-                </a:solidFill>
-              </a:rPr>
-              <a:t>▪ 建議開戶後第一時間綁定支付寶/微信</a:t>
+                  <a:srgbClr val="1A1A1A"/>
+                </a:solidFill>
+              </a:rPr>
+              <a:t>✓ 建議開戶後第一時間綁定支付寶/微信</a:t>
             </a:r>
             <a:endParaRPr lang="en-US" sz="1600" dirty="0"/>
           </a:p>
@@ -3437,7 +4178,7 @@
     <p:bg>
       <p:bgPr>
         <a:solidFill>
-          <a:srgbClr val="F5F0E6"/>
+          <a:srgbClr val="F5F5F5"/>
         </a:solidFill>
       </p:bgPr>
     </p:bg>
@@ -3480,14 +4221,14 @@
               <a:buNone/>
             </a:pPr>
             <a:r>
-              <a:rPr lang="en-US" sz="3600" b="1" dirty="0">
-                <a:solidFill>
-                  <a:srgbClr val="8B4513"/>
+              <a:rPr lang="en-US" sz="3200" b="1" dirty="0">
+                <a:solidFill>
+                  <a:srgbClr val="1E3A5F"/>
                 </a:solidFill>
               </a:rPr>
               <a:t>❓ 常見問題</a:t>
             </a:r>
-            <a:endParaRPr lang="en-US" sz="3600" dirty="0"/>
+            <a:endParaRPr lang="en-US" sz="3200" dirty="0"/>
           </a:p>
         </p:txBody>
       </p:sp>
@@ -3499,8 +4240,8 @@
         </p:nvSpPr>
         <p:spPr>
           <a:xfrm>
-            <a:off x="457200" y="1188720"/>
-            <a:ext cx="8686800" cy="914400"/>
+            <a:off x="457200" y="1097280"/>
+            <a:ext cx="11430000" cy="1280160"/>
           </a:xfrm>
           <a:prstGeom prst="roundRect">
             <a:avLst/>
@@ -3508,12 +4249,7 @@
           <a:solidFill>
             <a:srgbClr val="FFFFFF"/>
           </a:solidFill>
-          <a:ln w="12700">
-            <a:solidFill>
-              <a:srgbClr val="654321"/>
-            </a:solidFill>
-            <a:prstDash val="solid"/>
-          </a:ln>
+          <a:ln/>
         </p:spPr>
       </p:sp>
       <p:sp>
@@ -3524,7 +4260,7 @@
         </p:nvSpPr>
         <p:spPr>
           <a:xfrm>
-            <a:off x="731520" y="1417320"/>
+            <a:off x="731520" y="1280160"/>
             <a:ext cx="8229600" cy="457200"/>
           </a:xfrm>
           <a:prstGeom prst="rect">
@@ -3541,12 +4277,48 @@
               <a:buNone/>
             </a:pPr>
             <a:r>
+              <a:rPr lang="en-US" sz="1800" b="1" dirty="0">
+                <a:solidFill>
+                  <a:srgbClr val="1E3A5F"/>
+                </a:solidFill>
+              </a:rPr>
+              <a:t>Q: 台胞證過期能開戶嗎？</a:t>
+            </a:r>
+            <a:endParaRPr lang="en-US" sz="1800" dirty="0"/>
+          </a:p>
+        </p:txBody>
+      </p:sp>
+      <p:sp>
+        <p:nvSpPr>
+          <p:cNvPr id="5" name="Text 3"/>
+          <p:cNvSpPr/>
+          <p:nvPr/>
+        </p:nvSpPr>
+        <p:spPr>
+          <a:xfrm>
+            <a:off x="731520" y="1737360"/>
+            <a:ext cx="8229600" cy="457200"/>
+          </a:xfrm>
+          <a:prstGeom prst="rect">
+            <a:avLst/>
+          </a:prstGeom>
+          <a:noFill/>
+          <a:ln/>
+        </p:spPr>
+        <p:txBody>
+          <a:bodyPr wrap="square" rtlCol="0" anchor="ctr"/>
+          <a:lstStyle/>
+          <a:p>
+            <a:pPr indent="0" marL="0">
+              <a:buNone/>
+            </a:pPr>
+            <a:r>
               <a:rPr lang="en-US" sz="1600" dirty="0">
                 <a:solidFill>
-                  <a:srgbClr val="333333"/>
-                </a:solidFill>
-              </a:rPr>
-              <a:t>Q: 台胞證過期能開戶嗎？ → 不能，必須證件有效</a:t>
+                  <a:srgbClr val="2E7D32"/>
+                </a:solidFill>
+              </a:rPr>
+              <a:t>A: 不能，必須證件有效</a:t>
             </a:r>
             <a:endParaRPr lang="en-US" sz="1600" dirty="0"/>
           </a:p>
@@ -3554,14 +4326,14 @@
       </p:sp>
       <p:sp>
         <p:nvSpPr>
-          <p:cNvPr id="5" name="Shape 3"/>
-          <p:cNvSpPr/>
-          <p:nvPr/>
-        </p:nvSpPr>
-        <p:spPr>
-          <a:xfrm>
-            <a:off x="457200" y="2286000"/>
-            <a:ext cx="8686800" cy="914400"/>
+          <p:cNvPr id="6" name="Shape 4"/>
+          <p:cNvSpPr/>
+          <p:nvPr/>
+        </p:nvSpPr>
+        <p:spPr>
+          <a:xfrm>
+            <a:off x="457200" y="2468880"/>
+            <a:ext cx="11430000" cy="1280160"/>
           </a:xfrm>
           <a:prstGeom prst="roundRect">
             <a:avLst/>
@@ -3569,23 +4341,18 @@
           <a:solidFill>
             <a:srgbClr val="FFFFFF"/>
           </a:solidFill>
-          <a:ln w="12700">
-            <a:solidFill>
-              <a:srgbClr val="654321"/>
-            </a:solidFill>
-            <a:prstDash val="solid"/>
-          </a:ln>
-        </p:spPr>
-      </p:sp>
-      <p:sp>
-        <p:nvSpPr>
-          <p:cNvPr id="6" name="Text 4"/>
-          <p:cNvSpPr/>
-          <p:nvPr/>
-        </p:nvSpPr>
-        <p:spPr>
-          <a:xfrm>
-            <a:off x="731520" y="2514600"/>
+          <a:ln/>
+        </p:spPr>
+      </p:sp>
+      <p:sp>
+        <p:nvSpPr>
+          <p:cNvPr id="7" name="Text 5"/>
+          <p:cNvSpPr/>
+          <p:nvPr/>
+        </p:nvSpPr>
+        <p:spPr>
+          <a:xfrm>
+            <a:off x="731520" y="2651760"/>
             <a:ext cx="8229600" cy="457200"/>
           </a:xfrm>
           <a:prstGeom prst="rect">
@@ -3602,12 +4369,48 @@
               <a:buNone/>
             </a:pPr>
             <a:r>
+              <a:rPr lang="en-US" sz="1800" b="1" dirty="0">
+                <a:solidFill>
+                  <a:srgbClr val="1E3A5F"/>
+                </a:solidFill>
+              </a:rPr>
+              <a:t>Q: 沒有大陸手機號怎麼辦？</a:t>
+            </a:r>
+            <a:endParaRPr lang="en-US" sz="1800" dirty="0"/>
+          </a:p>
+        </p:txBody>
+      </p:sp>
+      <p:sp>
+        <p:nvSpPr>
+          <p:cNvPr id="8" name="Text 6"/>
+          <p:cNvSpPr/>
+          <p:nvPr/>
+        </p:nvSpPr>
+        <p:spPr>
+          <a:xfrm>
+            <a:off x="731520" y="3108960"/>
+            <a:ext cx="8229600" cy="457200"/>
+          </a:xfrm>
+          <a:prstGeom prst="rect">
+            <a:avLst/>
+          </a:prstGeom>
+          <a:noFill/>
+          <a:ln/>
+        </p:spPr>
+        <p:txBody>
+          <a:bodyPr wrap="square" rtlCol="0" anchor="ctr"/>
+          <a:lstStyle/>
+          <a:p>
+            <a:pPr indent="0" marL="0">
+              <a:buNone/>
+            </a:pPr>
+            <a:r>
               <a:rPr lang="en-US" sz="1600" dirty="0">
                 <a:solidFill>
-                  <a:srgbClr val="333333"/>
-                </a:solidFill>
-              </a:rPr>
-              <a:t>Q: 沒有大陸手機號怎麼辦？ → 可在口岸購買預付費卡</a:t>
+                  <a:srgbClr val="2E7D32"/>
+                </a:solidFill>
+              </a:rPr>
+              <a:t>A: 可在口岸購買預付費卡</a:t>
             </a:r>
             <a:endParaRPr lang="en-US" sz="1600" dirty="0"/>
           </a:p>
@@ -3615,14 +4418,14 @@
       </p:sp>
       <p:sp>
         <p:nvSpPr>
-          <p:cNvPr id="7" name="Shape 5"/>
-          <p:cNvSpPr/>
-          <p:nvPr/>
-        </p:nvSpPr>
-        <p:spPr>
-          <a:xfrm>
-            <a:off x="457200" y="3383280"/>
-            <a:ext cx="8686800" cy="914400"/>
+          <p:cNvPr id="9" name="Shape 7"/>
+          <p:cNvSpPr/>
+          <p:nvPr/>
+        </p:nvSpPr>
+        <p:spPr>
+          <a:xfrm>
+            <a:off x="457200" y="3840480"/>
+            <a:ext cx="11430000" cy="1280160"/>
           </a:xfrm>
           <a:prstGeom prst="roundRect">
             <a:avLst/>
@@ -3630,23 +4433,18 @@
           <a:solidFill>
             <a:srgbClr val="FFFFFF"/>
           </a:solidFill>
-          <a:ln w="12700">
-            <a:solidFill>
-              <a:srgbClr val="654321"/>
-            </a:solidFill>
-            <a:prstDash val="solid"/>
-          </a:ln>
-        </p:spPr>
-      </p:sp>
-      <p:sp>
-        <p:nvSpPr>
-          <p:cNvPr id="8" name="Text 6"/>
-          <p:cNvSpPr/>
-          <p:nvPr/>
-        </p:nvSpPr>
-        <p:spPr>
-          <a:xfrm>
-            <a:off x="731520" y="3611880"/>
+          <a:ln/>
+        </p:spPr>
+      </p:sp>
+      <p:sp>
+        <p:nvSpPr>
+          <p:cNvPr id="10" name="Text 8"/>
+          <p:cNvSpPr/>
+          <p:nvPr/>
+        </p:nvSpPr>
+        <p:spPr>
+          <a:xfrm>
+            <a:off x="731520" y="4023360"/>
             <a:ext cx="8229600" cy="457200"/>
           </a:xfrm>
           <a:prstGeom prst="rect">
@@ -3663,12 +4461,48 @@
               <a:buNone/>
             </a:pPr>
             <a:r>
+              <a:rPr lang="en-US" sz="1800" b="1" dirty="0">
+                <a:solidFill>
+                  <a:srgbClr val="1E3A5F"/>
+                </a:solidFill>
+              </a:rPr>
+              <a:t>Q: 需要多久才能拿到卡？</a:t>
+            </a:r>
+            <a:endParaRPr lang="en-US" sz="1800" dirty="0"/>
+          </a:p>
+        </p:txBody>
+      </p:sp>
+      <p:sp>
+        <p:nvSpPr>
+          <p:cNvPr id="11" name="Text 9"/>
+          <p:cNvSpPr/>
+          <p:nvPr/>
+        </p:nvSpPr>
+        <p:spPr>
+          <a:xfrm>
+            <a:off x="731520" y="4480560"/>
+            <a:ext cx="8229600" cy="457200"/>
+          </a:xfrm>
+          <a:prstGeom prst="rect">
+            <a:avLst/>
+          </a:prstGeom>
+          <a:noFill/>
+          <a:ln/>
+        </p:spPr>
+        <p:txBody>
+          <a:bodyPr wrap="square" rtlCol="0" anchor="ctr"/>
+          <a:lstStyle/>
+          <a:p>
+            <a:pPr indent="0" marL="0">
+              <a:buNone/>
+            </a:pPr>
+            <a:r>
               <a:rPr lang="en-US" sz="1600" dirty="0">
                 <a:solidFill>
-                  <a:srgbClr val="333333"/>
-                </a:solidFill>
-              </a:rPr>
-              <a:t>Q: 需要多久才能拿到卡？ → 現場即刻出卡，網銀當場開通</a:t>
+                  <a:srgbClr val="2E7D32"/>
+                </a:solidFill>
+              </a:rPr>
+              <a:t>A: 現場即刻出卡，網銀當場開通</a:t>
             </a:r>
             <a:endParaRPr lang="en-US" sz="1600" dirty="0"/>
           </a:p>
@@ -3676,14 +4510,14 @@
       </p:sp>
       <p:sp>
         <p:nvSpPr>
-          <p:cNvPr id="9" name="Shape 7"/>
-          <p:cNvSpPr/>
-          <p:nvPr/>
-        </p:nvSpPr>
-        <p:spPr>
-          <a:xfrm>
-            <a:off x="457200" y="4480560"/>
-            <a:ext cx="8686800" cy="914400"/>
+          <p:cNvPr id="12" name="Shape 10"/>
+          <p:cNvSpPr/>
+          <p:nvPr/>
+        </p:nvSpPr>
+        <p:spPr>
+          <a:xfrm>
+            <a:off x="457200" y="5212080"/>
+            <a:ext cx="11430000" cy="1280160"/>
           </a:xfrm>
           <a:prstGeom prst="roundRect">
             <a:avLst/>
@@ -3691,23 +4525,18 @@
           <a:solidFill>
             <a:srgbClr val="FFFFFF"/>
           </a:solidFill>
-          <a:ln w="12700">
-            <a:solidFill>
-              <a:srgbClr val="654321"/>
-            </a:solidFill>
-            <a:prstDash val="solid"/>
-          </a:ln>
-        </p:spPr>
-      </p:sp>
-      <p:sp>
-        <p:nvSpPr>
-          <p:cNvPr id="10" name="Text 8"/>
-          <p:cNvSpPr/>
-          <p:nvPr/>
-        </p:nvSpPr>
-        <p:spPr>
-          <a:xfrm>
-            <a:off x="731520" y="4709160"/>
+          <a:ln/>
+        </p:spPr>
+      </p:sp>
+      <p:sp>
+        <p:nvSpPr>
+          <p:cNvPr id="13" name="Text 11"/>
+          <p:cNvSpPr/>
+          <p:nvPr/>
+        </p:nvSpPr>
+        <p:spPr>
+          <a:xfrm>
+            <a:off x="731520" y="5394960"/>
             <a:ext cx="8229600" cy="457200"/>
           </a:xfrm>
           <a:prstGeom prst="rect">
@@ -3724,12 +4553,48 @@
               <a:buNone/>
             </a:pPr>
             <a:r>
+              <a:rPr lang="en-US" sz="1800" b="1" dirty="0">
+                <a:solidFill>
+                  <a:srgbClr val="1E3A5F"/>
+                </a:solidFill>
+              </a:rPr>
+              <a:t>Q: 可以開戶外幣帳戶嗎？</a:t>
+            </a:r>
+            <a:endParaRPr lang="en-US" sz="1800" dirty="0"/>
+          </a:p>
+        </p:txBody>
+      </p:sp>
+      <p:sp>
+        <p:nvSpPr>
+          <p:cNvPr id="14" name="Text 12"/>
+          <p:cNvSpPr/>
+          <p:nvPr/>
+        </p:nvSpPr>
+        <p:spPr>
+          <a:xfrm>
+            <a:off x="731520" y="5852160"/>
+            <a:ext cx="8229600" cy="457200"/>
+          </a:xfrm>
+          <a:prstGeom prst="rect">
+            <a:avLst/>
+          </a:prstGeom>
+          <a:noFill/>
+          <a:ln/>
+        </p:spPr>
+        <p:txBody>
+          <a:bodyPr wrap="square" rtlCol="0" anchor="ctr"/>
+          <a:lstStyle/>
+          <a:p>
+            <a:pPr indent="0" marL="0">
+              <a:buNone/>
+            </a:pPr>
+            <a:r>
               <a:rPr lang="en-US" sz="1600" dirty="0">
                 <a:solidFill>
-                  <a:srgbClr val="333333"/>
-                </a:solidFill>
-              </a:rPr>
-              <a:t>Q: 可以開戶外幣帳戶嗎？ → 可以，需另外申請</a:t>
+                  <a:srgbClr val="2E7D32"/>
+                </a:solidFill>
+              </a:rPr>
+              <a:t>A: 可以，需另外申請</a:t>
             </a:r>
             <a:endParaRPr lang="en-US" sz="1600" dirty="0"/>
           </a:p>
@@ -3749,7 +4614,7 @@
     <p:bg>
       <p:bgPr>
         <a:solidFill>
-          <a:srgbClr val="F5F0E6"/>
+          <a:srgbClr val="1E3A5F"/>
         </a:solidFill>
       </p:bgPr>
     </p:bg>
@@ -3792,14 +4657,14 @@
               <a:buNone/>
             </a:pPr>
             <a:r>
-              <a:rPr lang="en-US" sz="3600" b="1" dirty="0">
-                <a:solidFill>
-                  <a:srgbClr val="8B4513"/>
+              <a:rPr lang="en-US" sz="3200" b="1" dirty="0">
+                <a:solidFill>
+                  <a:srgbClr val="FFFFFF"/>
                 </a:solidFill>
               </a:rPr>
               <a:t>📞 緊急聯繫</a:t>
             </a:r>
-            <a:endParaRPr lang="en-US" sz="3600" dirty="0"/>
+            <a:endParaRPr lang="en-US" sz="3200" dirty="0"/>
           </a:p>
         </p:txBody>
       </p:sp>
@@ -3811,14 +4676,14 @@
         </p:nvSpPr>
         <p:spPr>
           <a:xfrm>
-            <a:off x="1828800" y="1371600"/>
-            <a:ext cx="5486400" cy="731520"/>
+            <a:off x="2286000" y="1188720"/>
+            <a:ext cx="7772400" cy="1005840"/>
           </a:xfrm>
           <a:prstGeom prst="roundRect">
             <a:avLst/>
           </a:prstGeom>
           <a:solidFill>
-            <a:srgbClr val="8B4513"/>
+            <a:srgbClr val="FFFFFF"/>
           </a:solidFill>
           <a:ln/>
         </p:spPr>
@@ -3831,8 +4696,356 @@
         </p:nvSpPr>
         <p:spPr>
           <a:xfrm>
-            <a:off x="1828800" y="1554480"/>
-            <a:ext cx="5486400" cy="457200"/>
+            <a:off x="2560320" y="1371600"/>
+            <a:ext cx="4572000" cy="457200"/>
+          </a:xfrm>
+          <a:prstGeom prst="rect">
+            <a:avLst/>
+          </a:prstGeom>
+          <a:noFill/>
+          <a:ln/>
+        </p:spPr>
+        <p:txBody>
+          <a:bodyPr wrap="square" rtlCol="0" anchor="ctr"/>
+          <a:lstStyle/>
+          <a:p>
+            <a:pPr indent="0" marL="0">
+              <a:buNone/>
+            </a:pPr>
+            <a:r>
+              <a:rPr lang="en-US" sz="1800" dirty="0">
+                <a:solidFill>
+                  <a:srgbClr val="1A1A1A"/>
+                </a:solidFill>
+              </a:rPr>
+              <a:t>中國工商銀行客服</a:t>
+            </a:r>
+            <a:endParaRPr lang="en-US" sz="1800" dirty="0"/>
+          </a:p>
+        </p:txBody>
+      </p:sp>
+      <p:sp>
+        <p:nvSpPr>
+          <p:cNvPr id="5" name="Text 3"/>
+          <p:cNvSpPr/>
+          <p:nvPr/>
+        </p:nvSpPr>
+        <p:spPr>
+          <a:xfrm>
+            <a:off x="6858000" y="1371600"/>
+            <a:ext cx="2743200" cy="640080"/>
+          </a:xfrm>
+          <a:prstGeom prst="rect">
+            <a:avLst/>
+          </a:prstGeom>
+          <a:noFill/>
+          <a:ln/>
+        </p:spPr>
+        <p:txBody>
+          <a:bodyPr wrap="square" rtlCol="0" anchor="ctr"/>
+          <a:lstStyle/>
+          <a:p>
+            <a:pPr algn="r" indent="0" marL="0">
+              <a:buNone/>
+            </a:pPr>
+            <a:r>
+              <a:rPr lang="en-US" sz="2400" b="1" dirty="0">
+                <a:solidFill>
+                  <a:srgbClr val="1E3A5F"/>
+                </a:solidFill>
+              </a:rPr>
+              <a:t>95588</a:t>
+            </a:r>
+            <a:endParaRPr lang="en-US" sz="2400" dirty="0"/>
+          </a:p>
+        </p:txBody>
+      </p:sp>
+      <p:sp>
+        <p:nvSpPr>
+          <p:cNvPr id="6" name="Shape 4"/>
+          <p:cNvSpPr/>
+          <p:nvPr/>
+        </p:nvSpPr>
+        <p:spPr>
+          <a:xfrm>
+            <a:off x="2286000" y="2377440"/>
+            <a:ext cx="7772400" cy="1005840"/>
+          </a:xfrm>
+          <a:prstGeom prst="roundRect">
+            <a:avLst/>
+          </a:prstGeom>
+          <a:solidFill>
+            <a:srgbClr val="FFFFFF"/>
+          </a:solidFill>
+          <a:ln/>
+        </p:spPr>
+      </p:sp>
+      <p:sp>
+        <p:nvSpPr>
+          <p:cNvPr id="7" name="Text 5"/>
+          <p:cNvSpPr/>
+          <p:nvPr/>
+        </p:nvSpPr>
+        <p:spPr>
+          <a:xfrm>
+            <a:off x="2560320" y="2560320"/>
+            <a:ext cx="4572000" cy="457200"/>
+          </a:xfrm>
+          <a:prstGeom prst="rect">
+            <a:avLst/>
+          </a:prstGeom>
+          <a:noFill/>
+          <a:ln/>
+        </p:spPr>
+        <p:txBody>
+          <a:bodyPr wrap="square" rtlCol="0" anchor="ctr"/>
+          <a:lstStyle/>
+          <a:p>
+            <a:pPr indent="0" marL="0">
+              <a:buNone/>
+            </a:pPr>
+            <a:r>
+              <a:rPr lang="en-US" sz="1800" dirty="0">
+                <a:solidFill>
+                  <a:srgbClr val="1A1A1A"/>
+                </a:solidFill>
+              </a:rPr>
+              <a:t>中國建設銀行客服</a:t>
+            </a:r>
+            <a:endParaRPr lang="en-US" sz="1800" dirty="0"/>
+          </a:p>
+        </p:txBody>
+      </p:sp>
+      <p:sp>
+        <p:nvSpPr>
+          <p:cNvPr id="8" name="Text 6"/>
+          <p:cNvSpPr/>
+          <p:nvPr/>
+        </p:nvSpPr>
+        <p:spPr>
+          <a:xfrm>
+            <a:off x="6858000" y="2560320"/>
+            <a:ext cx="2743200" cy="640080"/>
+          </a:xfrm>
+          <a:prstGeom prst="rect">
+            <a:avLst/>
+          </a:prstGeom>
+          <a:noFill/>
+          <a:ln/>
+        </p:spPr>
+        <p:txBody>
+          <a:bodyPr wrap="square" rtlCol="0" anchor="ctr"/>
+          <a:lstStyle/>
+          <a:p>
+            <a:pPr algn="r" indent="0" marL="0">
+              <a:buNone/>
+            </a:pPr>
+            <a:r>
+              <a:rPr lang="en-US" sz="2400" b="1" dirty="0">
+                <a:solidFill>
+                  <a:srgbClr val="1E3A5F"/>
+                </a:solidFill>
+              </a:rPr>
+              <a:t>95533</a:t>
+            </a:r>
+            <a:endParaRPr lang="en-US" sz="2400" dirty="0"/>
+          </a:p>
+        </p:txBody>
+      </p:sp>
+      <p:sp>
+        <p:nvSpPr>
+          <p:cNvPr id="9" name="Shape 7"/>
+          <p:cNvSpPr/>
+          <p:nvPr/>
+        </p:nvSpPr>
+        <p:spPr>
+          <a:xfrm>
+            <a:off x="2286000" y="3566160"/>
+            <a:ext cx="7772400" cy="1005840"/>
+          </a:xfrm>
+          <a:prstGeom prst="roundRect">
+            <a:avLst/>
+          </a:prstGeom>
+          <a:solidFill>
+            <a:srgbClr val="FFFFFF"/>
+          </a:solidFill>
+          <a:ln/>
+        </p:spPr>
+      </p:sp>
+      <p:sp>
+        <p:nvSpPr>
+          <p:cNvPr id="10" name="Text 8"/>
+          <p:cNvSpPr/>
+          <p:nvPr/>
+        </p:nvSpPr>
+        <p:spPr>
+          <a:xfrm>
+            <a:off x="2560320" y="3749040"/>
+            <a:ext cx="4572000" cy="457200"/>
+          </a:xfrm>
+          <a:prstGeom prst="rect">
+            <a:avLst/>
+          </a:prstGeom>
+          <a:noFill/>
+          <a:ln/>
+        </p:spPr>
+        <p:txBody>
+          <a:bodyPr wrap="square" rtlCol="0" anchor="ctr"/>
+          <a:lstStyle/>
+          <a:p>
+            <a:pPr indent="0" marL="0">
+              <a:buNone/>
+            </a:pPr>
+            <a:r>
+              <a:rPr lang="en-US" sz="1800" dirty="0">
+                <a:solidFill>
+                  <a:srgbClr val="1A1A1A"/>
+                </a:solidFill>
+              </a:rPr>
+              <a:t>招商銀行客服</a:t>
+            </a:r>
+            <a:endParaRPr lang="en-US" sz="1800" dirty="0"/>
+          </a:p>
+        </p:txBody>
+      </p:sp>
+      <p:sp>
+        <p:nvSpPr>
+          <p:cNvPr id="11" name="Text 9"/>
+          <p:cNvSpPr/>
+          <p:nvPr/>
+        </p:nvSpPr>
+        <p:spPr>
+          <a:xfrm>
+            <a:off x="6858000" y="3749040"/>
+            <a:ext cx="2743200" cy="640080"/>
+          </a:xfrm>
+          <a:prstGeom prst="rect">
+            <a:avLst/>
+          </a:prstGeom>
+          <a:noFill/>
+          <a:ln/>
+        </p:spPr>
+        <p:txBody>
+          <a:bodyPr wrap="square" rtlCol="0" anchor="ctr"/>
+          <a:lstStyle/>
+          <a:p>
+            <a:pPr algn="r" indent="0" marL="0">
+              <a:buNone/>
+            </a:pPr>
+            <a:r>
+              <a:rPr lang="en-US" sz="2400" b="1" dirty="0">
+                <a:solidFill>
+                  <a:srgbClr val="1E3A5F"/>
+                </a:solidFill>
+              </a:rPr>
+              <a:t>95555</a:t>
+            </a:r>
+            <a:endParaRPr lang="en-US" sz="2400" dirty="0"/>
+          </a:p>
+        </p:txBody>
+      </p:sp>
+      <p:sp>
+        <p:nvSpPr>
+          <p:cNvPr id="12" name="Shape 10"/>
+          <p:cNvSpPr/>
+          <p:nvPr/>
+        </p:nvSpPr>
+        <p:spPr>
+          <a:xfrm>
+            <a:off x="2286000" y="4754880"/>
+            <a:ext cx="7772400" cy="1005840"/>
+          </a:xfrm>
+          <a:prstGeom prst="roundRect">
+            <a:avLst/>
+          </a:prstGeom>
+          <a:solidFill>
+            <a:srgbClr val="FFFFFF"/>
+          </a:solidFill>
+          <a:ln/>
+        </p:spPr>
+      </p:sp>
+      <p:sp>
+        <p:nvSpPr>
+          <p:cNvPr id="13" name="Text 11"/>
+          <p:cNvSpPr/>
+          <p:nvPr/>
+        </p:nvSpPr>
+        <p:spPr>
+          <a:xfrm>
+            <a:off x="2560320" y="4937760"/>
+            <a:ext cx="4572000" cy="457200"/>
+          </a:xfrm>
+          <a:prstGeom prst="rect">
+            <a:avLst/>
+          </a:prstGeom>
+          <a:noFill/>
+          <a:ln/>
+        </p:spPr>
+        <p:txBody>
+          <a:bodyPr wrap="square" rtlCol="0" anchor="ctr"/>
+          <a:lstStyle/>
+          <a:p>
+            <a:pPr indent="0" marL="0">
+              <a:buNone/>
+            </a:pPr>
+            <a:r>
+              <a:rPr lang="en-US" sz="1800" dirty="0">
+                <a:solidFill>
+                  <a:srgbClr val="1A1A1A"/>
+                </a:solidFill>
+              </a:rPr>
+              <a:t>大陸區號</a:t>
+            </a:r>
+            <a:endParaRPr lang="en-US" sz="1800" dirty="0"/>
+          </a:p>
+        </p:txBody>
+      </p:sp>
+      <p:sp>
+        <p:nvSpPr>
+          <p:cNvPr id="14" name="Text 12"/>
+          <p:cNvSpPr/>
+          <p:nvPr/>
+        </p:nvSpPr>
+        <p:spPr>
+          <a:xfrm>
+            <a:off x="6858000" y="4937760"/>
+            <a:ext cx="2743200" cy="640080"/>
+          </a:xfrm>
+          <a:prstGeom prst="rect">
+            <a:avLst/>
+          </a:prstGeom>
+          <a:noFill/>
+          <a:ln/>
+        </p:spPr>
+        <p:txBody>
+          <a:bodyPr wrap="square" rtlCol="0" anchor="ctr"/>
+          <a:lstStyle/>
+          <a:p>
+            <a:pPr algn="r" indent="0" marL="0">
+              <a:buNone/>
+            </a:pPr>
+            <a:r>
+              <a:rPr lang="en-US" sz="2400" b="1" dirty="0">
+                <a:solidFill>
+                  <a:srgbClr val="1E3A5F"/>
+                </a:solidFill>
+              </a:rPr>
+              <a:t>+86</a:t>
+            </a:r>
+            <a:endParaRPr lang="en-US" sz="2400" dirty="0"/>
+          </a:p>
+        </p:txBody>
+      </p:sp>
+      <p:sp>
+        <p:nvSpPr>
+          <p:cNvPr id="15" name="Text 13"/>
+          <p:cNvSpPr/>
+          <p:nvPr/>
+        </p:nvSpPr>
+        <p:spPr>
+          <a:xfrm>
+            <a:off x="457200" y="5943600"/>
+            <a:ext cx="8686800" cy="457200"/>
           </a:xfrm>
           <a:prstGeom prst="rect">
             <a:avLst/>
@@ -3848,213 +5061,9 @@
               <a:buNone/>
             </a:pPr>
             <a:r>
-              <a:rPr lang="en-US" sz="2000" b="1" dirty="0">
-                <a:solidFill>
-                  <a:srgbClr val="FFFFFF"/>
-                </a:solidFill>
-              </a:rPr>
-              <a:t>中國工商銀行客服：95588</a:t>
-            </a:r>
-            <a:endParaRPr lang="en-US" sz="2000" dirty="0"/>
-          </a:p>
-        </p:txBody>
-      </p:sp>
-      <p:sp>
-        <p:nvSpPr>
-          <p:cNvPr id="5" name="Shape 3"/>
-          <p:cNvSpPr/>
-          <p:nvPr/>
-        </p:nvSpPr>
-        <p:spPr>
-          <a:xfrm>
-            <a:off x="1828800" y="2377440"/>
-            <a:ext cx="5486400" cy="731520"/>
-          </a:xfrm>
-          <a:prstGeom prst="roundRect">
-            <a:avLst/>
-          </a:prstGeom>
-          <a:solidFill>
-            <a:srgbClr val="8B4513"/>
-          </a:solidFill>
-          <a:ln/>
-        </p:spPr>
-      </p:sp>
-      <p:sp>
-        <p:nvSpPr>
-          <p:cNvPr id="6" name="Text 4"/>
-          <p:cNvSpPr/>
-          <p:nvPr/>
-        </p:nvSpPr>
-        <p:spPr>
-          <a:xfrm>
-            <a:off x="1828800" y="2560320"/>
-            <a:ext cx="5486400" cy="457200"/>
-          </a:xfrm>
-          <a:prstGeom prst="rect">
-            <a:avLst/>
-          </a:prstGeom>
-          <a:noFill/>
-          <a:ln/>
-        </p:spPr>
-        <p:txBody>
-          <a:bodyPr wrap="square" rtlCol="0" anchor="ctr"/>
-          <a:lstStyle/>
-          <a:p>
-            <a:pPr algn="ctr" indent="0" marL="0">
-              <a:buNone/>
-            </a:pPr>
-            <a:r>
-              <a:rPr lang="en-US" sz="2000" b="1" dirty="0">
-                <a:solidFill>
-                  <a:srgbClr val="FFFFFF"/>
-                </a:solidFill>
-              </a:rPr>
-              <a:t>中國建設銀行客服：95533</a:t>
-            </a:r>
-            <a:endParaRPr lang="en-US" sz="2000" dirty="0"/>
-          </a:p>
-        </p:txBody>
-      </p:sp>
-      <p:sp>
-        <p:nvSpPr>
-          <p:cNvPr id="7" name="Shape 5"/>
-          <p:cNvSpPr/>
-          <p:nvPr/>
-        </p:nvSpPr>
-        <p:spPr>
-          <a:xfrm>
-            <a:off x="1828800" y="3383280"/>
-            <a:ext cx="5486400" cy="731520"/>
-          </a:xfrm>
-          <a:prstGeom prst="roundRect">
-            <a:avLst/>
-          </a:prstGeom>
-          <a:solidFill>
-            <a:srgbClr val="8B4513"/>
-          </a:solidFill>
-          <a:ln/>
-        </p:spPr>
-      </p:sp>
-      <p:sp>
-        <p:nvSpPr>
-          <p:cNvPr id="8" name="Text 6"/>
-          <p:cNvSpPr/>
-          <p:nvPr/>
-        </p:nvSpPr>
-        <p:spPr>
-          <a:xfrm>
-            <a:off x="1828800" y="3566160"/>
-            <a:ext cx="5486400" cy="457200"/>
-          </a:xfrm>
-          <a:prstGeom prst="rect">
-            <a:avLst/>
-          </a:prstGeom>
-          <a:noFill/>
-          <a:ln/>
-        </p:spPr>
-        <p:txBody>
-          <a:bodyPr wrap="square" rtlCol="0" anchor="ctr"/>
-          <a:lstStyle/>
-          <a:p>
-            <a:pPr algn="ctr" indent="0" marL="0">
-              <a:buNone/>
-            </a:pPr>
-            <a:r>
-              <a:rPr lang="en-US" sz="2000" b="1" dirty="0">
-                <a:solidFill>
-                  <a:srgbClr val="FFFFFF"/>
-                </a:solidFill>
-              </a:rPr>
-              <a:t>招商銀行客服：95555</a:t>
-            </a:r>
-            <a:endParaRPr lang="en-US" sz="2000" dirty="0"/>
-          </a:p>
-        </p:txBody>
-      </p:sp>
-      <p:sp>
-        <p:nvSpPr>
-          <p:cNvPr id="9" name="Shape 7"/>
-          <p:cNvSpPr/>
-          <p:nvPr/>
-        </p:nvSpPr>
-        <p:spPr>
-          <a:xfrm>
-            <a:off x="1828800" y="4389120"/>
-            <a:ext cx="5486400" cy="731520"/>
-          </a:xfrm>
-          <a:prstGeom prst="roundRect">
-            <a:avLst/>
-          </a:prstGeom>
-          <a:solidFill>
-            <a:srgbClr val="8B4513"/>
-          </a:solidFill>
-          <a:ln/>
-        </p:spPr>
-      </p:sp>
-      <p:sp>
-        <p:nvSpPr>
-          <p:cNvPr id="10" name="Text 8"/>
-          <p:cNvSpPr/>
-          <p:nvPr/>
-        </p:nvSpPr>
-        <p:spPr>
-          <a:xfrm>
-            <a:off x="1828800" y="4572000"/>
-            <a:ext cx="5486400" cy="457200"/>
-          </a:xfrm>
-          <a:prstGeom prst="rect">
-            <a:avLst/>
-          </a:prstGeom>
-          <a:noFill/>
-          <a:ln/>
-        </p:spPr>
-        <p:txBody>
-          <a:bodyPr wrap="square" rtlCol="0" anchor="ctr"/>
-          <a:lstStyle/>
-          <a:p>
-            <a:pPr algn="ctr" indent="0" marL="0">
-              <a:buNone/>
-            </a:pPr>
-            <a:r>
-              <a:rPr lang="en-US" sz="2000" b="1" dirty="0">
-                <a:solidFill>
-                  <a:srgbClr val="FFFFFF"/>
-                </a:solidFill>
-              </a:rPr>
-              <a:t>大陸區號：+86</a:t>
-            </a:r>
-            <a:endParaRPr lang="en-US" sz="2000" dirty="0"/>
-          </a:p>
-        </p:txBody>
-      </p:sp>
-      <p:sp>
-        <p:nvSpPr>
-          <p:cNvPr id="11" name="Text 9"/>
-          <p:cNvSpPr/>
-          <p:nvPr/>
-        </p:nvSpPr>
-        <p:spPr>
-          <a:xfrm>
-            <a:off x="457200" y="5669280"/>
-            <a:ext cx="8686800" cy="457200"/>
-          </a:xfrm>
-          <a:prstGeom prst="rect">
-            <a:avLst/>
-          </a:prstGeom>
-          <a:noFill/>
-          <a:ln/>
-        </p:spPr>
-        <p:txBody>
-          <a:bodyPr wrap="square" rtlCol="0" anchor="ctr"/>
-          <a:lstStyle/>
-          <a:p>
-            <a:pPr algn="ctr" indent="0" marL="0">
-              <a:buNone/>
-            </a:pPr>
-            <a:r>
               <a:rPr lang="en-US" sz="1800" dirty="0">
                 <a:solidFill>
-                  <a:srgbClr val="654321"/>
+                  <a:srgbClr val="E3F2FD"/>
                 </a:solidFill>
               </a:rPr>
               <a:t>感謝使用</a:t>

--- a/bank-account-guide.pptx
+++ b/bank-account-guide.pptx
@@ -1411,34 +1411,14 @@
       </p:grpSpPr>
       <p:sp>
         <p:nvSpPr>
-          <p:cNvPr id="2" name="Shape 0"/>
-          <p:cNvSpPr/>
-          <p:nvPr/>
-        </p:nvSpPr>
-        <p:spPr>
-          <a:xfrm>
-            <a:off x="0" y="0"/>
-            <a:ext cx="9144000" cy="137160"/>
-          </a:xfrm>
-          <a:prstGeom prst="rect">
-            <a:avLst/>
-          </a:prstGeom>
-          <a:solidFill>
-            <a:srgbClr val="FF6F00"/>
-          </a:solidFill>
-          <a:ln/>
-        </p:spPr>
-      </p:sp>
-      <p:sp>
-        <p:nvSpPr>
-          <p:cNvPr id="3" name="Text 1"/>
-          <p:cNvSpPr/>
-          <p:nvPr/>
-        </p:nvSpPr>
-        <p:spPr>
-          <a:xfrm>
-            <a:off x="457200" y="1645920"/>
-            <a:ext cx="8229600" cy="1828800"/>
+          <p:cNvPr id="2" name="Text 0"/>
+          <p:cNvSpPr/>
+          <p:nvPr/>
+        </p:nvSpPr>
+        <p:spPr>
+          <a:xfrm>
+            <a:off x="457200" y="1371600"/>
+            <a:ext cx="8229600" cy="1371600"/>
           </a:xfrm>
           <a:prstGeom prst="rect">
             <a:avLst/>
@@ -1452,36 +1432,72 @@
           <a:p>
             <a:pPr algn="ctr" indent="0" marL="0">
               <a:lnSpc>
-                <a:spcPts val="5600"/>
+                <a:spcPts val="4800"/>
               </a:lnSpc>
               <a:buNone/>
             </a:pPr>
             <a:r>
-              <a:rPr lang="en-US" sz="5200" b="1" dirty="0">
+              <a:rPr lang="en-US" sz="4400" b="1" dirty="0">
                 <a:solidFill>
                   <a:srgbClr val="FFFFFF"/>
                 </a:solidFill>
               </a:rPr>
               <a:t>到大陸開銀行卡</a:t>
             </a:r>
-            <a:endParaRPr lang="en-US" sz="5200" dirty="0"/>
+            <a:endParaRPr lang="en-US" sz="4400" dirty="0"/>
           </a:p>
           <a:p>
             <a:pPr algn="ctr" indent="0" marL="0">
               <a:lnSpc>
-                <a:spcPts val="5600"/>
+                <a:spcPts val="4800"/>
               </a:lnSpc>
               <a:buNone/>
             </a:pPr>
             <a:r>
-              <a:rPr lang="en-US" sz="5200" b="1" dirty="0">
+              <a:rPr lang="en-US" sz="4400" b="1" dirty="0">
                 <a:solidFill>
                   <a:srgbClr val="FFFFFF"/>
                 </a:solidFill>
               </a:rPr>
               <a:t>實用指南</a:t>
             </a:r>
-            <a:endParaRPr lang="en-US" sz="5200" dirty="0"/>
+            <a:endParaRPr lang="en-US" sz="4400" dirty="0"/>
+          </a:p>
+        </p:txBody>
+      </p:sp>
+      <p:sp>
+        <p:nvSpPr>
+          <p:cNvPr id="3" name="Text 1"/>
+          <p:cNvSpPr/>
+          <p:nvPr/>
+        </p:nvSpPr>
+        <p:spPr>
+          <a:xfrm>
+            <a:off x="457200" y="2926080"/>
+            <a:ext cx="8229600" cy="457200"/>
+          </a:xfrm>
+          <a:prstGeom prst="rect">
+            <a:avLst/>
+          </a:prstGeom>
+          <a:noFill/>
+          <a:ln/>
+        </p:spPr>
+        <p:txBody>
+          <a:bodyPr wrap="square" rtlCol="0" anchor="ctr"/>
+          <a:lstStyle/>
+          <a:p>
+            <a:pPr algn="ctr" indent="0" marL="0">
+              <a:buNone/>
+            </a:pPr>
+            <a:r>
+              <a:rPr lang="en-US" sz="1800" dirty="0">
+                <a:solidFill>
+                  <a:srgbClr val="FFFFFF"/>
+                </a:solidFill>
+              </a:rPr>
+              <a:t>台灣居民赴中國大陸開戶完整攻略</a:t>
+            </a:r>
+            <a:endParaRPr lang="en-US" sz="1800" dirty="0"/>
           </a:p>
         </p:txBody>
       </p:sp>
@@ -1493,8 +1509,8 @@
         </p:nvSpPr>
         <p:spPr>
           <a:xfrm>
-            <a:off x="457200" y="3657600"/>
-            <a:ext cx="8229600" cy="548640"/>
+            <a:off x="457200" y="4389120"/>
+            <a:ext cx="8229600" cy="457200"/>
           </a:xfrm>
           <a:prstGeom prst="rect">
             <a:avLst/>
@@ -1510,93 +1526,14 @@
               <a:buNone/>
             </a:pPr>
             <a:r>
-              <a:rPr lang="en-US" sz="2200" dirty="0">
-                <a:solidFill>
-                  <a:srgbClr val="E3F2FD"/>
-                </a:solidFill>
-              </a:rPr>
-              <a:t>台灣居民赴中國大陸開戶完整攻略</a:t>
-            </a:r>
-            <a:endParaRPr lang="en-US" sz="2200" dirty="0"/>
-          </a:p>
-        </p:txBody>
-      </p:sp>
-      <p:sp>
-        <p:nvSpPr>
-          <p:cNvPr id="5" name="Shape 3"/>
-          <p:cNvSpPr/>
-          <p:nvPr/>
-        </p:nvSpPr>
-        <p:spPr>
-          <a:xfrm>
-            <a:off x="2743200" y="4389120"/>
-            <a:ext cx="6400800" cy="0"/>
-          </a:xfrm>
-          <a:prstGeom prst="line">
-            <a:avLst/>
-          </a:prstGeom>
-          <a:noFill/>
-          <a:ln w="38100">
-            <a:solidFill>
-              <a:srgbClr val="FF6F00"/>
-            </a:solidFill>
-            <a:prstDash val="solid"/>
-          </a:ln>
-        </p:spPr>
-      </p:sp>
-      <p:sp>
-        <p:nvSpPr>
-          <p:cNvPr id="6" name="Shape 4"/>
-          <p:cNvSpPr/>
-          <p:nvPr/>
-        </p:nvSpPr>
-        <p:spPr>
-          <a:xfrm>
-            <a:off x="0" y="5303520"/>
-            <a:ext cx="9144000" cy="1097280"/>
-          </a:xfrm>
-          <a:prstGeom prst="rect">
-            <a:avLst/>
-          </a:prstGeom>
-          <a:solidFill>
-            <a:srgbClr val="0D2847"/>
-          </a:solidFill>
-          <a:ln/>
-        </p:spPr>
-      </p:sp>
-      <p:sp>
-        <p:nvSpPr>
-          <p:cNvPr id="7" name="Text 5"/>
-          <p:cNvSpPr/>
-          <p:nvPr/>
-        </p:nvSpPr>
-        <p:spPr>
-          <a:xfrm>
-            <a:off x="457200" y="5486400"/>
-            <a:ext cx="8686800" cy="731520"/>
-          </a:xfrm>
-          <a:prstGeom prst="rect">
-            <a:avLst/>
-          </a:prstGeom>
-          <a:noFill/>
-          <a:ln/>
-        </p:spPr>
-        <p:txBody>
-          <a:bodyPr wrap="square" rtlCol="0" anchor="ctr"/>
-          <a:lstStyle/>
-          <a:p>
-            <a:pPr algn="ctr" indent="0" marL="0">
-              <a:buNone/>
-            </a:pPr>
-            <a:r>
-              <a:rPr lang="en-US" sz="2000" dirty="0">
-                <a:solidFill>
-                  <a:srgbClr val="FFFFFF"/>
-                </a:solidFill>
-              </a:rPr>
-              <a:t>📋 建議收藏 以備不時之需</a:t>
-            </a:r>
-            <a:endParaRPr lang="en-US" sz="2000" dirty="0"/>
+              <a:rPr lang="en-US" sz="1600" dirty="0">
+                <a:solidFill>
+                  <a:srgbClr val="FF6F00"/>
+                </a:solidFill>
+              </a:rPr>
+              <a:t>📋 建議收藏</a:t>
+            </a:r>
+            <a:endParaRPr lang="en-US" sz="1600" dirty="0"/>
           </a:p>
         </p:txBody>
       </p:sp>
@@ -1614,7 +1551,7 @@
     <p:bg>
       <p:bgPr>
         <a:solidFill>
-          <a:srgbClr val="F5F5F5"/>
+          <a:srgbClr val="FAFAFA"/>
         </a:solidFill>
       </p:bgPr>
     </p:bg>
@@ -1634,34 +1571,14 @@
       </p:grpSpPr>
       <p:sp>
         <p:nvSpPr>
-          <p:cNvPr id="2" name="Shape 0"/>
-          <p:cNvSpPr/>
-          <p:nvPr/>
-        </p:nvSpPr>
-        <p:spPr>
-          <a:xfrm>
-            <a:off x="0" y="0"/>
-            <a:ext cx="9144000" cy="914400"/>
-          </a:xfrm>
-          <a:prstGeom prst="rect">
-            <a:avLst/>
-          </a:prstGeom>
-          <a:solidFill>
-            <a:srgbClr val="1E3A5F"/>
-          </a:solidFill>
-          <a:ln/>
-        </p:spPr>
-      </p:sp>
-      <p:sp>
-        <p:nvSpPr>
-          <p:cNvPr id="3" name="Text 1"/>
-          <p:cNvSpPr/>
-          <p:nvPr/>
-        </p:nvSpPr>
-        <p:spPr>
-          <a:xfrm>
-            <a:off x="457200" y="182880"/>
-            <a:ext cx="8686800" cy="548640"/>
+          <p:cNvPr id="2" name="Text 0"/>
+          <p:cNvSpPr/>
+          <p:nvPr/>
+        </p:nvSpPr>
+        <p:spPr>
+          <a:xfrm>
+            <a:off x="274320" y="182880"/>
+            <a:ext cx="8595360" cy="548640"/>
           </a:xfrm>
           <a:prstGeom prst="rect">
             <a:avLst/>
@@ -1677,27 +1594,27 @@
               <a:buNone/>
             </a:pPr>
             <a:r>
-              <a:rPr lang="en-US" sz="3200" b="1" dirty="0">
-                <a:solidFill>
-                  <a:srgbClr val="FFFFFF"/>
+              <a:rPr lang="en-US" sz="2800" b="1" dirty="0">
+                <a:solidFill>
+                  <a:srgbClr val="1E3A5F"/>
                 </a:solidFill>
               </a:rPr>
               <a:t>📋 前提準備</a:t>
             </a:r>
-            <a:endParaRPr lang="en-US" sz="3200" dirty="0"/>
-          </a:p>
-        </p:txBody>
-      </p:sp>
-      <p:sp>
-        <p:nvSpPr>
-          <p:cNvPr id="4" name="Shape 2"/>
-          <p:cNvSpPr/>
-          <p:nvPr/>
-        </p:nvSpPr>
-        <p:spPr>
-          <a:xfrm>
-            <a:off x="457200" y="1188720"/>
-            <a:ext cx="3657600" cy="1645920"/>
+            <a:endParaRPr lang="en-US" sz="2800" dirty="0"/>
+          </a:p>
+        </p:txBody>
+      </p:sp>
+      <p:sp>
+        <p:nvSpPr>
+          <p:cNvPr id="3" name="Shape 1"/>
+          <p:cNvSpPr/>
+          <p:nvPr/>
+        </p:nvSpPr>
+        <p:spPr>
+          <a:xfrm>
+            <a:off x="274320" y="914400"/>
+            <a:ext cx="4023360" cy="1097280"/>
           </a:xfrm>
           <a:prstGeom prst="roundRect">
             <a:avLst/>
@@ -1715,14 +1632,14 @@
       </p:sp>
       <p:sp>
         <p:nvSpPr>
-          <p:cNvPr id="5" name="Text 3"/>
-          <p:cNvSpPr/>
-          <p:nvPr/>
-        </p:nvSpPr>
-        <p:spPr>
-          <a:xfrm>
-            <a:off x="731520" y="1463040"/>
-            <a:ext cx="731520" cy="731520"/>
+          <p:cNvPr id="4" name="Text 2"/>
+          <p:cNvSpPr/>
+          <p:nvPr/>
+        </p:nvSpPr>
+        <p:spPr>
+          <a:xfrm>
+            <a:off x="457200" y="1234440"/>
+            <a:ext cx="3657600" cy="457200"/>
           </a:xfrm>
           <a:prstGeom prst="rect">
             <a:avLst/>
@@ -1738,77 +1655,27 @@
               <a:buNone/>
             </a:pPr>
             <a:r>
-              <a:rPr lang="en-US" sz="3200" dirty="0">
-                <a:solidFill>
-                  <a:srgbClr val="000000"/>
-                </a:solidFill>
-              </a:rPr>
-              <a:t>📕</a:t>
-            </a:r>
-            <a:endParaRPr lang="en-US" sz="3200" dirty="0"/>
-          </a:p>
-        </p:txBody>
-      </p:sp>
-      <p:sp>
-        <p:nvSpPr>
-          <p:cNvPr id="6" name="Text 4"/>
-          <p:cNvSpPr/>
-          <p:nvPr/>
-        </p:nvSpPr>
-        <p:spPr>
-          <a:xfrm>
-            <a:off x="1554480" y="1554480"/>
-            <a:ext cx="2286000" cy="1097280"/>
-          </a:xfrm>
-          <a:prstGeom prst="rect">
-            <a:avLst/>
-          </a:prstGeom>
-          <a:noFill/>
-          <a:ln/>
-        </p:spPr>
-        <p:txBody>
-          <a:bodyPr wrap="square" rtlCol="0" anchor="ctr"/>
-          <a:lstStyle/>
-          <a:p>
-            <a:pPr indent="0" marL="0">
-              <a:buNone/>
-            </a:pPr>
-            <a:r>
               <a:rPr lang="en-US" sz="1400" dirty="0">
                 <a:solidFill>
-                  <a:srgbClr val="1A1A1A"/>
-                </a:solidFill>
-              </a:rPr>
-              <a:t>大陸通行證（回鄉證）</a:t>
+                  <a:srgbClr val="212121"/>
+                </a:solidFill>
+              </a:rPr>
+              <a:t>📕 大陸通行證（回鄉證）</a:t>
             </a:r>
             <a:endParaRPr lang="en-US" sz="1400" dirty="0"/>
           </a:p>
-          <a:p>
-            <a:pPr indent="0" marL="0">
-              <a:buNone/>
-            </a:pPr>
-            <a:r>
-              <a:rPr lang="en-US" sz="1400" dirty="0">
-                <a:solidFill>
-                  <a:srgbClr val="1A1A1A"/>
-                </a:solidFill>
-              </a:rPr>
-              <a:t>有效期內</a:t>
-            </a:r>
-            <a:endParaRPr lang="en-US" sz="1400" dirty="0"/>
-          </a:p>
-        </p:txBody>
-      </p:sp>
-      <p:sp>
-        <p:nvSpPr>
-          <p:cNvPr id="7" name="Shape 5"/>
-          <p:cNvSpPr/>
-          <p:nvPr/>
-        </p:nvSpPr>
-        <p:spPr>
-          <a:xfrm>
-            <a:off x="4389120" y="1188720"/>
-            <a:ext cx="3657600" cy="1645920"/>
+        </p:txBody>
+      </p:sp>
+      <p:sp>
+        <p:nvSpPr>
+          <p:cNvPr id="5" name="Shape 3"/>
+          <p:cNvSpPr/>
+          <p:nvPr/>
+        </p:nvSpPr>
+        <p:spPr>
+          <a:xfrm>
+            <a:off x="4572000" y="914400"/>
+            <a:ext cx="4023360" cy="1097280"/>
           </a:xfrm>
           <a:prstGeom prst="roundRect">
             <a:avLst/>
@@ -1826,14 +1693,14 @@
       </p:sp>
       <p:sp>
         <p:nvSpPr>
-          <p:cNvPr id="8" name="Text 6"/>
-          <p:cNvSpPr/>
-          <p:nvPr/>
-        </p:nvSpPr>
-        <p:spPr>
-          <a:xfrm>
-            <a:off x="4663440" y="1463040"/>
-            <a:ext cx="731520" cy="731520"/>
+          <p:cNvPr id="6" name="Text 4"/>
+          <p:cNvSpPr/>
+          <p:nvPr/>
+        </p:nvSpPr>
+        <p:spPr>
+          <a:xfrm>
+            <a:off x="4754880" y="1234440"/>
+            <a:ext cx="3657600" cy="457200"/>
           </a:xfrm>
           <a:prstGeom prst="rect">
             <a:avLst/>
@@ -1849,77 +1716,27 @@
               <a:buNone/>
             </a:pPr>
             <a:r>
-              <a:rPr lang="en-US" sz="3200" dirty="0">
-                <a:solidFill>
-                  <a:srgbClr val="000000"/>
-                </a:solidFill>
-              </a:rPr>
-              <a:t>📗</a:t>
-            </a:r>
-            <a:endParaRPr lang="en-US" sz="3200" dirty="0"/>
-          </a:p>
-        </p:txBody>
-      </p:sp>
-      <p:sp>
-        <p:nvSpPr>
-          <p:cNvPr id="9" name="Text 7"/>
-          <p:cNvSpPr/>
-          <p:nvPr/>
-        </p:nvSpPr>
-        <p:spPr>
-          <a:xfrm>
-            <a:off x="5486400" y="1554480"/>
-            <a:ext cx="2286000" cy="1097280"/>
-          </a:xfrm>
-          <a:prstGeom prst="rect">
-            <a:avLst/>
-          </a:prstGeom>
-          <a:noFill/>
-          <a:ln/>
-        </p:spPr>
-        <p:txBody>
-          <a:bodyPr wrap="square" rtlCol="0" anchor="ctr"/>
-          <a:lstStyle/>
-          <a:p>
-            <a:pPr indent="0" marL="0">
-              <a:buNone/>
-            </a:pPr>
-            <a:r>
               <a:rPr lang="en-US" sz="1400" dirty="0">
                 <a:solidFill>
-                  <a:srgbClr val="1A1A1A"/>
-                </a:solidFill>
-              </a:rPr>
-              <a:t>台胞證</a:t>
+                  <a:srgbClr val="212121"/>
+                </a:solidFill>
+              </a:rPr>
+              <a:t>📗 台胞證</a:t>
             </a:r>
             <a:endParaRPr lang="en-US" sz="1400" dirty="0"/>
           </a:p>
-          <a:p>
-            <a:pPr indent="0" marL="0">
-              <a:buNone/>
-            </a:pPr>
-            <a:r>
-              <a:rPr lang="en-US" sz="1400" dirty="0">
-                <a:solidFill>
-                  <a:srgbClr val="1A1A1A"/>
-                </a:solidFill>
-              </a:rPr>
-              <a:t>台灣居民來往大陸通行證</a:t>
-            </a:r>
-            <a:endParaRPr lang="en-US" sz="1400" dirty="0"/>
-          </a:p>
-        </p:txBody>
-      </p:sp>
-      <p:sp>
-        <p:nvSpPr>
-          <p:cNvPr id="10" name="Shape 8"/>
-          <p:cNvSpPr/>
-          <p:nvPr/>
-        </p:nvSpPr>
-        <p:spPr>
-          <a:xfrm>
-            <a:off x="457200" y="3108960"/>
-            <a:ext cx="3657600" cy="1645920"/>
+        </p:txBody>
+      </p:sp>
+      <p:sp>
+        <p:nvSpPr>
+          <p:cNvPr id="7" name="Shape 5"/>
+          <p:cNvSpPr/>
+          <p:nvPr/>
+        </p:nvSpPr>
+        <p:spPr>
+          <a:xfrm>
+            <a:off x="274320" y="2194560"/>
+            <a:ext cx="4023360" cy="1097280"/>
           </a:xfrm>
           <a:prstGeom prst="roundRect">
             <a:avLst/>
@@ -1937,14 +1754,14 @@
       </p:sp>
       <p:sp>
         <p:nvSpPr>
-          <p:cNvPr id="11" name="Text 9"/>
-          <p:cNvSpPr/>
-          <p:nvPr/>
-        </p:nvSpPr>
-        <p:spPr>
-          <a:xfrm>
-            <a:off x="731520" y="3383280"/>
-            <a:ext cx="731520" cy="731520"/>
+          <p:cNvPr id="8" name="Text 6"/>
+          <p:cNvSpPr/>
+          <p:nvPr/>
+        </p:nvSpPr>
+        <p:spPr>
+          <a:xfrm>
+            <a:off x="457200" y="2514600"/>
+            <a:ext cx="3657600" cy="457200"/>
           </a:xfrm>
           <a:prstGeom prst="rect">
             <a:avLst/>
@@ -1960,77 +1777,27 @@
               <a:buNone/>
             </a:pPr>
             <a:r>
-              <a:rPr lang="en-US" sz="3200" dirty="0">
-                <a:solidFill>
-                  <a:srgbClr val="000000"/>
-                </a:solidFill>
-              </a:rPr>
-              <a:t>🏠</a:t>
-            </a:r>
-            <a:endParaRPr lang="en-US" sz="3200" dirty="0"/>
-          </a:p>
-        </p:txBody>
-      </p:sp>
-      <p:sp>
-        <p:nvSpPr>
-          <p:cNvPr id="12" name="Text 10"/>
-          <p:cNvSpPr/>
-          <p:nvPr/>
-        </p:nvSpPr>
-        <p:spPr>
-          <a:xfrm>
-            <a:off x="1554480" y="3474720"/>
-            <a:ext cx="2286000" cy="1097280"/>
-          </a:xfrm>
-          <a:prstGeom prst="rect">
-            <a:avLst/>
-          </a:prstGeom>
-          <a:noFill/>
-          <a:ln/>
-        </p:spPr>
-        <p:txBody>
-          <a:bodyPr wrap="square" rtlCol="0" anchor="ctr"/>
-          <a:lstStyle/>
-          <a:p>
-            <a:pPr indent="0" marL="0">
-              <a:buNone/>
-            </a:pPr>
-            <a:r>
               <a:rPr lang="en-US" sz="1400" dirty="0">
                 <a:solidFill>
-                  <a:srgbClr val="1A1A1A"/>
-                </a:solidFill>
-              </a:rPr>
-              <a:t>居住證明</a:t>
+                  <a:srgbClr val="212121"/>
+                </a:solidFill>
+              </a:rPr>
+              <a:t>🏠 居住證明</a:t>
             </a:r>
             <a:endParaRPr lang="en-US" sz="1400" dirty="0"/>
           </a:p>
-          <a:p>
-            <a:pPr indent="0" marL="0">
-              <a:buNone/>
-            </a:pPr>
-            <a:r>
-              <a:rPr lang="en-US" sz="1400" dirty="0">
-                <a:solidFill>
-                  <a:srgbClr val="1A1A1A"/>
-                </a:solidFill>
-              </a:rPr>
-              <a:t>酒店預訂/租房合約/工作證明</a:t>
-            </a:r>
-            <a:endParaRPr lang="en-US" sz="1400" dirty="0"/>
-          </a:p>
-        </p:txBody>
-      </p:sp>
-      <p:sp>
-        <p:nvSpPr>
-          <p:cNvPr id="13" name="Shape 11"/>
-          <p:cNvSpPr/>
-          <p:nvPr/>
-        </p:nvSpPr>
-        <p:spPr>
-          <a:xfrm>
-            <a:off x="4389120" y="3108960"/>
-            <a:ext cx="3657600" cy="1645920"/>
+        </p:txBody>
+      </p:sp>
+      <p:sp>
+        <p:nvSpPr>
+          <p:cNvPr id="9" name="Shape 7"/>
+          <p:cNvSpPr/>
+          <p:nvPr/>
+        </p:nvSpPr>
+        <p:spPr>
+          <a:xfrm>
+            <a:off x="4572000" y="2194560"/>
+            <a:ext cx="4023360" cy="1097280"/>
           </a:xfrm>
           <a:prstGeom prst="roundRect">
             <a:avLst/>
@@ -2048,14 +1815,14 @@
       </p:sp>
       <p:sp>
         <p:nvSpPr>
-          <p:cNvPr id="14" name="Text 12"/>
-          <p:cNvSpPr/>
-          <p:nvPr/>
-        </p:nvSpPr>
-        <p:spPr>
-          <a:xfrm>
-            <a:off x="4663440" y="3383280"/>
-            <a:ext cx="731520" cy="731520"/>
+          <p:cNvPr id="10" name="Text 8"/>
+          <p:cNvSpPr/>
+          <p:nvPr/>
+        </p:nvSpPr>
+        <p:spPr>
+          <a:xfrm>
+            <a:off x="4754880" y="2514600"/>
+            <a:ext cx="3657600" cy="457200"/>
           </a:xfrm>
           <a:prstGeom prst="rect">
             <a:avLst/>
@@ -2071,77 +1838,27 @@
               <a:buNone/>
             </a:pPr>
             <a:r>
-              <a:rPr lang="en-US" sz="3200" dirty="0">
-                <a:solidFill>
-                  <a:srgbClr val="000000"/>
-                </a:solidFill>
-              </a:rPr>
-              <a:t>📱</a:t>
-            </a:r>
-            <a:endParaRPr lang="en-US" sz="3200" dirty="0"/>
-          </a:p>
-        </p:txBody>
-      </p:sp>
-      <p:sp>
-        <p:nvSpPr>
-          <p:cNvPr id="15" name="Text 13"/>
-          <p:cNvSpPr/>
-          <p:nvPr/>
-        </p:nvSpPr>
-        <p:spPr>
-          <a:xfrm>
-            <a:off x="5486400" y="3474720"/>
-            <a:ext cx="2286000" cy="1097280"/>
-          </a:xfrm>
-          <a:prstGeom prst="rect">
-            <a:avLst/>
-          </a:prstGeom>
-          <a:noFill/>
-          <a:ln/>
-        </p:spPr>
-        <p:txBody>
-          <a:bodyPr wrap="square" rtlCol="0" anchor="ctr"/>
-          <a:lstStyle/>
-          <a:p>
-            <a:pPr indent="0" marL="0">
-              <a:buNone/>
-            </a:pPr>
-            <a:r>
               <a:rPr lang="en-US" sz="1400" dirty="0">
                 <a:solidFill>
-                  <a:srgbClr val="1A1A1A"/>
-                </a:solidFill>
-              </a:rPr>
-              <a:t>大陸手機號碼</a:t>
+                  <a:srgbClr val="212121"/>
+                </a:solidFill>
+              </a:rPr>
+              <a:t>📱 大陸手機號碼</a:t>
             </a:r>
             <a:endParaRPr lang="en-US" sz="1400" dirty="0"/>
           </a:p>
-          <a:p>
-            <a:pPr indent="0" marL="0">
-              <a:buNone/>
-            </a:pPr>
-            <a:r>
-              <a:rPr lang="en-US" sz="1400" dirty="0">
-                <a:solidFill>
-                  <a:srgbClr val="1A1A1A"/>
-                </a:solidFill>
-              </a:rPr>
-              <a:t>必須，接收驗證碼</a:t>
-            </a:r>
-            <a:endParaRPr lang="en-US" sz="1400" dirty="0"/>
-          </a:p>
-        </p:txBody>
-      </p:sp>
-      <p:sp>
-        <p:nvSpPr>
-          <p:cNvPr id="16" name="Shape 14"/>
-          <p:cNvSpPr/>
-          <p:nvPr/>
-        </p:nvSpPr>
-        <p:spPr>
-          <a:xfrm>
-            <a:off x="457200" y="5029200"/>
-            <a:ext cx="3657600" cy="1645920"/>
+        </p:txBody>
+      </p:sp>
+      <p:sp>
+        <p:nvSpPr>
+          <p:cNvPr id="11" name="Shape 9"/>
+          <p:cNvSpPr/>
+          <p:nvPr/>
+        </p:nvSpPr>
+        <p:spPr>
+          <a:xfrm>
+            <a:off x="274320" y="3474720"/>
+            <a:ext cx="4023360" cy="1097280"/>
           </a:xfrm>
           <a:prstGeom prst="roundRect">
             <a:avLst/>
@@ -2159,14 +1876,14 @@
       </p:sp>
       <p:sp>
         <p:nvSpPr>
-          <p:cNvPr id="17" name="Text 15"/>
-          <p:cNvSpPr/>
-          <p:nvPr/>
-        </p:nvSpPr>
-        <p:spPr>
-          <a:xfrm>
-            <a:off x="731520" y="5303520"/>
-            <a:ext cx="731520" cy="731520"/>
+          <p:cNvPr id="12" name="Text 10"/>
+          <p:cNvSpPr/>
+          <p:nvPr/>
+        </p:nvSpPr>
+        <p:spPr>
+          <a:xfrm>
+            <a:off x="457200" y="3794760"/>
+            <a:ext cx="3657600" cy="457200"/>
           </a:xfrm>
           <a:prstGeom prst="rect">
             <a:avLst/>
@@ -2182,77 +1899,27 @@
               <a:buNone/>
             </a:pPr>
             <a:r>
-              <a:rPr lang="en-US" sz="3200" dirty="0">
-                <a:solidFill>
-                  <a:srgbClr val="000000"/>
-                </a:solidFill>
-              </a:rPr>
-              <a:t>👤</a:t>
-            </a:r>
-            <a:endParaRPr lang="en-US" sz="3200" dirty="0"/>
-          </a:p>
-        </p:txBody>
-      </p:sp>
-      <p:sp>
-        <p:nvSpPr>
-          <p:cNvPr id="18" name="Text 16"/>
-          <p:cNvSpPr/>
-          <p:nvPr/>
-        </p:nvSpPr>
-        <p:spPr>
-          <a:xfrm>
-            <a:off x="1554480" y="5394960"/>
-            <a:ext cx="2286000" cy="1097280"/>
-          </a:xfrm>
-          <a:prstGeom prst="rect">
-            <a:avLst/>
-          </a:prstGeom>
-          <a:noFill/>
-          <a:ln/>
-        </p:spPr>
-        <p:txBody>
-          <a:bodyPr wrap="square" rtlCol="0" anchor="ctr"/>
-          <a:lstStyle/>
-          <a:p>
-            <a:pPr indent="0" marL="0">
-              <a:buNone/>
-            </a:pPr>
-            <a:r>
               <a:rPr lang="en-US" sz="1400" dirty="0">
                 <a:solidFill>
-                  <a:srgbClr val="1A1A1A"/>
-                </a:solidFill>
-              </a:rPr>
-              <a:t>基本聯繫方式</a:t>
+                  <a:srgbClr val="212121"/>
+                </a:solidFill>
+              </a:rPr>
+              <a:t>👤 聯繫方式</a:t>
             </a:r>
             <a:endParaRPr lang="en-US" sz="1400" dirty="0"/>
           </a:p>
-          <a:p>
-            <a:pPr indent="0" marL="0">
-              <a:buNone/>
-            </a:pPr>
-            <a:r>
-              <a:rPr lang="en-US" sz="1400" dirty="0">
-                <a:solidFill>
-                  <a:srgbClr val="1A1A1A"/>
-                </a:solidFill>
-              </a:rPr>
-              <a:t>地址、緊急聯繫人</a:t>
-            </a:r>
-            <a:endParaRPr lang="en-US" sz="1400" dirty="0"/>
-          </a:p>
-        </p:txBody>
-      </p:sp>
-      <p:sp>
-        <p:nvSpPr>
-          <p:cNvPr id="19" name="Shape 17"/>
-          <p:cNvSpPr/>
-          <p:nvPr/>
-        </p:nvSpPr>
-        <p:spPr>
-          <a:xfrm>
-            <a:off x="4389120" y="5029200"/>
-            <a:ext cx="3657600" cy="1645920"/>
+        </p:txBody>
+      </p:sp>
+      <p:sp>
+        <p:nvSpPr>
+          <p:cNvPr id="13" name="Shape 11"/>
+          <p:cNvSpPr/>
+          <p:nvPr/>
+        </p:nvSpPr>
+        <p:spPr>
+          <a:xfrm>
+            <a:off x="4572000" y="3474720"/>
+            <a:ext cx="4023360" cy="1097280"/>
           </a:xfrm>
           <a:prstGeom prst="roundRect">
             <a:avLst/>
@@ -2270,14 +1937,14 @@
       </p:sp>
       <p:sp>
         <p:nvSpPr>
-          <p:cNvPr id="20" name="Text 18"/>
-          <p:cNvSpPr/>
-          <p:nvPr/>
-        </p:nvSpPr>
-        <p:spPr>
-          <a:xfrm>
-            <a:off x="4663440" y="5303520"/>
-            <a:ext cx="731520" cy="731520"/>
+          <p:cNvPr id="14" name="Text 12"/>
+          <p:cNvSpPr/>
+          <p:nvPr/>
+        </p:nvSpPr>
+        <p:spPr>
+          <a:xfrm>
+            <a:off x="4754880" y="3794760"/>
+            <a:ext cx="3657600" cy="457200"/>
           </a:xfrm>
           <a:prstGeom prst="rect">
             <a:avLst/>
@@ -2293,62 +1960,12 @@
               <a:buNone/>
             </a:pPr>
             <a:r>
-              <a:rPr lang="en-US" sz="3200" dirty="0">
-                <a:solidFill>
-                  <a:srgbClr val="000000"/>
-                </a:solidFill>
-              </a:rPr>
-              <a:t>💰</a:t>
-            </a:r>
-            <a:endParaRPr lang="en-US" sz="3200" dirty="0"/>
-          </a:p>
-        </p:txBody>
-      </p:sp>
-      <p:sp>
-        <p:nvSpPr>
-          <p:cNvPr id="21" name="Text 19"/>
-          <p:cNvSpPr/>
-          <p:nvPr/>
-        </p:nvSpPr>
-        <p:spPr>
-          <a:xfrm>
-            <a:off x="5486400" y="5394960"/>
-            <a:ext cx="2286000" cy="1097280"/>
-          </a:xfrm>
-          <a:prstGeom prst="rect">
-            <a:avLst/>
-          </a:prstGeom>
-          <a:noFill/>
-          <a:ln/>
-        </p:spPr>
-        <p:txBody>
-          <a:bodyPr wrap="square" rtlCol="0" anchor="ctr"/>
-          <a:lstStyle/>
-          <a:p>
-            <a:pPr indent="0" marL="0">
-              <a:buNone/>
-            </a:pPr>
-            <a:r>
               <a:rPr lang="en-US" sz="1400" dirty="0">
                 <a:solidFill>
-                  <a:srgbClr val="1A1A1A"/>
-                </a:solidFill>
-              </a:rPr>
-              <a:t>攜帶現金</a:t>
-            </a:r>
-            <a:endParaRPr lang="en-US" sz="1400" dirty="0"/>
-          </a:p>
-          <a:p>
-            <a:pPr indent="0" marL="0">
-              <a:buNone/>
-            </a:pPr>
-            <a:r>
-              <a:rPr lang="en-US" sz="1400" dirty="0">
-                <a:solidFill>
-                  <a:srgbClr val="1A1A1A"/>
-                </a:solidFill>
-              </a:rPr>
-              <a:t>2000-5000 人民幣作為初始存款</a:t>
+                  <a:srgbClr val="212121"/>
+                </a:solidFill>
+              </a:rPr>
+              <a:t>💰 2000-5000元人民币</a:t>
             </a:r>
             <a:endParaRPr lang="en-US" sz="1400" dirty="0"/>
           </a:p>
@@ -2368,7 +1985,7 @@
     <p:bg>
       <p:bgPr>
         <a:solidFill>
-          <a:srgbClr val="F5F5F5"/>
+          <a:srgbClr val="FAFAFA"/>
         </a:solidFill>
       </p:bgPr>
     </p:bg>
@@ -2388,34 +2005,14 @@
       </p:grpSpPr>
       <p:sp>
         <p:nvSpPr>
-          <p:cNvPr id="2" name="Shape 0"/>
-          <p:cNvSpPr/>
-          <p:nvPr/>
-        </p:nvSpPr>
-        <p:spPr>
-          <a:xfrm>
-            <a:off x="0" y="0"/>
-            <a:ext cx="9144000" cy="914400"/>
-          </a:xfrm>
-          <a:prstGeom prst="rect">
-            <a:avLst/>
-          </a:prstGeom>
-          <a:solidFill>
-            <a:srgbClr val="1E3A5F"/>
-          </a:solidFill>
-          <a:ln/>
-        </p:spPr>
-      </p:sp>
-      <p:sp>
-        <p:nvSpPr>
-          <p:cNvPr id="3" name="Text 1"/>
-          <p:cNvSpPr/>
-          <p:nvPr/>
-        </p:nvSpPr>
-        <p:spPr>
-          <a:xfrm>
-            <a:off x="457200" y="182880"/>
-            <a:ext cx="8686800" cy="548640"/>
+          <p:cNvPr id="2" name="Text 0"/>
+          <p:cNvSpPr/>
+          <p:nvPr/>
+        </p:nvSpPr>
+        <p:spPr>
+          <a:xfrm>
+            <a:off x="274320" y="182880"/>
+            <a:ext cx="8595360" cy="548640"/>
           </a:xfrm>
           <a:prstGeom prst="rect">
             <a:avLst/>
@@ -2431,47 +2028,27 @@
               <a:buNone/>
             </a:pPr>
             <a:r>
-              <a:rPr lang="en-US" sz="3200" b="1" dirty="0">
-                <a:solidFill>
-                  <a:srgbClr val="FFFFFF"/>
+              <a:rPr lang="en-US" sz="2800" b="1" dirty="0">
+                <a:solidFill>
+                  <a:srgbClr val="1E3A5F"/>
                 </a:solidFill>
               </a:rPr>
               <a:t>🏦 推薦銀行</a:t>
             </a:r>
-            <a:endParaRPr lang="en-US" sz="3200" dirty="0"/>
-          </a:p>
-        </p:txBody>
-      </p:sp>
-      <p:sp>
-        <p:nvSpPr>
-          <p:cNvPr id="4" name="Shape 2"/>
-          <p:cNvSpPr/>
-          <p:nvPr/>
-        </p:nvSpPr>
-        <p:spPr>
-          <a:xfrm>
-            <a:off x="457200" y="1188720"/>
-            <a:ext cx="137160" cy="1280160"/>
-          </a:xfrm>
-          <a:prstGeom prst="rect">
-            <a:avLst/>
-          </a:prstGeom>
-          <a:solidFill>
-            <a:srgbClr val="E53935"/>
-          </a:solidFill>
-          <a:ln/>
-        </p:spPr>
-      </p:sp>
-      <p:sp>
-        <p:nvSpPr>
-          <p:cNvPr id="5" name="Shape 3"/>
-          <p:cNvSpPr/>
-          <p:nvPr/>
-        </p:nvSpPr>
-        <p:spPr>
-          <a:xfrm>
-            <a:off x="594360" y="1188720"/>
-            <a:ext cx="11430000" cy="1280160"/>
+            <a:endParaRPr lang="en-US" sz="2800" dirty="0"/>
+          </a:p>
+        </p:txBody>
+      </p:sp>
+      <p:sp>
+        <p:nvSpPr>
+          <p:cNvPr id="3" name="Shape 1"/>
+          <p:cNvSpPr/>
+          <p:nvPr/>
+        </p:nvSpPr>
+        <p:spPr>
+          <a:xfrm>
+            <a:off x="274320" y="914400"/>
+            <a:ext cx="8595360" cy="868680"/>
           </a:xfrm>
           <a:prstGeom prst="roundRect">
             <a:avLst/>
@@ -2484,14 +2061,14 @@
       </p:sp>
       <p:sp>
         <p:nvSpPr>
-          <p:cNvPr id="6" name="Text 4"/>
-          <p:cNvSpPr/>
-          <p:nvPr/>
-        </p:nvSpPr>
-        <p:spPr>
-          <a:xfrm>
-            <a:off x="914400" y="1371600"/>
-            <a:ext cx="8229600" cy="457200"/>
+          <p:cNvPr id="4" name="Text 2"/>
+          <p:cNvSpPr/>
+          <p:nvPr/>
+        </p:nvSpPr>
+        <p:spPr>
+          <a:xfrm>
+            <a:off x="457200" y="1051560"/>
+            <a:ext cx="8229600" cy="365760"/>
           </a:xfrm>
           <a:prstGeom prst="rect">
             <a:avLst/>
@@ -2507,16 +2084,72 @@
               <a:buNone/>
             </a:pPr>
             <a:r>
-              <a:rPr lang="en-US" sz="2000" b="1" dirty="0">
-                <a:solidFill>
-                  <a:srgbClr val="1A1A1A"/>
-                </a:solidFill>
-              </a:rPr>
-              <a:t>中國工商銀行 (ICBC)</a:t>
-            </a:r>
-            <a:endParaRPr lang="en-US" sz="2000" dirty="0"/>
-          </a:p>
-        </p:txBody>
+              <a:rPr lang="en-US" sz="1400" b="1" dirty="0">
+                <a:solidFill>
+                  <a:srgbClr val="212121"/>
+                </a:solidFill>
+              </a:rPr>
+              <a:t>中國工商銀行 ICBC</a:t>
+            </a:r>
+            <a:endParaRPr lang="en-US" sz="1400" dirty="0"/>
+          </a:p>
+        </p:txBody>
+      </p:sp>
+      <p:sp>
+        <p:nvSpPr>
+          <p:cNvPr id="5" name="Text 3"/>
+          <p:cNvSpPr/>
+          <p:nvPr/>
+        </p:nvSpPr>
+        <p:spPr>
+          <a:xfrm>
+            <a:off x="457200" y="1371600"/>
+            <a:ext cx="8229600" cy="320040"/>
+          </a:xfrm>
+          <a:prstGeom prst="rect">
+            <a:avLst/>
+          </a:prstGeom>
+          <a:noFill/>
+          <a:ln/>
+        </p:spPr>
+        <p:txBody>
+          <a:bodyPr wrap="square" rtlCol="0" anchor="ctr"/>
+          <a:lstStyle/>
+          <a:p>
+            <a:pPr indent="0" marL="0">
+              <a:buNone/>
+            </a:pPr>
+            <a:r>
+              <a:rPr lang="en-US" sz="1200" dirty="0">
+                <a:solidFill>
+                  <a:srgbClr val="1E3A5F"/>
+                </a:solidFill>
+              </a:rPr>
+              <a:t>網點多，服務完善</a:t>
+            </a:r>
+            <a:endParaRPr lang="en-US" sz="1200" dirty="0"/>
+          </a:p>
+        </p:txBody>
+      </p:sp>
+      <p:sp>
+        <p:nvSpPr>
+          <p:cNvPr id="6" name="Shape 4"/>
+          <p:cNvSpPr/>
+          <p:nvPr/>
+        </p:nvSpPr>
+        <p:spPr>
+          <a:xfrm>
+            <a:off x="274320" y="1920240"/>
+            <a:ext cx="8595360" cy="868680"/>
+          </a:xfrm>
+          <a:prstGeom prst="roundRect">
+            <a:avLst/>
+          </a:prstGeom>
+          <a:solidFill>
+            <a:srgbClr val="FFFFFF"/>
+          </a:solidFill>
+          <a:ln/>
+        </p:spPr>
       </p:sp>
       <p:sp>
         <p:nvSpPr>
@@ -2526,8 +2159,8 @@
         </p:nvSpPr>
         <p:spPr>
           <a:xfrm>
-            <a:off x="914400" y="1828800"/>
-            <a:ext cx="8229600" cy="457200"/>
+            <a:off x="457200" y="2057400"/>
+            <a:ext cx="8229600" cy="365760"/>
           </a:xfrm>
           <a:prstGeom prst="rect">
             <a:avLst/>
@@ -2543,12 +2176,12 @@
               <a:buNone/>
             </a:pPr>
             <a:r>
-              <a:rPr lang="en-US" sz="1400" dirty="0">
-                <a:solidFill>
-                  <a:srgbClr val="2E7D32"/>
-                </a:solidFill>
-              </a:rPr>
-              <a:t>網點最多，服務最完善</a:t>
+              <a:rPr lang="en-US" sz="1400" b="1" dirty="0">
+                <a:solidFill>
+                  <a:srgbClr val="212121"/>
+                </a:solidFill>
+              </a:rPr>
+              <a:t>中國建設銀行 CCB</a:t>
             </a:r>
             <a:endParaRPr lang="en-US" sz="1400" dirty="0"/>
           </a:p>
@@ -2556,23 +2189,39 @@
       </p:sp>
       <p:sp>
         <p:nvSpPr>
-          <p:cNvPr id="8" name="Shape 6"/>
-          <p:cNvSpPr/>
-          <p:nvPr/>
-        </p:nvSpPr>
-        <p:spPr>
-          <a:xfrm>
-            <a:off x="457200" y="2560320"/>
-            <a:ext cx="137160" cy="1280160"/>
-          </a:xfrm>
-          <a:prstGeom prst="rect">
-            <a:avLst/>
-          </a:prstGeom>
-          <a:solidFill>
-            <a:srgbClr val="1E88E5"/>
-          </a:solidFill>
-          <a:ln/>
-        </p:spPr>
+          <p:cNvPr id="8" name="Text 6"/>
+          <p:cNvSpPr/>
+          <p:nvPr/>
+        </p:nvSpPr>
+        <p:spPr>
+          <a:xfrm>
+            <a:off x="457200" y="2377440"/>
+            <a:ext cx="8229600" cy="320040"/>
+          </a:xfrm>
+          <a:prstGeom prst="rect">
+            <a:avLst/>
+          </a:prstGeom>
+          <a:noFill/>
+          <a:ln/>
+        </p:spPr>
+        <p:txBody>
+          <a:bodyPr wrap="square" rtlCol="0" anchor="ctr"/>
+          <a:lstStyle/>
+          <a:p>
+            <a:pPr indent="0" marL="0">
+              <a:buNone/>
+            </a:pPr>
+            <a:r>
+              <a:rPr lang="en-US" sz="1200" dirty="0">
+                <a:solidFill>
+                  <a:srgbClr val="1E3A5F"/>
+                </a:solidFill>
+              </a:rPr>
+              <a:t>開戶較快</a:t>
+            </a:r>
+            <a:endParaRPr lang="en-US" sz="1200" dirty="0"/>
+          </a:p>
+        </p:txBody>
       </p:sp>
       <p:sp>
         <p:nvSpPr>
@@ -2582,8 +2231,8 @@
         </p:nvSpPr>
         <p:spPr>
           <a:xfrm>
-            <a:off x="594360" y="2560320"/>
-            <a:ext cx="11430000" cy="1280160"/>
+            <a:off x="274320" y="2926080"/>
+            <a:ext cx="8595360" cy="868680"/>
           </a:xfrm>
           <a:prstGeom prst="roundRect">
             <a:avLst/>
@@ -2602,8 +2251,8 @@
         </p:nvSpPr>
         <p:spPr>
           <a:xfrm>
-            <a:off x="914400" y="2743200"/>
-            <a:ext cx="8229600" cy="457200"/>
+            <a:off x="457200" y="3063240"/>
+            <a:ext cx="8229600" cy="365760"/>
           </a:xfrm>
           <a:prstGeom prst="rect">
             <a:avLst/>
@@ -2619,14 +2268,14 @@
               <a:buNone/>
             </a:pPr>
             <a:r>
-              <a:rPr lang="en-US" sz="2000" b="1" dirty="0">
-                <a:solidFill>
-                  <a:srgbClr val="1A1A1A"/>
-                </a:solidFill>
-              </a:rPr>
-              <a:t>中國建設銀行 (CCB)</a:t>
-            </a:r>
-            <a:endParaRPr lang="en-US" sz="2000" dirty="0"/>
+              <a:rPr lang="en-US" sz="1400" b="1" dirty="0">
+                <a:solidFill>
+                  <a:srgbClr val="212121"/>
+                </a:solidFill>
+              </a:rPr>
+              <a:t>招商銀行</a:t>
+            </a:r>
+            <a:endParaRPr lang="en-US" sz="1400" dirty="0"/>
           </a:p>
         </p:txBody>
       </p:sp>
@@ -2638,8 +2287,8 @@
         </p:nvSpPr>
         <p:spPr>
           <a:xfrm>
-            <a:off x="914400" y="3200400"/>
-            <a:ext cx="8229600" cy="457200"/>
+            <a:off x="457200" y="3383280"/>
+            <a:ext cx="8229600" cy="320040"/>
           </a:xfrm>
           <a:prstGeom prst="rect">
             <a:avLst/>
@@ -2655,12 +2304,68 @@
               <a:buNone/>
             </a:pPr>
             <a:r>
-              <a:rPr lang="en-US" sz="1400" dirty="0">
-                <a:solidFill>
-                  <a:srgbClr val="2E7D32"/>
-                </a:solidFill>
-              </a:rPr>
-              <a:t>開戶速度較快</a:t>
+              <a:rPr lang="en-US" sz="1200" dirty="0">
+                <a:solidFill>
+                  <a:srgbClr val="1E3A5F"/>
+                </a:solidFill>
+              </a:rPr>
+              <a:t>有英文介面</a:t>
+            </a:r>
+            <a:endParaRPr lang="en-US" sz="1200" dirty="0"/>
+          </a:p>
+        </p:txBody>
+      </p:sp>
+      <p:sp>
+        <p:nvSpPr>
+          <p:cNvPr id="12" name="Shape 10"/>
+          <p:cNvSpPr/>
+          <p:nvPr/>
+        </p:nvSpPr>
+        <p:spPr>
+          <a:xfrm>
+            <a:off x="274320" y="3931920"/>
+            <a:ext cx="8595360" cy="868680"/>
+          </a:xfrm>
+          <a:prstGeom prst="roundRect">
+            <a:avLst/>
+          </a:prstGeom>
+          <a:solidFill>
+            <a:srgbClr val="FFFFFF"/>
+          </a:solidFill>
+          <a:ln/>
+        </p:spPr>
+      </p:sp>
+      <p:sp>
+        <p:nvSpPr>
+          <p:cNvPr id="13" name="Text 11"/>
+          <p:cNvSpPr/>
+          <p:nvPr/>
+        </p:nvSpPr>
+        <p:spPr>
+          <a:xfrm>
+            <a:off x="457200" y="4069080"/>
+            <a:ext cx="8229600" cy="365760"/>
+          </a:xfrm>
+          <a:prstGeom prst="rect">
+            <a:avLst/>
+          </a:prstGeom>
+          <a:noFill/>
+          <a:ln/>
+        </p:spPr>
+        <p:txBody>
+          <a:bodyPr wrap="square" rtlCol="0" anchor="ctr"/>
+          <a:lstStyle/>
+          <a:p>
+            <a:pPr indent="0" marL="0">
+              <a:buNone/>
+            </a:pPr>
+            <a:r>
+              <a:rPr lang="en-US" sz="1400" b="1" dirty="0">
+                <a:solidFill>
+                  <a:srgbClr val="212121"/>
+                </a:solidFill>
+              </a:rPr>
+              <a:t>支付寶/微信</a:t>
             </a:r>
             <a:endParaRPr lang="en-US" sz="1400" dirty="0"/>
           </a:p>
@@ -2668,54 +2373,14 @@
       </p:sp>
       <p:sp>
         <p:nvSpPr>
-          <p:cNvPr id="12" name="Shape 10"/>
-          <p:cNvSpPr/>
-          <p:nvPr/>
-        </p:nvSpPr>
-        <p:spPr>
-          <a:xfrm>
-            <a:off x="457200" y="3931920"/>
-            <a:ext cx="137160" cy="1280160"/>
-          </a:xfrm>
-          <a:prstGeom prst="rect">
-            <a:avLst/>
-          </a:prstGeom>
-          <a:solidFill>
-            <a:srgbClr val="FF9800"/>
-          </a:solidFill>
-          <a:ln/>
-        </p:spPr>
-      </p:sp>
-      <p:sp>
-        <p:nvSpPr>
-          <p:cNvPr id="13" name="Shape 11"/>
-          <p:cNvSpPr/>
-          <p:nvPr/>
-        </p:nvSpPr>
-        <p:spPr>
-          <a:xfrm>
-            <a:off x="594360" y="3931920"/>
-            <a:ext cx="11430000" cy="1280160"/>
-          </a:xfrm>
-          <a:prstGeom prst="roundRect">
-            <a:avLst/>
-          </a:prstGeom>
-          <a:solidFill>
-            <a:srgbClr val="FFFFFF"/>
-          </a:solidFill>
-          <a:ln/>
-        </p:spPr>
-      </p:sp>
-      <p:sp>
-        <p:nvSpPr>
           <p:cNvPr id="14" name="Text 12"/>
           <p:cNvSpPr/>
           <p:nvPr/>
         </p:nvSpPr>
         <p:spPr>
           <a:xfrm>
-            <a:off x="914400" y="4114800"/>
-            <a:ext cx="8229600" cy="457200"/>
+            <a:off x="457200" y="4389120"/>
+            <a:ext cx="8229600" cy="320040"/>
           </a:xfrm>
           <a:prstGeom prst="rect">
             <a:avLst/>
@@ -2731,162 +2396,14 @@
               <a:buNone/>
             </a:pPr>
             <a:r>
-              <a:rPr lang="en-US" sz="2000" b="1" dirty="0">
-                <a:solidFill>
-                  <a:srgbClr val="1A1A1A"/>
-                </a:solidFill>
-              </a:rPr>
-              <a:t>招商銀行</a:t>
-            </a:r>
-            <a:endParaRPr lang="en-US" sz="2000" dirty="0"/>
-          </a:p>
-        </p:txBody>
-      </p:sp>
-      <p:sp>
-        <p:nvSpPr>
-          <p:cNvPr id="15" name="Text 13"/>
-          <p:cNvSpPr/>
-          <p:nvPr/>
-        </p:nvSpPr>
-        <p:spPr>
-          <a:xfrm>
-            <a:off x="914400" y="4572000"/>
-            <a:ext cx="8229600" cy="457200"/>
-          </a:xfrm>
-          <a:prstGeom prst="rect">
-            <a:avLst/>
-          </a:prstGeom>
-          <a:noFill/>
-          <a:ln/>
-        </p:spPr>
-        <p:txBody>
-          <a:bodyPr wrap="square" rtlCol="0" anchor="ctr"/>
-          <a:lstStyle/>
-          <a:p>
-            <a:pPr indent="0" marL="0">
-              <a:buNone/>
-            </a:pPr>
-            <a:r>
-              <a:rPr lang="en-US" sz="1400" dirty="0">
-                <a:solidFill>
-                  <a:srgbClr val="2E7D32"/>
-                </a:solidFill>
-              </a:rPr>
-              <a:t>服務品質好，有英文介面</a:t>
-            </a:r>
-            <a:endParaRPr lang="en-US" sz="1400" dirty="0"/>
-          </a:p>
-        </p:txBody>
-      </p:sp>
-      <p:sp>
-        <p:nvSpPr>
-          <p:cNvPr id="16" name="Shape 14"/>
-          <p:cNvSpPr/>
-          <p:nvPr/>
-        </p:nvSpPr>
-        <p:spPr>
-          <a:xfrm>
-            <a:off x="457200" y="5303520"/>
-            <a:ext cx="137160" cy="1280160"/>
-          </a:xfrm>
-          <a:prstGeom prst="rect">
-            <a:avLst/>
-          </a:prstGeom>
-          <a:solidFill>
-            <a:srgbClr val="4CAF50"/>
-          </a:solidFill>
-          <a:ln/>
-        </p:spPr>
-      </p:sp>
-      <p:sp>
-        <p:nvSpPr>
-          <p:cNvPr id="17" name="Shape 15"/>
-          <p:cNvSpPr/>
-          <p:nvPr/>
-        </p:nvSpPr>
-        <p:spPr>
-          <a:xfrm>
-            <a:off x="594360" y="5303520"/>
-            <a:ext cx="11430000" cy="1280160"/>
-          </a:xfrm>
-          <a:prstGeom prst="roundRect">
-            <a:avLst/>
-          </a:prstGeom>
-          <a:solidFill>
-            <a:srgbClr val="FFFFFF"/>
-          </a:solidFill>
-          <a:ln/>
-        </p:spPr>
-      </p:sp>
-      <p:sp>
-        <p:nvSpPr>
-          <p:cNvPr id="18" name="Text 16"/>
-          <p:cNvSpPr/>
-          <p:nvPr/>
-        </p:nvSpPr>
-        <p:spPr>
-          <a:xfrm>
-            <a:off x="914400" y="5486400"/>
-            <a:ext cx="8229600" cy="457200"/>
-          </a:xfrm>
-          <a:prstGeom prst="rect">
-            <a:avLst/>
-          </a:prstGeom>
-          <a:noFill/>
-          <a:ln/>
-        </p:spPr>
-        <p:txBody>
-          <a:bodyPr wrap="square" rtlCol="0" anchor="ctr"/>
-          <a:lstStyle/>
-          <a:p>
-            <a:pPr indent="0" marL="0">
-              <a:buNone/>
-            </a:pPr>
-            <a:r>
-              <a:rPr lang="en-US" sz="2000" b="1" dirty="0">
-                <a:solidFill>
-                  <a:srgbClr val="1A1A1A"/>
-                </a:solidFill>
-              </a:rPr>
-              <a:t>支付寶/微信支付</a:t>
-            </a:r>
-            <a:endParaRPr lang="en-US" sz="2000" dirty="0"/>
-          </a:p>
-        </p:txBody>
-      </p:sp>
-      <p:sp>
-        <p:nvSpPr>
-          <p:cNvPr id="19" name="Text 17"/>
-          <p:cNvSpPr/>
-          <p:nvPr/>
-        </p:nvSpPr>
-        <p:spPr>
-          <a:xfrm>
-            <a:off x="914400" y="5943600"/>
-            <a:ext cx="8229600" cy="457200"/>
-          </a:xfrm>
-          <a:prstGeom prst="rect">
-            <a:avLst/>
-          </a:prstGeom>
-          <a:noFill/>
-          <a:ln/>
-        </p:spPr>
-        <p:txBody>
-          <a:bodyPr wrap="square" rtlCol="0" anchor="ctr"/>
-          <a:lstStyle/>
-          <a:p>
-            <a:pPr indent="0" marL="0">
-              <a:buNone/>
-            </a:pPr>
-            <a:r>
-              <a:rPr lang="en-US" sz="1400" dirty="0">
-                <a:solidFill>
-                  <a:srgbClr val="2E7D32"/>
-                </a:solidFill>
-              </a:rPr>
-              <a:t>行動支付必備，需先綁定銀行卡</a:t>
-            </a:r>
-            <a:endParaRPr lang="en-US" sz="1400" dirty="0"/>
+              <a:rPr lang="en-US" sz="1200" dirty="0">
+                <a:solidFill>
+                  <a:srgbClr val="1E3A5F"/>
+                </a:solidFill>
+              </a:rPr>
+              <a:t>需先綁定銀行卡</a:t>
+            </a:r>
+            <a:endParaRPr lang="en-US" sz="1200" dirty="0"/>
           </a:p>
         </p:txBody>
       </p:sp>
@@ -2930,8 +2447,8 @@
         </p:nvSpPr>
         <p:spPr>
           <a:xfrm>
-            <a:off x="457200" y="274320"/>
-            <a:ext cx="8686800" cy="731520"/>
+            <a:off x="274320" y="182880"/>
+            <a:ext cx="8595360" cy="548640"/>
           </a:xfrm>
           <a:prstGeom prst="rect">
             <a:avLst/>
@@ -2947,14 +2464,14 @@
               <a:buNone/>
             </a:pPr>
             <a:r>
-              <a:rPr lang="en-US" sz="3200" b="1" dirty="0">
+              <a:rPr lang="en-US" sz="2800" b="1" dirty="0">
                 <a:solidFill>
                   <a:srgbClr val="FFFFFF"/>
                 </a:solidFill>
               </a:rPr>
               <a:t>📝 開戶流程</a:t>
             </a:r>
-            <a:endParaRPr lang="en-US" sz="3200" dirty="0"/>
+            <a:endParaRPr lang="en-US" sz="2800" dirty="0"/>
           </a:p>
         </p:txBody>
       </p:sp>
@@ -2966,8 +2483,8 @@
         </p:nvSpPr>
         <p:spPr>
           <a:xfrm>
-            <a:off x="548640" y="1097280"/>
-            <a:ext cx="502920" cy="502920"/>
+            <a:off x="365760" y="868680"/>
+            <a:ext cx="365760" cy="365760"/>
           </a:xfrm>
           <a:prstGeom prst="ellipse">
             <a:avLst/>
@@ -2986,8 +2503,8 @@
         </p:nvSpPr>
         <p:spPr>
           <a:xfrm>
-            <a:off x="548640" y="1188720"/>
-            <a:ext cx="502920" cy="365760"/>
+            <a:off x="365760" y="941832"/>
+            <a:ext cx="365760" cy="228600"/>
           </a:xfrm>
           <a:prstGeom prst="rect">
             <a:avLst/>
@@ -3003,14 +2520,14 @@
               <a:buNone/>
             </a:pPr>
             <a:r>
-              <a:rPr lang="en-US" sz="1600" b="1" dirty="0">
+              <a:rPr lang="en-US" sz="1200" b="1" dirty="0">
                 <a:solidFill>
                   <a:srgbClr val="FFFFFF"/>
                 </a:solidFill>
               </a:rPr>
               <a:t>1</a:t>
             </a:r>
-            <a:endParaRPr lang="en-US" sz="1600" dirty="0"/>
+            <a:endParaRPr lang="en-US" sz="1200" dirty="0"/>
           </a:p>
         </p:txBody>
       </p:sp>
@@ -3022,8 +2539,8 @@
         </p:nvSpPr>
         <p:spPr>
           <a:xfrm>
-            <a:off x="1280160" y="1188720"/>
-            <a:ext cx="7772400" cy="457200"/>
+            <a:off x="914400" y="941832"/>
+            <a:ext cx="7315200" cy="320040"/>
           </a:xfrm>
           <a:prstGeom prst="rect">
             <a:avLst/>
@@ -3039,14 +2556,14 @@
               <a:buNone/>
             </a:pPr>
             <a:r>
-              <a:rPr lang="en-US" sz="1800" dirty="0">
+              <a:rPr lang="en-US" sz="1400" dirty="0">
                 <a:solidFill>
                   <a:srgbClr val="FFFFFF"/>
                 </a:solidFill>
               </a:rPr>
-              <a:t>抵達銀行大廳，取號排隊</a:t>
-            </a:r>
-            <a:endParaRPr lang="en-US" sz="1800" dirty="0"/>
+              <a:t>取號排隊</a:t>
+            </a:r>
+            <a:endParaRPr lang="en-US" sz="1400" dirty="0"/>
           </a:p>
         </p:txBody>
       </p:sp>
@@ -3058,31 +2575,8 @@
         </p:nvSpPr>
         <p:spPr>
           <a:xfrm>
-            <a:off x="800100" y="1600200"/>
-            <a:ext cx="0" cy="274320"/>
-          </a:xfrm>
-          <a:prstGeom prst="line">
-            <a:avLst/>
-          </a:prstGeom>
-          <a:noFill/>
-          <a:ln w="25400">
-            <a:solidFill>
-              <a:srgbClr val="FF6F00"/>
-            </a:solidFill>
-            <a:prstDash val="solid"/>
-          </a:ln>
-        </p:spPr>
-      </p:sp>
-      <p:sp>
-        <p:nvSpPr>
-          <p:cNvPr id="7" name="Shape 5"/>
-          <p:cNvSpPr/>
-          <p:nvPr/>
-        </p:nvSpPr>
-        <p:spPr>
-          <a:xfrm>
-            <a:off x="548640" y="1874520"/>
-            <a:ext cx="502920" cy="502920"/>
+            <a:off x="365760" y="1463040"/>
+            <a:ext cx="365760" cy="365760"/>
           </a:xfrm>
           <a:prstGeom prst="ellipse">
             <a:avLst/>
@@ -3095,14 +2589,106 @@
       </p:sp>
       <p:sp>
         <p:nvSpPr>
+          <p:cNvPr id="7" name="Text 5"/>
+          <p:cNvSpPr/>
+          <p:nvPr/>
+        </p:nvSpPr>
+        <p:spPr>
+          <a:xfrm>
+            <a:off x="365760" y="1536192"/>
+            <a:ext cx="365760" cy="228600"/>
+          </a:xfrm>
+          <a:prstGeom prst="rect">
+            <a:avLst/>
+          </a:prstGeom>
+          <a:noFill/>
+          <a:ln/>
+        </p:spPr>
+        <p:txBody>
+          <a:bodyPr wrap="square" rtlCol="0" anchor="ctr"/>
+          <a:lstStyle/>
+          <a:p>
+            <a:pPr algn="ctr" indent="0" marL="0">
+              <a:buNone/>
+            </a:pPr>
+            <a:r>
+              <a:rPr lang="en-US" sz="1200" b="1" dirty="0">
+                <a:solidFill>
+                  <a:srgbClr val="FFFFFF"/>
+                </a:solidFill>
+              </a:rPr>
+              <a:t>2</a:t>
+            </a:r>
+            <a:endParaRPr lang="en-US" sz="1200" dirty="0"/>
+          </a:p>
+        </p:txBody>
+      </p:sp>
+      <p:sp>
+        <p:nvSpPr>
           <p:cNvPr id="8" name="Text 6"/>
           <p:cNvSpPr/>
           <p:nvPr/>
         </p:nvSpPr>
         <p:spPr>
           <a:xfrm>
-            <a:off x="548640" y="1965960"/>
-            <a:ext cx="502920" cy="365760"/>
+            <a:off x="914400" y="1536192"/>
+            <a:ext cx="7315200" cy="320040"/>
+          </a:xfrm>
+          <a:prstGeom prst="rect">
+            <a:avLst/>
+          </a:prstGeom>
+          <a:noFill/>
+          <a:ln/>
+        </p:spPr>
+        <p:txBody>
+          <a:bodyPr wrap="square" rtlCol="0" anchor="ctr"/>
+          <a:lstStyle/>
+          <a:p>
+            <a:pPr indent="0" marL="0">
+              <a:buNone/>
+            </a:pPr>
+            <a:r>
+              <a:rPr lang="en-US" sz="1400" dirty="0">
+                <a:solidFill>
+                  <a:srgbClr val="FFFFFF"/>
+                </a:solidFill>
+              </a:rPr>
+              <a:t>填寫開戶申請表</a:t>
+            </a:r>
+            <a:endParaRPr lang="en-US" sz="1400" dirty="0"/>
+          </a:p>
+        </p:txBody>
+      </p:sp>
+      <p:sp>
+        <p:nvSpPr>
+          <p:cNvPr id="9" name="Shape 7"/>
+          <p:cNvSpPr/>
+          <p:nvPr/>
+        </p:nvSpPr>
+        <p:spPr>
+          <a:xfrm>
+            <a:off x="365760" y="2057400"/>
+            <a:ext cx="365760" cy="365760"/>
+          </a:xfrm>
+          <a:prstGeom prst="ellipse">
+            <a:avLst/>
+          </a:prstGeom>
+          <a:solidFill>
+            <a:srgbClr val="FF6F00"/>
+          </a:solidFill>
+          <a:ln/>
+        </p:spPr>
+      </p:sp>
+      <p:sp>
+        <p:nvSpPr>
+          <p:cNvPr id="10" name="Text 8"/>
+          <p:cNvSpPr/>
+          <p:nvPr/>
+        </p:nvSpPr>
+        <p:spPr>
+          <a:xfrm>
+            <a:off x="365760" y="2130552"/>
+            <a:ext cx="365760" cy="228600"/>
           </a:xfrm>
           <a:prstGeom prst="rect">
             <a:avLst/>
@@ -3118,27 +2704,27 @@
               <a:buNone/>
             </a:pPr>
             <a:r>
-              <a:rPr lang="en-US" sz="1600" b="1" dirty="0">
+              <a:rPr lang="en-US" sz="1200" b="1" dirty="0">
                 <a:solidFill>
                   <a:srgbClr val="FFFFFF"/>
                 </a:solidFill>
               </a:rPr>
-              <a:t>2</a:t>
-            </a:r>
-            <a:endParaRPr lang="en-US" sz="1600" dirty="0"/>
-          </a:p>
-        </p:txBody>
-      </p:sp>
-      <p:sp>
-        <p:nvSpPr>
-          <p:cNvPr id="9" name="Text 7"/>
-          <p:cNvSpPr/>
-          <p:nvPr/>
-        </p:nvSpPr>
-        <p:spPr>
-          <a:xfrm>
-            <a:off x="1280160" y="1965960"/>
-            <a:ext cx="7772400" cy="457200"/>
+              <a:t>3</a:t>
+            </a:r>
+            <a:endParaRPr lang="en-US" sz="1200" dirty="0"/>
+          </a:p>
+        </p:txBody>
+      </p:sp>
+      <p:sp>
+        <p:nvSpPr>
+          <p:cNvPr id="11" name="Text 9"/>
+          <p:cNvSpPr/>
+          <p:nvPr/>
+        </p:nvSpPr>
+        <p:spPr>
+          <a:xfrm>
+            <a:off x="914400" y="2130552"/>
+            <a:ext cx="7315200" cy="320040"/>
           </a:xfrm>
           <a:prstGeom prst="rect">
             <a:avLst/>
@@ -3154,50 +2740,27 @@
               <a:buNone/>
             </a:pPr>
             <a:r>
-              <a:rPr lang="en-US" sz="1800" dirty="0">
+              <a:rPr lang="en-US" sz="1400" dirty="0">
                 <a:solidFill>
                   <a:srgbClr val="FFFFFF"/>
                 </a:solidFill>
               </a:rPr>
-              <a:t>填寫「個人帳戶開戶申請表」</a:t>
-            </a:r>
-            <a:endParaRPr lang="en-US" sz="1800" dirty="0"/>
-          </a:p>
-        </p:txBody>
-      </p:sp>
-      <p:sp>
-        <p:nvSpPr>
-          <p:cNvPr id="10" name="Shape 8"/>
-          <p:cNvSpPr/>
-          <p:nvPr/>
-        </p:nvSpPr>
-        <p:spPr>
-          <a:xfrm>
-            <a:off x="800100" y="2377440"/>
-            <a:ext cx="0" cy="274320"/>
-          </a:xfrm>
-          <a:prstGeom prst="line">
-            <a:avLst/>
-          </a:prstGeom>
-          <a:noFill/>
-          <a:ln w="25400">
-            <a:solidFill>
-              <a:srgbClr val="FF6F00"/>
-            </a:solidFill>
-            <a:prstDash val="solid"/>
-          </a:ln>
-        </p:spPr>
-      </p:sp>
-      <p:sp>
-        <p:nvSpPr>
-          <p:cNvPr id="11" name="Shape 9"/>
-          <p:cNvSpPr/>
-          <p:nvPr/>
-        </p:nvSpPr>
-        <p:spPr>
-          <a:xfrm>
-            <a:off x="548640" y="2651760"/>
-            <a:ext cx="502920" cy="502920"/>
+              <a:t>提交證件</a:t>
+            </a:r>
+            <a:endParaRPr lang="en-US" sz="1400" dirty="0"/>
+          </a:p>
+        </p:txBody>
+      </p:sp>
+      <p:sp>
+        <p:nvSpPr>
+          <p:cNvPr id="12" name="Shape 10"/>
+          <p:cNvSpPr/>
+          <p:nvPr/>
+        </p:nvSpPr>
+        <p:spPr>
+          <a:xfrm>
+            <a:off x="365760" y="2651760"/>
+            <a:ext cx="365760" cy="365760"/>
           </a:xfrm>
           <a:prstGeom prst="ellipse">
             <a:avLst/>
@@ -3210,14 +2773,14 @@
       </p:sp>
       <p:sp>
         <p:nvSpPr>
-          <p:cNvPr id="12" name="Text 10"/>
-          <p:cNvSpPr/>
-          <p:nvPr/>
-        </p:nvSpPr>
-        <p:spPr>
-          <a:xfrm>
-            <a:off x="548640" y="2743200"/>
-            <a:ext cx="502920" cy="365760"/>
+          <p:cNvPr id="13" name="Text 11"/>
+          <p:cNvSpPr/>
+          <p:nvPr/>
+        </p:nvSpPr>
+        <p:spPr>
+          <a:xfrm>
+            <a:off x="365760" y="2724912"/>
+            <a:ext cx="365760" cy="228600"/>
           </a:xfrm>
           <a:prstGeom prst="rect">
             <a:avLst/>
@@ -3233,27 +2796,27 @@
               <a:buNone/>
             </a:pPr>
             <a:r>
-              <a:rPr lang="en-US" sz="1600" b="1" dirty="0">
+              <a:rPr lang="en-US" sz="1200" b="1" dirty="0">
                 <a:solidFill>
                   <a:srgbClr val="FFFFFF"/>
                 </a:solidFill>
               </a:rPr>
-              <a:t>3</a:t>
-            </a:r>
-            <a:endParaRPr lang="en-US" sz="1600" dirty="0"/>
-          </a:p>
-        </p:txBody>
-      </p:sp>
-      <p:sp>
-        <p:nvSpPr>
-          <p:cNvPr id="13" name="Text 11"/>
-          <p:cNvSpPr/>
-          <p:nvPr/>
-        </p:nvSpPr>
-        <p:spPr>
-          <a:xfrm>
-            <a:off x="1280160" y="2743200"/>
-            <a:ext cx="7772400" cy="457200"/>
+              <a:t>4</a:t>
+            </a:r>
+            <a:endParaRPr lang="en-US" sz="1200" dirty="0"/>
+          </a:p>
+        </p:txBody>
+      </p:sp>
+      <p:sp>
+        <p:nvSpPr>
+          <p:cNvPr id="14" name="Text 12"/>
+          <p:cNvSpPr/>
+          <p:nvPr/>
+        </p:nvSpPr>
+        <p:spPr>
+          <a:xfrm>
+            <a:off x="914400" y="2724912"/>
+            <a:ext cx="7315200" cy="320040"/>
           </a:xfrm>
           <a:prstGeom prst="rect">
             <a:avLst/>
@@ -3269,39 +2832,16 @@
               <a:buNone/>
             </a:pPr>
             <a:r>
-              <a:rPr lang="en-US" sz="1800" dirty="0">
+              <a:rPr lang="en-US" sz="1400" dirty="0">
                 <a:solidFill>
                   <a:srgbClr val="FFFFFF"/>
                 </a:solidFill>
               </a:rPr>
-              <a:t>提交證件（回鄉證+台胞證+居住證明）</a:t>
-            </a:r>
-            <a:endParaRPr lang="en-US" sz="1800" dirty="0"/>
-          </a:p>
-        </p:txBody>
-      </p:sp>
-      <p:sp>
-        <p:nvSpPr>
-          <p:cNvPr id="14" name="Shape 12"/>
-          <p:cNvSpPr/>
-          <p:nvPr/>
-        </p:nvSpPr>
-        <p:spPr>
-          <a:xfrm>
-            <a:off x="800100" y="3154680"/>
-            <a:ext cx="0" cy="274320"/>
-          </a:xfrm>
-          <a:prstGeom prst="line">
-            <a:avLst/>
-          </a:prstGeom>
-          <a:noFill/>
-          <a:ln w="25400">
-            <a:solidFill>
-              <a:srgbClr val="FF6F00"/>
-            </a:solidFill>
-            <a:prstDash val="solid"/>
-          </a:ln>
-        </p:spPr>
+              <a:t>稅收居民聲明</a:t>
+            </a:r>
+            <a:endParaRPr lang="en-US" sz="1400" dirty="0"/>
+          </a:p>
+        </p:txBody>
       </p:sp>
       <p:sp>
         <p:nvSpPr>
@@ -3311,8 +2851,8 @@
         </p:nvSpPr>
         <p:spPr>
           <a:xfrm>
-            <a:off x="548640" y="3429000"/>
-            <a:ext cx="502920" cy="502920"/>
+            <a:off x="365760" y="3246120"/>
+            <a:ext cx="365760" cy="365760"/>
           </a:xfrm>
           <a:prstGeom prst="ellipse">
             <a:avLst/>
@@ -3331,8 +2871,8 @@
         </p:nvSpPr>
         <p:spPr>
           <a:xfrm>
-            <a:off x="548640" y="3520440"/>
-            <a:ext cx="502920" cy="365760"/>
+            <a:off x="365760" y="3319272"/>
+            <a:ext cx="365760" cy="228600"/>
           </a:xfrm>
           <a:prstGeom prst="rect">
             <a:avLst/>
@@ -3348,14 +2888,14 @@
               <a:buNone/>
             </a:pPr>
             <a:r>
-              <a:rPr lang="en-US" sz="1600" b="1" dirty="0">
+              <a:rPr lang="en-US" sz="1200" b="1" dirty="0">
                 <a:solidFill>
                   <a:srgbClr val="FFFFFF"/>
                 </a:solidFill>
               </a:rPr>
-              <a:t>4</a:t>
-            </a:r>
-            <a:endParaRPr lang="en-US" sz="1600" dirty="0"/>
+              <a:t>5</a:t>
+            </a:r>
+            <a:endParaRPr lang="en-US" sz="1200" dirty="0"/>
           </a:p>
         </p:txBody>
       </p:sp>
@@ -3367,8 +2907,8 @@
         </p:nvSpPr>
         <p:spPr>
           <a:xfrm>
-            <a:off x="1280160" y="3520440"/>
-            <a:ext cx="7772400" cy="457200"/>
+            <a:off x="914400" y="3319272"/>
+            <a:ext cx="7315200" cy="320040"/>
           </a:xfrm>
           <a:prstGeom prst="rect">
             <a:avLst/>
@@ -3384,14 +2924,14 @@
               <a:buNone/>
             </a:pPr>
             <a:r>
-              <a:rPr lang="en-US" sz="1800" dirty="0">
+              <a:rPr lang="en-US" sz="1400" dirty="0">
                 <a:solidFill>
                   <a:srgbClr val="FFFFFF"/>
                 </a:solidFill>
               </a:rPr>
-              <a:t>填寫「稅收居民身份聲明」表格</a:t>
-            </a:r>
-            <a:endParaRPr lang="en-US" sz="1800" dirty="0"/>
+              <a:t>設定密碼</a:t>
+            </a:r>
+            <a:endParaRPr lang="en-US" sz="1400" dirty="0"/>
           </a:p>
         </p:txBody>
       </p:sp>
@@ -3403,31 +2943,8 @@
         </p:nvSpPr>
         <p:spPr>
           <a:xfrm>
-            <a:off x="800100" y="3931920"/>
-            <a:ext cx="0" cy="274320"/>
-          </a:xfrm>
-          <a:prstGeom prst="line">
-            <a:avLst/>
-          </a:prstGeom>
-          <a:noFill/>
-          <a:ln w="25400">
-            <a:solidFill>
-              <a:srgbClr val="FF6F00"/>
-            </a:solidFill>
-            <a:prstDash val="solid"/>
-          </a:ln>
-        </p:spPr>
-      </p:sp>
-      <p:sp>
-        <p:nvSpPr>
-          <p:cNvPr id="19" name="Shape 17"/>
-          <p:cNvSpPr/>
-          <p:nvPr/>
-        </p:nvSpPr>
-        <p:spPr>
-          <a:xfrm>
-            <a:off x="548640" y="4206240"/>
-            <a:ext cx="502920" cy="502920"/>
+            <a:off x="365760" y="3840480"/>
+            <a:ext cx="365760" cy="365760"/>
           </a:xfrm>
           <a:prstGeom prst="ellipse">
             <a:avLst/>
@@ -3440,14 +2957,106 @@
       </p:sp>
       <p:sp>
         <p:nvSpPr>
+          <p:cNvPr id="19" name="Text 17"/>
+          <p:cNvSpPr/>
+          <p:nvPr/>
+        </p:nvSpPr>
+        <p:spPr>
+          <a:xfrm>
+            <a:off x="365760" y="3913632"/>
+            <a:ext cx="365760" cy="228600"/>
+          </a:xfrm>
+          <a:prstGeom prst="rect">
+            <a:avLst/>
+          </a:prstGeom>
+          <a:noFill/>
+          <a:ln/>
+        </p:spPr>
+        <p:txBody>
+          <a:bodyPr wrap="square" rtlCol="0" anchor="ctr"/>
+          <a:lstStyle/>
+          <a:p>
+            <a:pPr algn="ctr" indent="0" marL="0">
+              <a:buNone/>
+            </a:pPr>
+            <a:r>
+              <a:rPr lang="en-US" sz="1200" b="1" dirty="0">
+                <a:solidFill>
+                  <a:srgbClr val="FFFFFF"/>
+                </a:solidFill>
+              </a:rPr>
+              <a:t>6</a:t>
+            </a:r>
+            <a:endParaRPr lang="en-US" sz="1200" dirty="0"/>
+          </a:p>
+        </p:txBody>
+      </p:sp>
+      <p:sp>
+        <p:nvSpPr>
           <p:cNvPr id="20" name="Text 18"/>
           <p:cNvSpPr/>
           <p:nvPr/>
         </p:nvSpPr>
         <p:spPr>
           <a:xfrm>
-            <a:off x="548640" y="4297680"/>
-            <a:ext cx="502920" cy="365760"/>
+            <a:off x="914400" y="3913632"/>
+            <a:ext cx="7315200" cy="320040"/>
+          </a:xfrm>
+          <a:prstGeom prst="rect">
+            <a:avLst/>
+          </a:prstGeom>
+          <a:noFill/>
+          <a:ln/>
+        </p:spPr>
+        <p:txBody>
+          <a:bodyPr wrap="square" rtlCol="0" anchor="ctr"/>
+          <a:lstStyle/>
+          <a:p>
+            <a:pPr indent="0" marL="0">
+              <a:buNone/>
+            </a:pPr>
+            <a:r>
+              <a:rPr lang="en-US" sz="1400" dirty="0">
+                <a:solidFill>
+                  <a:srgbClr val="FFFFFF"/>
+                </a:solidFill>
+              </a:rPr>
+              <a:t>存入存款</a:t>
+            </a:r>
+            <a:endParaRPr lang="en-US" sz="1400" dirty="0"/>
+          </a:p>
+        </p:txBody>
+      </p:sp>
+      <p:sp>
+        <p:nvSpPr>
+          <p:cNvPr id="21" name="Shape 19"/>
+          <p:cNvSpPr/>
+          <p:nvPr/>
+        </p:nvSpPr>
+        <p:spPr>
+          <a:xfrm>
+            <a:off x="365760" y="4434840"/>
+            <a:ext cx="365760" cy="365760"/>
+          </a:xfrm>
+          <a:prstGeom prst="ellipse">
+            <a:avLst/>
+          </a:prstGeom>
+          <a:solidFill>
+            <a:srgbClr val="FF6F00"/>
+          </a:solidFill>
+          <a:ln/>
+        </p:spPr>
+      </p:sp>
+      <p:sp>
+        <p:nvSpPr>
+          <p:cNvPr id="22" name="Text 20"/>
+          <p:cNvSpPr/>
+          <p:nvPr/>
+        </p:nvSpPr>
+        <p:spPr>
+          <a:xfrm>
+            <a:off x="365760" y="4507992"/>
+            <a:ext cx="365760" cy="228600"/>
           </a:xfrm>
           <a:prstGeom prst="rect">
             <a:avLst/>
@@ -3463,27 +3072,27 @@
               <a:buNone/>
             </a:pPr>
             <a:r>
-              <a:rPr lang="en-US" sz="1600" b="1" dirty="0">
+              <a:rPr lang="en-US" sz="1200" b="1" dirty="0">
                 <a:solidFill>
                   <a:srgbClr val="FFFFFF"/>
                 </a:solidFill>
               </a:rPr>
-              <a:t>5</a:t>
-            </a:r>
-            <a:endParaRPr lang="en-US" sz="1600" dirty="0"/>
-          </a:p>
-        </p:txBody>
-      </p:sp>
-      <p:sp>
-        <p:nvSpPr>
-          <p:cNvPr id="21" name="Text 19"/>
-          <p:cNvSpPr/>
-          <p:nvPr/>
-        </p:nvSpPr>
-        <p:spPr>
-          <a:xfrm>
-            <a:off x="1280160" y="4297680"/>
-            <a:ext cx="7772400" cy="457200"/>
+              <a:t>7</a:t>
+            </a:r>
+            <a:endParaRPr lang="en-US" sz="1200" dirty="0"/>
+          </a:p>
+        </p:txBody>
+      </p:sp>
+      <p:sp>
+        <p:nvSpPr>
+          <p:cNvPr id="23" name="Text 21"/>
+          <p:cNvSpPr/>
+          <p:nvPr/>
+        </p:nvSpPr>
+        <p:spPr>
+          <a:xfrm>
+            <a:off x="914400" y="4507992"/>
+            <a:ext cx="7315200" cy="320040"/>
           </a:xfrm>
           <a:prstGeom prst="rect">
             <a:avLst/>
@@ -3499,244 +3108,14 @@
               <a:buNone/>
             </a:pPr>
             <a:r>
-              <a:rPr lang="en-US" sz="1800" dirty="0">
+              <a:rPr lang="en-US" sz="1400" dirty="0">
                 <a:solidFill>
                   <a:srgbClr val="FFFFFF"/>
                 </a:solidFill>
               </a:rPr>
-              <a:t>設定銀行卡密碼+預留手機號</a:t>
-            </a:r>
-            <a:endParaRPr lang="en-US" sz="1800" dirty="0"/>
-          </a:p>
-        </p:txBody>
-      </p:sp>
-      <p:sp>
-        <p:nvSpPr>
-          <p:cNvPr id="22" name="Shape 20"/>
-          <p:cNvSpPr/>
-          <p:nvPr/>
-        </p:nvSpPr>
-        <p:spPr>
-          <a:xfrm>
-            <a:off x="800100" y="4709160"/>
-            <a:ext cx="0" cy="274320"/>
-          </a:xfrm>
-          <a:prstGeom prst="line">
-            <a:avLst/>
-          </a:prstGeom>
-          <a:noFill/>
-          <a:ln w="25400">
-            <a:solidFill>
-              <a:srgbClr val="FF6F00"/>
-            </a:solidFill>
-            <a:prstDash val="solid"/>
-          </a:ln>
-        </p:spPr>
-      </p:sp>
-      <p:sp>
-        <p:nvSpPr>
-          <p:cNvPr id="23" name="Shape 21"/>
-          <p:cNvSpPr/>
-          <p:nvPr/>
-        </p:nvSpPr>
-        <p:spPr>
-          <a:xfrm>
-            <a:off x="548640" y="4983480"/>
-            <a:ext cx="502920" cy="502920"/>
-          </a:xfrm>
-          <a:prstGeom prst="ellipse">
-            <a:avLst/>
-          </a:prstGeom>
-          <a:solidFill>
-            <a:srgbClr val="FF6F00"/>
-          </a:solidFill>
-          <a:ln/>
-        </p:spPr>
-      </p:sp>
-      <p:sp>
-        <p:nvSpPr>
-          <p:cNvPr id="24" name="Text 22"/>
-          <p:cNvSpPr/>
-          <p:nvPr/>
-        </p:nvSpPr>
-        <p:spPr>
-          <a:xfrm>
-            <a:off x="548640" y="5074920"/>
-            <a:ext cx="502920" cy="365760"/>
-          </a:xfrm>
-          <a:prstGeom prst="rect">
-            <a:avLst/>
-          </a:prstGeom>
-          <a:noFill/>
-          <a:ln/>
-        </p:spPr>
-        <p:txBody>
-          <a:bodyPr wrap="square" rtlCol="0" anchor="ctr"/>
-          <a:lstStyle/>
-          <a:p>
-            <a:pPr algn="ctr" indent="0" marL="0">
-              <a:buNone/>
-            </a:pPr>
-            <a:r>
-              <a:rPr lang="en-US" sz="1600" b="1" dirty="0">
-                <a:solidFill>
-                  <a:srgbClr val="FFFFFF"/>
-                </a:solidFill>
-              </a:rPr>
-              <a:t>6</a:t>
-            </a:r>
-            <a:endParaRPr lang="en-US" sz="1600" dirty="0"/>
-          </a:p>
-        </p:txBody>
-      </p:sp>
-      <p:sp>
-        <p:nvSpPr>
-          <p:cNvPr id="25" name="Text 23"/>
-          <p:cNvSpPr/>
-          <p:nvPr/>
-        </p:nvSpPr>
-        <p:spPr>
-          <a:xfrm>
-            <a:off x="1280160" y="5074920"/>
-            <a:ext cx="7772400" cy="457200"/>
-          </a:xfrm>
-          <a:prstGeom prst="rect">
-            <a:avLst/>
-          </a:prstGeom>
-          <a:noFill/>
-          <a:ln/>
-        </p:spPr>
-        <p:txBody>
-          <a:bodyPr wrap="square" rtlCol="0" anchor="ctr"/>
-          <a:lstStyle/>
-          <a:p>
-            <a:pPr indent="0" marL="0">
-              <a:buNone/>
-            </a:pPr>
-            <a:r>
-              <a:rPr lang="en-US" sz="1800" dirty="0">
-                <a:solidFill>
-                  <a:srgbClr val="FFFFFF"/>
-                </a:solidFill>
-              </a:rPr>
-              <a:t>存入初始存款（建議1000元起）</a:t>
-            </a:r>
-            <a:endParaRPr lang="en-US" sz="1800" dirty="0"/>
-          </a:p>
-        </p:txBody>
-      </p:sp>
-      <p:sp>
-        <p:nvSpPr>
-          <p:cNvPr id="26" name="Shape 24"/>
-          <p:cNvSpPr/>
-          <p:nvPr/>
-        </p:nvSpPr>
-        <p:spPr>
-          <a:xfrm>
-            <a:off x="800100" y="5486400"/>
-            <a:ext cx="0" cy="274320"/>
-          </a:xfrm>
-          <a:prstGeom prst="line">
-            <a:avLst/>
-          </a:prstGeom>
-          <a:noFill/>
-          <a:ln w="25400">
-            <a:solidFill>
-              <a:srgbClr val="FF6F00"/>
-            </a:solidFill>
-            <a:prstDash val="solid"/>
-          </a:ln>
-        </p:spPr>
-      </p:sp>
-      <p:sp>
-        <p:nvSpPr>
-          <p:cNvPr id="27" name="Shape 25"/>
-          <p:cNvSpPr/>
-          <p:nvPr/>
-        </p:nvSpPr>
-        <p:spPr>
-          <a:xfrm>
-            <a:off x="548640" y="5760720"/>
-            <a:ext cx="502920" cy="502920"/>
-          </a:xfrm>
-          <a:prstGeom prst="ellipse">
-            <a:avLst/>
-          </a:prstGeom>
-          <a:solidFill>
-            <a:srgbClr val="FF6F00"/>
-          </a:solidFill>
-          <a:ln/>
-        </p:spPr>
-      </p:sp>
-      <p:sp>
-        <p:nvSpPr>
-          <p:cNvPr id="28" name="Text 26"/>
-          <p:cNvSpPr/>
-          <p:nvPr/>
-        </p:nvSpPr>
-        <p:spPr>
-          <a:xfrm>
-            <a:off x="548640" y="5852160"/>
-            <a:ext cx="502920" cy="365760"/>
-          </a:xfrm>
-          <a:prstGeom prst="rect">
-            <a:avLst/>
-          </a:prstGeom>
-          <a:noFill/>
-          <a:ln/>
-        </p:spPr>
-        <p:txBody>
-          <a:bodyPr wrap="square" rtlCol="0" anchor="ctr"/>
-          <a:lstStyle/>
-          <a:p>
-            <a:pPr algn="ctr" indent="0" marL="0">
-              <a:buNone/>
-            </a:pPr>
-            <a:r>
-              <a:rPr lang="en-US" sz="1600" b="1" dirty="0">
-                <a:solidFill>
-                  <a:srgbClr val="FFFFFF"/>
-                </a:solidFill>
-              </a:rPr>
-              <a:t>7</a:t>
-            </a:r>
-            <a:endParaRPr lang="en-US" sz="1600" dirty="0"/>
-          </a:p>
-        </p:txBody>
-      </p:sp>
-      <p:sp>
-        <p:nvSpPr>
-          <p:cNvPr id="29" name="Text 27"/>
-          <p:cNvSpPr/>
-          <p:nvPr/>
-        </p:nvSpPr>
-        <p:spPr>
-          <a:xfrm>
-            <a:off x="1280160" y="5852160"/>
-            <a:ext cx="7772400" cy="457200"/>
-          </a:xfrm>
-          <a:prstGeom prst="rect">
-            <a:avLst/>
-          </a:prstGeom>
-          <a:noFill/>
-          <a:ln/>
-        </p:spPr>
-        <p:txBody>
-          <a:bodyPr wrap="square" rtlCol="0" anchor="ctr"/>
-          <a:lstStyle/>
-          <a:p>
-            <a:pPr indent="0" marL="0">
-              <a:buNone/>
-            </a:pPr>
-            <a:r>
-              <a:rPr lang="en-US" sz="1800" dirty="0">
-                <a:solidFill>
-                  <a:srgbClr val="FFFFFF"/>
-                </a:solidFill>
-              </a:rPr>
-              <a:t>領取銀行卡+開通網銀/手機銀行</a:t>
-            </a:r>
-            <a:endParaRPr lang="en-US" sz="1800" dirty="0"/>
+              <a:t>領取銀行卡</a:t>
+            </a:r>
+            <a:endParaRPr lang="en-US" sz="1400" dirty="0"/>
           </a:p>
         </p:txBody>
       </p:sp>
@@ -3754,7 +3133,7 @@
     <p:bg>
       <p:bgPr>
         <a:solidFill>
-          <a:srgbClr val="F5F5F5"/>
+          <a:srgbClr val="FAFAFA"/>
         </a:solidFill>
       </p:bgPr>
     </p:bg>
@@ -3774,34 +3153,14 @@
       </p:grpSpPr>
       <p:sp>
         <p:nvSpPr>
-          <p:cNvPr id="2" name="Shape 0"/>
-          <p:cNvSpPr/>
-          <p:nvPr/>
-        </p:nvSpPr>
-        <p:spPr>
-          <a:xfrm>
-            <a:off x="0" y="0"/>
-            <a:ext cx="9144000" cy="914400"/>
-          </a:xfrm>
-          <a:prstGeom prst="rect">
-            <a:avLst/>
-          </a:prstGeom>
-          <a:solidFill>
-            <a:srgbClr val="FF6F00"/>
-          </a:solidFill>
-          <a:ln/>
-        </p:spPr>
-      </p:sp>
-      <p:sp>
-        <p:nvSpPr>
-          <p:cNvPr id="3" name="Text 1"/>
-          <p:cNvSpPr/>
-          <p:nvPr/>
-        </p:nvSpPr>
-        <p:spPr>
-          <a:xfrm>
-            <a:off x="457200" y="182880"/>
-            <a:ext cx="8686800" cy="548640"/>
+          <p:cNvPr id="2" name="Text 0"/>
+          <p:cNvSpPr/>
+          <p:nvPr/>
+        </p:nvSpPr>
+        <p:spPr>
+          <a:xfrm>
+            <a:off x="274320" y="182880"/>
+            <a:ext cx="8595360" cy="548640"/>
           </a:xfrm>
           <a:prstGeom prst="rect">
             <a:avLst/>
@@ -3817,27 +3176,27 @@
               <a:buNone/>
             </a:pPr>
             <a:r>
-              <a:rPr lang="en-US" sz="3200" b="1" dirty="0">
-                <a:solidFill>
-                  <a:srgbClr val="FFFFFF"/>
-                </a:solidFill>
-              </a:rPr>
-              <a:t>⚠️ 重要注意事項</a:t>
-            </a:r>
-            <a:endParaRPr lang="en-US" sz="3200" dirty="0"/>
-          </a:p>
-        </p:txBody>
-      </p:sp>
-      <p:sp>
-        <p:nvSpPr>
-          <p:cNvPr id="4" name="Shape 2"/>
-          <p:cNvSpPr/>
-          <p:nvPr/>
-        </p:nvSpPr>
-        <p:spPr>
-          <a:xfrm>
-            <a:off x="457200" y="1097280"/>
-            <a:ext cx="11430000" cy="731520"/>
+              <a:rPr lang="en-US" sz="2800" b="1" dirty="0">
+                <a:solidFill>
+                  <a:srgbClr val="FF6F00"/>
+                </a:solidFill>
+              </a:rPr>
+              <a:t>⚠️ 注意事項</a:t>
+            </a:r>
+            <a:endParaRPr lang="en-US" sz="2800" dirty="0"/>
+          </a:p>
+        </p:txBody>
+      </p:sp>
+      <p:sp>
+        <p:nvSpPr>
+          <p:cNvPr id="3" name="Shape 1"/>
+          <p:cNvSpPr/>
+          <p:nvPr/>
+        </p:nvSpPr>
+        <p:spPr>
+          <a:xfrm>
+            <a:off x="274320" y="822960"/>
+            <a:ext cx="8595360" cy="685800"/>
           </a:xfrm>
           <a:prstGeom prst="roundRect">
             <a:avLst/>
@@ -3850,14 +3209,14 @@
       </p:sp>
       <p:sp>
         <p:nvSpPr>
-          <p:cNvPr id="5" name="Text 3"/>
-          <p:cNvSpPr/>
-          <p:nvPr/>
-        </p:nvSpPr>
-        <p:spPr>
-          <a:xfrm>
-            <a:off x="731520" y="1280160"/>
-            <a:ext cx="8229600" cy="457200"/>
+          <p:cNvPr id="4" name="Text 2"/>
+          <p:cNvSpPr/>
+          <p:nvPr/>
+        </p:nvSpPr>
+        <p:spPr>
+          <a:xfrm>
+            <a:off x="457200" y="1005840"/>
+            <a:ext cx="8229600" cy="365760"/>
           </a:xfrm>
           <a:prstGeom prst="rect">
             <a:avLst/>
@@ -3873,27 +3232,27 @@
               <a:buNone/>
             </a:pPr>
             <a:r>
-              <a:rPr lang="en-US" sz="1600" dirty="0">
-                <a:solidFill>
-                  <a:srgbClr val="1A1A1A"/>
-                </a:solidFill>
-              </a:rPr>
-              <a:t>✓ 每家銀行要求可能不同，建議先電話確認</a:t>
-            </a:r>
-            <a:endParaRPr lang="en-US" sz="1600" dirty="0"/>
-          </a:p>
-        </p:txBody>
-      </p:sp>
-      <p:sp>
-        <p:nvSpPr>
-          <p:cNvPr id="6" name="Shape 4"/>
-          <p:cNvSpPr/>
-          <p:nvPr/>
-        </p:nvSpPr>
-        <p:spPr>
-          <a:xfrm>
-            <a:off x="457200" y="1920240"/>
-            <a:ext cx="11430000" cy="731520"/>
+              <a:rPr lang="en-US" sz="1300" dirty="0">
+                <a:solidFill>
+                  <a:srgbClr val="212121"/>
+                </a:solidFill>
+              </a:rPr>
+              <a:t>✓ 先電話確認銀行要求</a:t>
+            </a:r>
+            <a:endParaRPr lang="en-US" sz="1300" dirty="0"/>
+          </a:p>
+        </p:txBody>
+      </p:sp>
+      <p:sp>
+        <p:nvSpPr>
+          <p:cNvPr id="5" name="Shape 3"/>
+          <p:cNvSpPr/>
+          <p:nvPr/>
+        </p:nvSpPr>
+        <p:spPr>
+          <a:xfrm>
+            <a:off x="274320" y="1645920"/>
+            <a:ext cx="8595360" cy="685800"/>
           </a:xfrm>
           <a:prstGeom prst="roundRect">
             <a:avLst/>
@@ -3906,14 +3265,14 @@
       </p:sp>
       <p:sp>
         <p:nvSpPr>
-          <p:cNvPr id="7" name="Text 5"/>
-          <p:cNvSpPr/>
-          <p:nvPr/>
-        </p:nvSpPr>
-        <p:spPr>
-          <a:xfrm>
-            <a:off x="731520" y="2103120"/>
-            <a:ext cx="8229600" cy="457200"/>
+          <p:cNvPr id="6" name="Text 4"/>
+          <p:cNvSpPr/>
+          <p:nvPr/>
+        </p:nvSpPr>
+        <p:spPr>
+          <a:xfrm>
+            <a:off x="457200" y="1828800"/>
+            <a:ext cx="8229600" cy="365760"/>
           </a:xfrm>
           <a:prstGeom prst="rect">
             <a:avLst/>
@@ -3929,27 +3288,27 @@
               <a:buNone/>
             </a:pPr>
             <a:r>
-              <a:rPr lang="en-US" sz="1600" dirty="0">
-                <a:solidFill>
-                  <a:srgbClr val="1A1A1A"/>
-                </a:solidFill>
-              </a:rPr>
-              <a:t>✓ 部分銀行需要「工作證明」或「納稅證明」</a:t>
-            </a:r>
-            <a:endParaRPr lang="en-US" sz="1600" dirty="0"/>
-          </a:p>
-        </p:txBody>
-      </p:sp>
-      <p:sp>
-        <p:nvSpPr>
-          <p:cNvPr id="8" name="Shape 6"/>
-          <p:cNvSpPr/>
-          <p:nvPr/>
-        </p:nvSpPr>
-        <p:spPr>
-          <a:xfrm>
-            <a:off x="457200" y="2743200"/>
-            <a:ext cx="11430000" cy="731520"/>
+              <a:rPr lang="en-US" sz="1300" dirty="0">
+                <a:solidFill>
+                  <a:srgbClr val="212121"/>
+                </a:solidFill>
+              </a:rPr>
+              <a:t>✓ 網銀+手機銀行一起開通</a:t>
+            </a:r>
+            <a:endParaRPr lang="en-US" sz="1300" dirty="0"/>
+          </a:p>
+        </p:txBody>
+      </p:sp>
+      <p:sp>
+        <p:nvSpPr>
+          <p:cNvPr id="7" name="Shape 5"/>
+          <p:cNvSpPr/>
+          <p:nvPr/>
+        </p:nvSpPr>
+        <p:spPr>
+          <a:xfrm>
+            <a:off x="274320" y="2468880"/>
+            <a:ext cx="8595360" cy="685800"/>
           </a:xfrm>
           <a:prstGeom prst="roundRect">
             <a:avLst/>
@@ -3962,14 +3321,14 @@
       </p:sp>
       <p:sp>
         <p:nvSpPr>
-          <p:cNvPr id="9" name="Text 7"/>
-          <p:cNvSpPr/>
-          <p:nvPr/>
-        </p:nvSpPr>
-        <p:spPr>
-          <a:xfrm>
-            <a:off x="731520" y="2926080"/>
-            <a:ext cx="8229600" cy="457200"/>
+          <p:cNvPr id="8" name="Text 6"/>
+          <p:cNvSpPr/>
+          <p:nvPr/>
+        </p:nvSpPr>
+        <p:spPr>
+          <a:xfrm>
+            <a:off x="457200" y="2651760"/>
+            <a:ext cx="8229600" cy="365760"/>
           </a:xfrm>
           <a:prstGeom prst="rect">
             <a:avLst/>
@@ -3985,27 +3344,27 @@
               <a:buNone/>
             </a:pPr>
             <a:r>
-              <a:rPr lang="en-US" sz="1600" dirty="0">
-                <a:solidFill>
-                  <a:srgbClr val="1A1A1A"/>
-                </a:solidFill>
-              </a:rPr>
-              <a:t>✓ 建議開戶時同時申請「網銀」和「手機銀行」</a:t>
-            </a:r>
-            <a:endParaRPr lang="en-US" sz="1600" dirty="0"/>
-          </a:p>
-        </p:txBody>
-      </p:sp>
-      <p:sp>
-        <p:nvSpPr>
-          <p:cNvPr id="10" name="Shape 8"/>
-          <p:cNvSpPr/>
-          <p:nvPr/>
-        </p:nvSpPr>
-        <p:spPr>
-          <a:xfrm>
-            <a:off x="457200" y="3566160"/>
-            <a:ext cx="11430000" cy="731520"/>
+              <a:rPr lang="en-US" sz="1300" dirty="0">
+                <a:solidFill>
+                  <a:srgbClr val="212121"/>
+                </a:solidFill>
+              </a:rPr>
+              <a:t>✓ 牢記6位數密碼</a:t>
+            </a:r>
+            <a:endParaRPr lang="en-US" sz="1300" dirty="0"/>
+          </a:p>
+        </p:txBody>
+      </p:sp>
+      <p:sp>
+        <p:nvSpPr>
+          <p:cNvPr id="9" name="Shape 7"/>
+          <p:cNvSpPr/>
+          <p:nvPr/>
+        </p:nvSpPr>
+        <p:spPr>
+          <a:xfrm>
+            <a:off x="274320" y="3291840"/>
+            <a:ext cx="8595360" cy="685800"/>
           </a:xfrm>
           <a:prstGeom prst="roundRect">
             <a:avLst/>
@@ -4018,14 +3377,14 @@
       </p:sp>
       <p:sp>
         <p:nvSpPr>
-          <p:cNvPr id="11" name="Text 9"/>
-          <p:cNvSpPr/>
-          <p:nvPr/>
-        </p:nvSpPr>
-        <p:spPr>
-          <a:xfrm>
-            <a:off x="731520" y="3749040"/>
-            <a:ext cx="8229600" cy="457200"/>
+          <p:cNvPr id="10" name="Text 8"/>
+          <p:cNvSpPr/>
+          <p:nvPr/>
+        </p:nvSpPr>
+        <p:spPr>
+          <a:xfrm>
+            <a:off x="457200" y="3474720"/>
+            <a:ext cx="8229600" cy="365760"/>
           </a:xfrm>
           <a:prstGeom prst="rect">
             <a:avLst/>
@@ -4041,27 +3400,27 @@
               <a:buNone/>
             </a:pPr>
             <a:r>
-              <a:rPr lang="en-US" sz="1600" dirty="0">
-                <a:solidFill>
-                  <a:srgbClr val="1A1A1A"/>
-                </a:solidFill>
-              </a:rPr>
-              <a:t>✓ 牢記 6 位數純數字「查詢密碼」和「交易密碼」</a:t>
-            </a:r>
-            <a:endParaRPr lang="en-US" sz="1600" dirty="0"/>
-          </a:p>
-        </p:txBody>
-      </p:sp>
-      <p:sp>
-        <p:nvSpPr>
-          <p:cNvPr id="12" name="Shape 10"/>
-          <p:cNvSpPr/>
-          <p:nvPr/>
-        </p:nvSpPr>
-        <p:spPr>
-          <a:xfrm>
-            <a:off x="457200" y="4389120"/>
-            <a:ext cx="11430000" cy="731520"/>
+              <a:rPr lang="en-US" sz="1300" dirty="0">
+                <a:solidFill>
+                  <a:srgbClr val="212121"/>
+                </a:solidFill>
+              </a:rPr>
+              <a:t>✓ 台灣ATM可提款(約1%手續費)</a:t>
+            </a:r>
+            <a:endParaRPr lang="en-US" sz="1300" dirty="0"/>
+          </a:p>
+        </p:txBody>
+      </p:sp>
+      <p:sp>
+        <p:nvSpPr>
+          <p:cNvPr id="11" name="Shape 9"/>
+          <p:cNvSpPr/>
+          <p:nvPr/>
+        </p:nvSpPr>
+        <p:spPr>
+          <a:xfrm>
+            <a:off x="274320" y="4114800"/>
+            <a:ext cx="8595360" cy="685800"/>
           </a:xfrm>
           <a:prstGeom prst="roundRect">
             <a:avLst/>
@@ -4074,14 +3433,14 @@
       </p:sp>
       <p:sp>
         <p:nvSpPr>
-          <p:cNvPr id="13" name="Text 11"/>
-          <p:cNvSpPr/>
-          <p:nvPr/>
-        </p:nvSpPr>
-        <p:spPr>
-          <a:xfrm>
-            <a:off x="731520" y="4572000"/>
-            <a:ext cx="8229600" cy="457200"/>
+          <p:cNvPr id="12" name="Text 10"/>
+          <p:cNvSpPr/>
+          <p:nvPr/>
+        </p:nvSpPr>
+        <p:spPr>
+          <a:xfrm>
+            <a:off x="457200" y="4297680"/>
+            <a:ext cx="8229600" cy="365760"/>
           </a:xfrm>
           <a:prstGeom prst="rect">
             <a:avLst/>
@@ -4097,70 +3456,14 @@
               <a:buNone/>
             </a:pPr>
             <a:r>
-              <a:rPr lang="en-US" sz="1600" dirty="0">
-                <a:solidFill>
-                  <a:srgbClr val="1A1A1A"/>
-                </a:solidFill>
-              </a:rPr>
-              <a:t>✓ 大陸銀行卡在台灣 ATM 也能提款（手續費約 1%）</a:t>
-            </a:r>
-            <a:endParaRPr lang="en-US" sz="1600" dirty="0"/>
-          </a:p>
-        </p:txBody>
-      </p:sp>
-      <p:sp>
-        <p:nvSpPr>
-          <p:cNvPr id="14" name="Shape 12"/>
-          <p:cNvSpPr/>
-          <p:nvPr/>
-        </p:nvSpPr>
-        <p:spPr>
-          <a:xfrm>
-            <a:off x="457200" y="5212080"/>
-            <a:ext cx="11430000" cy="731520"/>
-          </a:xfrm>
-          <a:prstGeom prst="roundRect">
-            <a:avLst/>
-          </a:prstGeom>
-          <a:solidFill>
-            <a:srgbClr val="FFFFFF"/>
-          </a:solidFill>
-          <a:ln/>
-        </p:spPr>
-      </p:sp>
-      <p:sp>
-        <p:nvSpPr>
-          <p:cNvPr id="15" name="Text 13"/>
-          <p:cNvSpPr/>
-          <p:nvPr/>
-        </p:nvSpPr>
-        <p:spPr>
-          <a:xfrm>
-            <a:off x="731520" y="5394960"/>
-            <a:ext cx="8229600" cy="457200"/>
-          </a:xfrm>
-          <a:prstGeom prst="rect">
-            <a:avLst/>
-          </a:prstGeom>
-          <a:noFill/>
-          <a:ln/>
-        </p:spPr>
-        <p:txBody>
-          <a:bodyPr wrap="square" rtlCol="0" anchor="ctr"/>
-          <a:lstStyle/>
-          <a:p>
-            <a:pPr indent="0" marL="0">
-              <a:buNone/>
-            </a:pPr>
-            <a:r>
-              <a:rPr lang="en-US" sz="1600" dirty="0">
-                <a:solidFill>
-                  <a:srgbClr val="1A1A1A"/>
-                </a:solidFill>
-              </a:rPr>
-              <a:t>✓ 建議開戶後第一時間綁定支付寶/微信</a:t>
-            </a:r>
-            <a:endParaRPr lang="en-US" sz="1600" dirty="0"/>
+              <a:rPr lang="en-US" sz="1300" dirty="0">
+                <a:solidFill>
+                  <a:srgbClr val="212121"/>
+                </a:solidFill>
+              </a:rPr>
+              <a:t>✓ 建議開戶後立即綁定支付寶/微信</a:t>
+            </a:r>
+            <a:endParaRPr lang="en-US" sz="1300" dirty="0"/>
           </a:p>
         </p:txBody>
       </p:sp>
@@ -4178,7 +3481,7 @@
     <p:bg>
       <p:bgPr>
         <a:solidFill>
-          <a:srgbClr val="F5F5F5"/>
+          <a:srgbClr val="FAFAFA"/>
         </a:solidFill>
       </p:bgPr>
     </p:bg>
@@ -4204,8 +3507,8 @@
         </p:nvSpPr>
         <p:spPr>
           <a:xfrm>
-            <a:off x="457200" y="274320"/>
-            <a:ext cx="8686800" cy="731520"/>
+            <a:off x="274320" y="182880"/>
+            <a:ext cx="8595360" cy="548640"/>
           </a:xfrm>
           <a:prstGeom prst="rect">
             <a:avLst/>
@@ -4221,14 +3524,14 @@
               <a:buNone/>
             </a:pPr>
             <a:r>
-              <a:rPr lang="en-US" sz="3200" b="1" dirty="0">
+              <a:rPr lang="en-US" sz="2800" b="1" dirty="0">
                 <a:solidFill>
                   <a:srgbClr val="1E3A5F"/>
                 </a:solidFill>
               </a:rPr>
               <a:t>❓ 常見問題</a:t>
             </a:r>
-            <a:endParaRPr lang="en-US" sz="3200" dirty="0"/>
+            <a:endParaRPr lang="en-US" sz="2800" dirty="0"/>
           </a:p>
         </p:txBody>
       </p:sp>
@@ -4240,8 +3543,8 @@
         </p:nvSpPr>
         <p:spPr>
           <a:xfrm>
-            <a:off x="457200" y="1097280"/>
-            <a:ext cx="11430000" cy="1280160"/>
+            <a:off x="274320" y="822960"/>
+            <a:ext cx="8595360" cy="1097280"/>
           </a:xfrm>
           <a:prstGeom prst="roundRect">
             <a:avLst/>
@@ -4260,8 +3563,8 @@
         </p:nvSpPr>
         <p:spPr>
           <a:xfrm>
-            <a:off x="731520" y="1280160"/>
-            <a:ext cx="8229600" cy="457200"/>
+            <a:off x="457200" y="1005840"/>
+            <a:ext cx="8229600" cy="365760"/>
           </a:xfrm>
           <a:prstGeom prst="rect">
             <a:avLst/>
@@ -4277,14 +3580,14 @@
               <a:buNone/>
             </a:pPr>
             <a:r>
-              <a:rPr lang="en-US" sz="1800" b="1" dirty="0">
+              <a:rPr lang="en-US" sz="1400" b="1" dirty="0">
                 <a:solidFill>
                   <a:srgbClr val="1E3A5F"/>
                 </a:solidFill>
               </a:rPr>
               <a:t>Q: 台胞證過期能開戶嗎？</a:t>
             </a:r>
-            <a:endParaRPr lang="en-US" sz="1800" dirty="0"/>
+            <a:endParaRPr lang="en-US" sz="1400" dirty="0"/>
           </a:p>
         </p:txBody>
       </p:sp>
@@ -4296,8 +3599,8 @@
         </p:nvSpPr>
         <p:spPr>
           <a:xfrm>
-            <a:off x="731520" y="1737360"/>
-            <a:ext cx="8229600" cy="457200"/>
+            <a:off x="457200" y="1417320"/>
+            <a:ext cx="8229600" cy="365760"/>
           </a:xfrm>
           <a:prstGeom prst="rect">
             <a:avLst/>
@@ -4313,14 +3616,14 @@
               <a:buNone/>
             </a:pPr>
             <a:r>
-              <a:rPr lang="en-US" sz="1600" dirty="0">
-                <a:solidFill>
-                  <a:srgbClr val="2E7D32"/>
-                </a:solidFill>
-              </a:rPr>
-              <a:t>A: 不能，必須證件有效</a:t>
-            </a:r>
-            <a:endParaRPr lang="en-US" sz="1600" dirty="0"/>
+              <a:rPr lang="en-US" sz="1300" dirty="0">
+                <a:solidFill>
+                  <a:srgbClr val="212121"/>
+                </a:solidFill>
+              </a:rPr>
+              <a:t>A: 不能，必須有效</a:t>
+            </a:r>
+            <a:endParaRPr lang="en-US" sz="1300" dirty="0"/>
           </a:p>
         </p:txBody>
       </p:sp>
@@ -4332,8 +3635,8 @@
         </p:nvSpPr>
         <p:spPr>
           <a:xfrm>
-            <a:off x="457200" y="2468880"/>
-            <a:ext cx="11430000" cy="1280160"/>
+            <a:off x="274320" y="2103120"/>
+            <a:ext cx="8595360" cy="1097280"/>
           </a:xfrm>
           <a:prstGeom prst="roundRect">
             <a:avLst/>
@@ -4352,8 +3655,8 @@
         </p:nvSpPr>
         <p:spPr>
           <a:xfrm>
-            <a:off x="731520" y="2651760"/>
-            <a:ext cx="8229600" cy="457200"/>
+            <a:off x="457200" y="2286000"/>
+            <a:ext cx="8229600" cy="365760"/>
           </a:xfrm>
           <a:prstGeom prst="rect">
             <a:avLst/>
@@ -4369,14 +3672,14 @@
               <a:buNone/>
             </a:pPr>
             <a:r>
-              <a:rPr lang="en-US" sz="1800" b="1" dirty="0">
+              <a:rPr lang="en-US" sz="1400" b="1" dirty="0">
                 <a:solidFill>
                   <a:srgbClr val="1E3A5F"/>
                 </a:solidFill>
               </a:rPr>
-              <a:t>Q: 沒有大陸手機號怎麼辦？</a:t>
-            </a:r>
-            <a:endParaRPr lang="en-US" sz="1800" dirty="0"/>
+              <a:t>Q: 沒大陸手機號？</a:t>
+            </a:r>
+            <a:endParaRPr lang="en-US" sz="1400" dirty="0"/>
           </a:p>
         </p:txBody>
       </p:sp>
@@ -4388,8 +3691,8 @@
         </p:nvSpPr>
         <p:spPr>
           <a:xfrm>
-            <a:off x="731520" y="3108960"/>
-            <a:ext cx="8229600" cy="457200"/>
+            <a:off x="457200" y="2697480"/>
+            <a:ext cx="8229600" cy="365760"/>
           </a:xfrm>
           <a:prstGeom prst="rect">
             <a:avLst/>
@@ -4405,14 +3708,14 @@
               <a:buNone/>
             </a:pPr>
             <a:r>
-              <a:rPr lang="en-US" sz="1600" dirty="0">
-                <a:solidFill>
-                  <a:srgbClr val="2E7D32"/>
+              <a:rPr lang="en-US" sz="1300" dirty="0">
+                <a:solidFill>
+                  <a:srgbClr val="212121"/>
                 </a:solidFill>
               </a:rPr>
               <a:t>A: 可在口岸購買預付費卡</a:t>
             </a:r>
-            <a:endParaRPr lang="en-US" sz="1600" dirty="0"/>
+            <a:endParaRPr lang="en-US" sz="1300" dirty="0"/>
           </a:p>
         </p:txBody>
       </p:sp>
@@ -4424,8 +3727,8 @@
         </p:nvSpPr>
         <p:spPr>
           <a:xfrm>
-            <a:off x="457200" y="3840480"/>
-            <a:ext cx="11430000" cy="1280160"/>
+            <a:off x="274320" y="3383280"/>
+            <a:ext cx="8595360" cy="1097280"/>
           </a:xfrm>
           <a:prstGeom prst="roundRect">
             <a:avLst/>
@@ -4444,8 +3747,8 @@
         </p:nvSpPr>
         <p:spPr>
           <a:xfrm>
-            <a:off x="731520" y="4023360"/>
-            <a:ext cx="8229600" cy="457200"/>
+            <a:off x="457200" y="3566160"/>
+            <a:ext cx="8229600" cy="365760"/>
           </a:xfrm>
           <a:prstGeom prst="rect">
             <a:avLst/>
@@ -4461,14 +3764,14 @@
               <a:buNone/>
             </a:pPr>
             <a:r>
-              <a:rPr lang="en-US" sz="1800" b="1" dirty="0">
+              <a:rPr lang="en-US" sz="1400" b="1" dirty="0">
                 <a:solidFill>
                   <a:srgbClr val="1E3A5F"/>
                 </a:solidFill>
               </a:rPr>
-              <a:t>Q: 需要多久才能拿到卡？</a:t>
-            </a:r>
-            <a:endParaRPr lang="en-US" sz="1800" dirty="0"/>
+              <a:t>Q: 多久拿到卡？</a:t>
+            </a:r>
+            <a:endParaRPr lang="en-US" sz="1400" dirty="0"/>
           </a:p>
         </p:txBody>
       </p:sp>
@@ -4480,8 +3783,8 @@
         </p:nvSpPr>
         <p:spPr>
           <a:xfrm>
-            <a:off x="731520" y="4480560"/>
-            <a:ext cx="8229600" cy="457200"/>
+            <a:off x="457200" y="3977640"/>
+            <a:ext cx="8229600" cy="365760"/>
           </a:xfrm>
           <a:prstGeom prst="rect">
             <a:avLst/>
@@ -4497,106 +3800,14 @@
               <a:buNone/>
             </a:pPr>
             <a:r>
-              <a:rPr lang="en-US" sz="1600" dirty="0">
-                <a:solidFill>
-                  <a:srgbClr val="2E7D32"/>
-                </a:solidFill>
-              </a:rPr>
-              <a:t>A: 現場即刻出卡，網銀當場開通</a:t>
-            </a:r>
-            <a:endParaRPr lang="en-US" sz="1600" dirty="0"/>
-          </a:p>
-        </p:txBody>
-      </p:sp>
-      <p:sp>
-        <p:nvSpPr>
-          <p:cNvPr id="12" name="Shape 10"/>
-          <p:cNvSpPr/>
-          <p:nvPr/>
-        </p:nvSpPr>
-        <p:spPr>
-          <a:xfrm>
-            <a:off x="457200" y="5212080"/>
-            <a:ext cx="11430000" cy="1280160"/>
-          </a:xfrm>
-          <a:prstGeom prst="roundRect">
-            <a:avLst/>
-          </a:prstGeom>
-          <a:solidFill>
-            <a:srgbClr val="FFFFFF"/>
-          </a:solidFill>
-          <a:ln/>
-        </p:spPr>
-      </p:sp>
-      <p:sp>
-        <p:nvSpPr>
-          <p:cNvPr id="13" name="Text 11"/>
-          <p:cNvSpPr/>
-          <p:nvPr/>
-        </p:nvSpPr>
-        <p:spPr>
-          <a:xfrm>
-            <a:off x="731520" y="5394960"/>
-            <a:ext cx="8229600" cy="457200"/>
-          </a:xfrm>
-          <a:prstGeom prst="rect">
-            <a:avLst/>
-          </a:prstGeom>
-          <a:noFill/>
-          <a:ln/>
-        </p:spPr>
-        <p:txBody>
-          <a:bodyPr wrap="square" rtlCol="0" anchor="ctr"/>
-          <a:lstStyle/>
-          <a:p>
-            <a:pPr indent="0" marL="0">
-              <a:buNone/>
-            </a:pPr>
-            <a:r>
-              <a:rPr lang="en-US" sz="1800" b="1" dirty="0">
-                <a:solidFill>
-                  <a:srgbClr val="1E3A5F"/>
-                </a:solidFill>
-              </a:rPr>
-              <a:t>Q: 可以開戶外幣帳戶嗎？</a:t>
-            </a:r>
-            <a:endParaRPr lang="en-US" sz="1800" dirty="0"/>
-          </a:p>
-        </p:txBody>
-      </p:sp>
-      <p:sp>
-        <p:nvSpPr>
-          <p:cNvPr id="14" name="Text 12"/>
-          <p:cNvSpPr/>
-          <p:nvPr/>
-        </p:nvSpPr>
-        <p:spPr>
-          <a:xfrm>
-            <a:off x="731520" y="5852160"/>
-            <a:ext cx="8229600" cy="457200"/>
-          </a:xfrm>
-          <a:prstGeom prst="rect">
-            <a:avLst/>
-          </a:prstGeom>
-          <a:noFill/>
-          <a:ln/>
-        </p:spPr>
-        <p:txBody>
-          <a:bodyPr wrap="square" rtlCol="0" anchor="ctr"/>
-          <a:lstStyle/>
-          <a:p>
-            <a:pPr indent="0" marL="0">
-              <a:buNone/>
-            </a:pPr>
-            <a:r>
-              <a:rPr lang="en-US" sz="1600" dirty="0">
-                <a:solidFill>
-                  <a:srgbClr val="2E7D32"/>
-                </a:solidFill>
-              </a:rPr>
-              <a:t>A: 可以，需另外申請</a:t>
-            </a:r>
-            <a:endParaRPr lang="en-US" sz="1600" dirty="0"/>
+              <a:rPr lang="en-US" sz="1300" dirty="0">
+                <a:solidFill>
+                  <a:srgbClr val="212121"/>
+                </a:solidFill>
+              </a:rPr>
+              <a:t>A: 現場即刻出卡</a:t>
+            </a:r>
+            <a:endParaRPr lang="en-US" sz="1300" dirty="0"/>
           </a:p>
         </p:txBody>
       </p:sp>
@@ -4640,8 +3851,8 @@
         </p:nvSpPr>
         <p:spPr>
           <a:xfrm>
-            <a:off x="457200" y="274320"/>
-            <a:ext cx="8686800" cy="731520"/>
+            <a:off x="274320" y="182880"/>
+            <a:ext cx="8595360" cy="548640"/>
           </a:xfrm>
           <a:prstGeom prst="rect">
             <a:avLst/>
@@ -4657,14 +3868,14 @@
               <a:buNone/>
             </a:pPr>
             <a:r>
-              <a:rPr lang="en-US" sz="3200" b="1" dirty="0">
+              <a:rPr lang="en-US" sz="2800" b="1" dirty="0">
                 <a:solidFill>
                   <a:srgbClr val="FFFFFF"/>
                 </a:solidFill>
               </a:rPr>
               <a:t>📞 緊急聯繫</a:t>
             </a:r>
-            <a:endParaRPr lang="en-US" sz="3200" dirty="0"/>
+            <a:endParaRPr lang="en-US" sz="2800" dirty="0"/>
           </a:p>
         </p:txBody>
       </p:sp>
@@ -4676,8 +3887,8 @@
         </p:nvSpPr>
         <p:spPr>
           <a:xfrm>
-            <a:off x="2286000" y="1188720"/>
-            <a:ext cx="7772400" cy="1005840"/>
+            <a:off x="1828800" y="1097280"/>
+            <a:ext cx="5486400" cy="914400"/>
           </a:xfrm>
           <a:prstGeom prst="roundRect">
             <a:avLst/>
@@ -4696,8 +3907,8 @@
         </p:nvSpPr>
         <p:spPr>
           <a:xfrm>
-            <a:off x="2560320" y="1371600"/>
-            <a:ext cx="4572000" cy="457200"/>
+            <a:off x="2103120" y="1325880"/>
+            <a:ext cx="2743200" cy="457200"/>
           </a:xfrm>
           <a:prstGeom prst="rect">
             <a:avLst/>
@@ -4713,14 +3924,14 @@
               <a:buNone/>
             </a:pPr>
             <a:r>
-              <a:rPr lang="en-US" sz="1800" dirty="0">
-                <a:solidFill>
-                  <a:srgbClr val="1A1A1A"/>
-                </a:solidFill>
-              </a:rPr>
-              <a:t>中國工商銀行客服</a:t>
-            </a:r>
-            <a:endParaRPr lang="en-US" sz="1800" dirty="0"/>
+              <a:rPr lang="en-US" sz="1400" dirty="0">
+                <a:solidFill>
+                  <a:srgbClr val="212121"/>
+                </a:solidFill>
+              </a:rPr>
+              <a:t>工商銀行</a:t>
+            </a:r>
+            <a:endParaRPr lang="en-US" sz="1400" dirty="0"/>
           </a:p>
         </p:txBody>
       </p:sp>
@@ -4732,8 +3943,8 @@
         </p:nvSpPr>
         <p:spPr>
           <a:xfrm>
-            <a:off x="6858000" y="1371600"/>
-            <a:ext cx="2743200" cy="640080"/>
+            <a:off x="5029200" y="1280160"/>
+            <a:ext cx="2103120" cy="548640"/>
           </a:xfrm>
           <a:prstGeom prst="rect">
             <a:avLst/>
@@ -4749,14 +3960,14 @@
               <a:buNone/>
             </a:pPr>
             <a:r>
-              <a:rPr lang="en-US" sz="2400" b="1" dirty="0">
+              <a:rPr lang="en-US" sz="2000" b="1" dirty="0">
                 <a:solidFill>
                   <a:srgbClr val="1E3A5F"/>
                 </a:solidFill>
               </a:rPr>
               <a:t>95588</a:t>
             </a:r>
-            <a:endParaRPr lang="en-US" sz="2400" dirty="0"/>
+            <a:endParaRPr lang="en-US" sz="2000" dirty="0"/>
           </a:p>
         </p:txBody>
       </p:sp>
@@ -4768,8 +3979,8 @@
         </p:nvSpPr>
         <p:spPr>
           <a:xfrm>
-            <a:off x="2286000" y="2377440"/>
-            <a:ext cx="7772400" cy="1005840"/>
+            <a:off x="1828800" y="2286000"/>
+            <a:ext cx="5486400" cy="914400"/>
           </a:xfrm>
           <a:prstGeom prst="roundRect">
             <a:avLst/>
@@ -4788,8 +3999,8 @@
         </p:nvSpPr>
         <p:spPr>
           <a:xfrm>
-            <a:off x="2560320" y="2560320"/>
-            <a:ext cx="4572000" cy="457200"/>
+            <a:off x="2103120" y="2514600"/>
+            <a:ext cx="2743200" cy="457200"/>
           </a:xfrm>
           <a:prstGeom prst="rect">
             <a:avLst/>
@@ -4805,14 +4016,14 @@
               <a:buNone/>
             </a:pPr>
             <a:r>
-              <a:rPr lang="en-US" sz="1800" dirty="0">
-                <a:solidFill>
-                  <a:srgbClr val="1A1A1A"/>
-                </a:solidFill>
-              </a:rPr>
-              <a:t>中國建設銀行客服</a:t>
-            </a:r>
-            <a:endParaRPr lang="en-US" sz="1800" dirty="0"/>
+              <a:rPr lang="en-US" sz="1400" dirty="0">
+                <a:solidFill>
+                  <a:srgbClr val="212121"/>
+                </a:solidFill>
+              </a:rPr>
+              <a:t>建設銀行</a:t>
+            </a:r>
+            <a:endParaRPr lang="en-US" sz="1400" dirty="0"/>
           </a:p>
         </p:txBody>
       </p:sp>
@@ -4824,8 +4035,8 @@
         </p:nvSpPr>
         <p:spPr>
           <a:xfrm>
-            <a:off x="6858000" y="2560320"/>
-            <a:ext cx="2743200" cy="640080"/>
+            <a:off x="5029200" y="2468880"/>
+            <a:ext cx="2103120" cy="548640"/>
           </a:xfrm>
           <a:prstGeom prst="rect">
             <a:avLst/>
@@ -4841,14 +4052,14 @@
               <a:buNone/>
             </a:pPr>
             <a:r>
-              <a:rPr lang="en-US" sz="2400" b="1" dirty="0">
+              <a:rPr lang="en-US" sz="2000" b="1" dirty="0">
                 <a:solidFill>
                   <a:srgbClr val="1E3A5F"/>
                 </a:solidFill>
               </a:rPr>
               <a:t>95533</a:t>
             </a:r>
-            <a:endParaRPr lang="en-US" sz="2400" dirty="0"/>
+            <a:endParaRPr lang="en-US" sz="2000" dirty="0"/>
           </a:p>
         </p:txBody>
       </p:sp>
@@ -4860,8 +4071,8 @@
         </p:nvSpPr>
         <p:spPr>
           <a:xfrm>
-            <a:off x="2286000" y="3566160"/>
-            <a:ext cx="7772400" cy="1005840"/>
+            <a:off x="1828800" y="3474720"/>
+            <a:ext cx="5486400" cy="914400"/>
           </a:xfrm>
           <a:prstGeom prst="roundRect">
             <a:avLst/>
@@ -4880,8 +4091,8 @@
         </p:nvSpPr>
         <p:spPr>
           <a:xfrm>
-            <a:off x="2560320" y="3749040"/>
-            <a:ext cx="4572000" cy="457200"/>
+            <a:off x="2103120" y="3703320"/>
+            <a:ext cx="2743200" cy="457200"/>
           </a:xfrm>
           <a:prstGeom prst="rect">
             <a:avLst/>
@@ -4897,14 +4108,14 @@
               <a:buNone/>
             </a:pPr>
             <a:r>
-              <a:rPr lang="en-US" sz="1800" dirty="0">
-                <a:solidFill>
-                  <a:srgbClr val="1A1A1A"/>
-                </a:solidFill>
-              </a:rPr>
-              <a:t>招商銀行客服</a:t>
-            </a:r>
-            <a:endParaRPr lang="en-US" sz="1800" dirty="0"/>
+              <a:rPr lang="en-US" sz="1400" dirty="0">
+                <a:solidFill>
+                  <a:srgbClr val="212121"/>
+                </a:solidFill>
+              </a:rPr>
+              <a:t>招商銀行</a:t>
+            </a:r>
+            <a:endParaRPr lang="en-US" sz="1400" dirty="0"/>
           </a:p>
         </p:txBody>
       </p:sp>
@@ -4916,8 +4127,8 @@
         </p:nvSpPr>
         <p:spPr>
           <a:xfrm>
-            <a:off x="6858000" y="3749040"/>
-            <a:ext cx="2743200" cy="640080"/>
+            <a:off x="5029200" y="3657600"/>
+            <a:ext cx="2103120" cy="548640"/>
           </a:xfrm>
           <a:prstGeom prst="rect">
             <a:avLst/>
@@ -4933,142 +4144,14 @@
               <a:buNone/>
             </a:pPr>
             <a:r>
-              <a:rPr lang="en-US" sz="2400" b="1" dirty="0">
+              <a:rPr lang="en-US" sz="2000" b="1" dirty="0">
                 <a:solidFill>
                   <a:srgbClr val="1E3A5F"/>
                 </a:solidFill>
               </a:rPr>
               <a:t>95555</a:t>
             </a:r>
-            <a:endParaRPr lang="en-US" sz="2400" dirty="0"/>
-          </a:p>
-        </p:txBody>
-      </p:sp>
-      <p:sp>
-        <p:nvSpPr>
-          <p:cNvPr id="12" name="Shape 10"/>
-          <p:cNvSpPr/>
-          <p:nvPr/>
-        </p:nvSpPr>
-        <p:spPr>
-          <a:xfrm>
-            <a:off x="2286000" y="4754880"/>
-            <a:ext cx="7772400" cy="1005840"/>
-          </a:xfrm>
-          <a:prstGeom prst="roundRect">
-            <a:avLst/>
-          </a:prstGeom>
-          <a:solidFill>
-            <a:srgbClr val="FFFFFF"/>
-          </a:solidFill>
-          <a:ln/>
-        </p:spPr>
-      </p:sp>
-      <p:sp>
-        <p:nvSpPr>
-          <p:cNvPr id="13" name="Text 11"/>
-          <p:cNvSpPr/>
-          <p:nvPr/>
-        </p:nvSpPr>
-        <p:spPr>
-          <a:xfrm>
-            <a:off x="2560320" y="4937760"/>
-            <a:ext cx="4572000" cy="457200"/>
-          </a:xfrm>
-          <a:prstGeom prst="rect">
-            <a:avLst/>
-          </a:prstGeom>
-          <a:noFill/>
-          <a:ln/>
-        </p:spPr>
-        <p:txBody>
-          <a:bodyPr wrap="square" rtlCol="0" anchor="ctr"/>
-          <a:lstStyle/>
-          <a:p>
-            <a:pPr indent="0" marL="0">
-              <a:buNone/>
-            </a:pPr>
-            <a:r>
-              <a:rPr lang="en-US" sz="1800" dirty="0">
-                <a:solidFill>
-                  <a:srgbClr val="1A1A1A"/>
-                </a:solidFill>
-              </a:rPr>
-              <a:t>大陸區號</a:t>
-            </a:r>
-            <a:endParaRPr lang="en-US" sz="1800" dirty="0"/>
-          </a:p>
-        </p:txBody>
-      </p:sp>
-      <p:sp>
-        <p:nvSpPr>
-          <p:cNvPr id="14" name="Text 12"/>
-          <p:cNvSpPr/>
-          <p:nvPr/>
-        </p:nvSpPr>
-        <p:spPr>
-          <a:xfrm>
-            <a:off x="6858000" y="4937760"/>
-            <a:ext cx="2743200" cy="640080"/>
-          </a:xfrm>
-          <a:prstGeom prst="rect">
-            <a:avLst/>
-          </a:prstGeom>
-          <a:noFill/>
-          <a:ln/>
-        </p:spPr>
-        <p:txBody>
-          <a:bodyPr wrap="square" rtlCol="0" anchor="ctr"/>
-          <a:lstStyle/>
-          <a:p>
-            <a:pPr algn="r" indent="0" marL="0">
-              <a:buNone/>
-            </a:pPr>
-            <a:r>
-              <a:rPr lang="en-US" sz="2400" b="1" dirty="0">
-                <a:solidFill>
-                  <a:srgbClr val="1E3A5F"/>
-                </a:solidFill>
-              </a:rPr>
-              <a:t>+86</a:t>
-            </a:r>
-            <a:endParaRPr lang="en-US" sz="2400" dirty="0"/>
-          </a:p>
-        </p:txBody>
-      </p:sp>
-      <p:sp>
-        <p:nvSpPr>
-          <p:cNvPr id="15" name="Text 13"/>
-          <p:cNvSpPr/>
-          <p:nvPr/>
-        </p:nvSpPr>
-        <p:spPr>
-          <a:xfrm>
-            <a:off x="457200" y="5943600"/>
-            <a:ext cx="8686800" cy="457200"/>
-          </a:xfrm>
-          <a:prstGeom prst="rect">
-            <a:avLst/>
-          </a:prstGeom>
-          <a:noFill/>
-          <a:ln/>
-        </p:spPr>
-        <p:txBody>
-          <a:bodyPr wrap="square" rtlCol="0" anchor="ctr"/>
-          <a:lstStyle/>
-          <a:p>
-            <a:pPr algn="ctr" indent="0" marL="0">
-              <a:buNone/>
-            </a:pPr>
-            <a:r>
-              <a:rPr lang="en-US" sz="1800" dirty="0">
-                <a:solidFill>
-                  <a:srgbClr val="E3F2FD"/>
-                </a:solidFill>
-              </a:rPr>
-              <a:t>感謝使用</a:t>
-            </a:r>
-            <a:endParaRPr lang="en-US" sz="1800" dirty="0"/>
+            <a:endParaRPr lang="en-US" sz="2000" dirty="0"/>
           </a:p>
         </p:txBody>
       </p:sp>
